--- a/Portofolio-Analisis-HR-Attrition.pptx
+++ b/Portofolio-Analisis-HR-Attrition.pptx
@@ -3107,17 +3107,267 @@
       <p:grpSpPr/>
       <p:sp>
         <p:nvSpPr>
-          <p:cNvPr id="2" name="Rectangle 1"/>
-          <p:cNvSpPr/>
-          <p:nvPr/>
-        </p:nvSpPr>
-        <p:spPr>
-          <a:xfrm>
-            <a:off x="8138160" y="0"/>
-            <a:ext cx="4053535" cy="6858000"/>
+          <p:cNvPr id="2" name="TextBox 1"/>
+          <p:cNvSpPr txBox="1"/>
+          <p:nvPr/>
+        </p:nvSpPr>
+        <p:spPr>
+          <a:xfrm>
+            <a:off x="502920" y="868680"/>
+            <a:ext cx="6400800" cy="2011680"/>
           </a:xfrm>
           <a:prstGeom prst="rect">
             <a:avLst/>
+          </a:prstGeom>
+          <a:noFill/>
+        </p:spPr>
+        <p:txBody>
+          <a:bodyPr wrap="square" anchor="t" lIns="0" rIns="0" tIns="0" bIns="0">
+            <a:spAutoFit/>
+          </a:bodyPr>
+          <a:lstStyle/>
+          <a:p>
+            <a:pPr>
+              <a:lnSpc>
+                <a:spcPct val="105000"/>
+              </a:lnSpc>
+              <a:spcBef>
+                <a:spcPts val="0"/>
+              </a:spcBef>
+              <a:spcAft>
+                <a:spcPts val="0"/>
+              </a:spcAft>
+            </a:pPr>
+            <a:r>
+              <a:rPr sz="3800" b="1">
+                <a:solidFill>
+                  <a:srgbClr val="0B2A44"/>
+                </a:solidFill>
+                <a:latin typeface="Noto Sans"/>
+              </a:rPr>
+              <a:t>Analisis HR Attrition</a:t>
+            </a:r>
+          </a:p>
+          <a:p>
+            <a:pPr>
+              <a:lnSpc>
+                <a:spcPct val="105000"/>
+              </a:lnSpc>
+              <a:spcBef>
+                <a:spcPts val="0"/>
+              </a:spcBef>
+              <a:spcAft>
+                <a:spcPts val="0"/>
+              </a:spcAft>
+            </a:pPr>
+            <a:r>
+              <a:rPr sz="3800" b="1">
+                <a:solidFill>
+                  <a:srgbClr val="0E4D7A"/>
+                </a:solidFill>
+                <a:latin typeface="Noto Sans"/>
+              </a:rPr>
+              <a:t>People Analytics</a:t>
+            </a:r>
+          </a:p>
+        </p:txBody>
+      </p:sp>
+      <p:sp>
+        <p:nvSpPr>
+          <p:cNvPr id="3" name="TextBox 2"/>
+          <p:cNvSpPr txBox="1"/>
+          <p:nvPr/>
+        </p:nvSpPr>
+        <p:spPr>
+          <a:xfrm>
+            <a:off x="502920" y="2606040"/>
+            <a:ext cx="5852160" cy="1188720"/>
+          </a:xfrm>
+          <a:prstGeom prst="rect">
+            <a:avLst/>
+          </a:prstGeom>
+          <a:noFill/>
+        </p:spPr>
+        <p:txBody>
+          <a:bodyPr wrap="square" anchor="t" lIns="0" rIns="0" tIns="0" bIns="0">
+            <a:spAutoFit/>
+          </a:bodyPr>
+          <a:lstStyle/>
+          <a:p>
+            <a:pPr>
+              <a:lnSpc>
+                <a:spcPct val="113000"/>
+              </a:lnSpc>
+              <a:spcBef>
+                <a:spcPts val="0"/>
+              </a:spcBef>
+              <a:spcAft>
+                <a:spcPts val="0"/>
+              </a:spcAft>
+            </a:pPr>
+            <a:r>
+              <a:rPr sz="1750" b="0">
+                <a:solidFill>
+                  <a:srgbClr val="0B2A44"/>
+                </a:solidFill>
+                <a:latin typeface="Noto Sans"/>
+              </a:rPr>
+              <a:t>Kenapa karyawan resign, siapa yang paling berisiko, dan apa pemicu terbesarnya.</a:t>
+            </a:r>
+          </a:p>
+        </p:txBody>
+      </p:sp>
+      <p:sp>
+        <p:nvSpPr>
+          <p:cNvPr id="4" name="TextBox 3"/>
+          <p:cNvSpPr txBox="1"/>
+          <p:nvPr/>
+        </p:nvSpPr>
+        <p:spPr>
+          <a:xfrm>
+            <a:off x="502920" y="4114800"/>
+            <a:ext cx="5943600" cy="914400"/>
+          </a:xfrm>
+          <a:prstGeom prst="rect">
+            <a:avLst/>
+          </a:prstGeom>
+          <a:noFill/>
+        </p:spPr>
+        <p:txBody>
+          <a:bodyPr wrap="square" anchor="t" lIns="0" rIns="0" tIns="0" bIns="0">
+            <a:spAutoFit/>
+          </a:bodyPr>
+          <a:lstStyle/>
+          <a:p>
+            <a:pPr>
+              <a:lnSpc>
+                <a:spcPct val="113000"/>
+              </a:lnSpc>
+              <a:spcBef>
+                <a:spcPts val="0"/>
+              </a:spcBef>
+              <a:spcAft>
+                <a:spcPts val="0"/>
+              </a:spcAft>
+            </a:pPr>
+            <a:r>
+              <a:rPr sz="1300" b="0">
+                <a:solidFill>
+                  <a:srgbClr val="0B2A44"/>
+                </a:solidFill>
+                <a:latin typeface="Noto Sans"/>
+              </a:rPr>
+              <a:t>Studi kasus IBM HR Analytics Employee Attrition, dianalisis dengan SQL (SQLite) dan Python.</a:t>
+            </a:r>
+          </a:p>
+        </p:txBody>
+      </p:sp>
+      <p:sp>
+        <p:nvSpPr>
+          <p:cNvPr id="5" name="TextBox 4"/>
+          <p:cNvSpPr txBox="1"/>
+          <p:nvPr/>
+        </p:nvSpPr>
+        <p:spPr>
+          <a:xfrm>
+            <a:off x="502920" y="5989320"/>
+            <a:ext cx="5943600" cy="457200"/>
+          </a:xfrm>
+          <a:prstGeom prst="rect">
+            <a:avLst/>
+          </a:prstGeom>
+          <a:noFill/>
+        </p:spPr>
+        <p:txBody>
+          <a:bodyPr wrap="square" anchor="t" lIns="0" rIns="0" tIns="0" bIns="0">
+            <a:spAutoFit/>
+          </a:bodyPr>
+          <a:lstStyle/>
+          <a:p>
+            <a:pPr>
+              <a:lnSpc>
+                <a:spcPct val="113000"/>
+              </a:lnSpc>
+              <a:spcBef>
+                <a:spcPts val="0"/>
+              </a:spcBef>
+              <a:spcAft>
+                <a:spcPts val="0"/>
+              </a:spcAft>
+            </a:pPr>
+            <a:r>
+              <a:rPr sz="1400" b="1">
+                <a:solidFill>
+                  <a:srgbClr val="0E4D7A"/>
+                </a:solidFill>
+                <a:latin typeface="Noto Sans"/>
+              </a:rPr>
+              <a:t>BAGHIZ ASSHIDDIQIE ARASYA</a:t>
+            </a:r>
+          </a:p>
+        </p:txBody>
+      </p:sp>
+      <p:sp>
+        <p:nvSpPr>
+          <p:cNvPr id="6" name="Rounded Rectangle 5"/>
+          <p:cNvSpPr/>
+          <p:nvPr/>
+        </p:nvSpPr>
+        <p:spPr>
+          <a:xfrm>
+            <a:off x="6885432" y="850392"/>
+            <a:ext cx="4892040" cy="4160520"/>
+          </a:xfrm>
+          <a:prstGeom prst="roundRect">
+            <a:avLst>
+              <a:gd name="adj" fmla="val 5500"/>
+            </a:avLst>
+          </a:prstGeom>
+          <a:solidFill>
+            <a:srgbClr val="F5C542"/>
+          </a:solidFill>
+          <a:ln>
+            <a:noFill/>
+          </a:ln>
+          <a:effectLst/>
+        </p:spPr>
+        <p:style>
+          <a:lnRef idx="1">
+            <a:schemeClr val="accent1"/>
+          </a:lnRef>
+          <a:fillRef idx="3">
+            <a:schemeClr val="accent1"/>
+          </a:fillRef>
+          <a:effectRef idx="2">
+            <a:schemeClr val="accent1"/>
+          </a:effectRef>
+          <a:fontRef idx="minor">
+            <a:schemeClr val="lt1"/>
+          </a:fontRef>
+        </p:style>
+        <p:txBody>
+          <a:bodyPr rtlCol="0" anchor="ctr"/>
+          <a:lstStyle/>
+          <a:p>
+            <a:pPr algn="ctr"/>
+          </a:p>
+        </p:txBody>
+      </p:sp>
+      <p:sp>
+        <p:nvSpPr>
+          <p:cNvPr id="7" name="Rounded Rectangle 6"/>
+          <p:cNvSpPr/>
+          <p:nvPr/>
+        </p:nvSpPr>
+        <p:spPr>
+          <a:xfrm>
+            <a:off x="6812280" y="777240"/>
+            <a:ext cx="4892040" cy="4160520"/>
+          </a:xfrm>
+          <a:prstGeom prst="roundRect">
+            <a:avLst>
+              <a:gd name="adj" fmla="val 5500"/>
+            </a:avLst>
           </a:prstGeom>
           <a:solidFill>
             <a:srgbClr val="0E4D7A"/>
@@ -3151,20 +3401,133 @@
       </p:sp>
       <p:sp>
         <p:nvSpPr>
-          <p:cNvPr id="3" name="Rectangle 2"/>
-          <p:cNvSpPr/>
-          <p:nvPr/>
-        </p:nvSpPr>
-        <p:spPr>
-          <a:xfrm>
-            <a:off x="8138160" y="0"/>
-            <a:ext cx="4053535" cy="128016"/>
+          <p:cNvPr id="8" name="TextBox 7"/>
+          <p:cNvSpPr txBox="1"/>
+          <p:nvPr/>
+        </p:nvSpPr>
+        <p:spPr>
+          <a:xfrm>
+            <a:off x="7269480" y="1234440"/>
+            <a:ext cx="4023360" cy="3474720"/>
           </a:xfrm>
           <a:prstGeom prst="rect">
             <a:avLst/>
           </a:prstGeom>
+          <a:noFill/>
+        </p:spPr>
+        <p:txBody>
+          <a:bodyPr wrap="square" anchor="t" lIns="0" rIns="0" tIns="0" bIns="0">
+            <a:spAutoFit/>
+          </a:bodyPr>
+          <a:lstStyle/>
+          <a:p>
+            <a:pPr>
+              <a:lnSpc>
+                <a:spcPct val="113000"/>
+              </a:lnSpc>
+              <a:spcBef>
+                <a:spcPts val="0"/>
+              </a:spcBef>
+              <a:spcAft>
+                <a:spcPts val="600"/>
+              </a:spcAft>
+            </a:pPr>
+            <a:r>
+              <a:rPr sz="1250" b="1">
+                <a:solidFill>
+                  <a:srgbClr val="DCE9F2"/>
+                </a:solidFill>
+                <a:latin typeface="Noto Sans"/>
+              </a:rPr>
+              <a:t>ATTRITION RATE KESELURUHAN</a:t>
+            </a:r>
+          </a:p>
+          <a:p>
+            <a:pPr>
+              <a:lnSpc>
+                <a:spcPct val="113000"/>
+              </a:lnSpc>
+              <a:spcBef>
+                <a:spcPts val="0"/>
+              </a:spcBef>
+              <a:spcAft>
+                <a:spcPts val="400"/>
+              </a:spcAft>
+            </a:pPr>
+            <a:r>
+              <a:rPr sz="7200" b="1">
+                <a:solidFill>
+                  <a:srgbClr val="F5C542"/>
+                </a:solidFill>
+                <a:latin typeface="Noto Sans"/>
+              </a:rPr>
+              <a:t>16,1%</a:t>
+            </a:r>
+          </a:p>
+          <a:p>
+            <a:pPr>
+              <a:lnSpc>
+                <a:spcPct val="113000"/>
+              </a:lnSpc>
+              <a:spcBef>
+                <a:spcPts val="0"/>
+              </a:spcBef>
+              <a:spcAft>
+                <a:spcPts val="800"/>
+              </a:spcAft>
+            </a:pPr>
+            <a:r>
+              <a:rPr sz="1900" b="1">
+                <a:solidFill>
+                  <a:srgbClr val="FFFFFF"/>
+                </a:solidFill>
+                <a:latin typeface="Noto Sans"/>
+              </a:rPr>
+              <a:t>237 dari 1.470 karyawan resign</a:t>
+            </a:r>
+          </a:p>
+          <a:p>
+            <a:pPr>
+              <a:lnSpc>
+                <a:spcPct val="113000"/>
+              </a:lnSpc>
+              <a:spcBef>
+                <a:spcPts val="0"/>
+              </a:spcBef>
+              <a:spcAft>
+                <a:spcPts val="0"/>
+              </a:spcAft>
+            </a:pPr>
+            <a:r>
+              <a:rPr sz="1350" b="0">
+                <a:solidFill>
+                  <a:srgbClr val="DCE9F2"/>
+                </a:solidFill>
+                <a:latin typeface="Noto Sans"/>
+              </a:rPr>
+              <a:t>Peran paling berisiko: Sales Representative dengan 39,8%. Lembur menaikkan risiko resign hampir tiga kali lipat.</a:t>
+            </a:r>
+          </a:p>
+        </p:txBody>
+      </p:sp>
+      <p:sp>
+        <p:nvSpPr>
+          <p:cNvPr id="9" name="Rounded Rectangle 8"/>
+          <p:cNvSpPr/>
+          <p:nvPr/>
+        </p:nvSpPr>
+        <p:spPr>
+          <a:xfrm>
+            <a:off x="6812280" y="5230368"/>
+            <a:ext cx="4892040" cy="713232"/>
+          </a:xfrm>
+          <a:prstGeom prst="roundRect">
+            <a:avLst>
+              <a:gd name="adj" fmla="val 5500"/>
+            </a:avLst>
+          </a:prstGeom>
           <a:solidFill>
-            <a:srgbClr val="F5C542"/>
+            <a:srgbClr val="E5322D"/>
           </a:solidFill>
           <a:ln>
             <a:noFill/>
@@ -3195,14 +3558,14 @@
       </p:sp>
       <p:sp>
         <p:nvSpPr>
-          <p:cNvPr id="4" name="TextBox 3"/>
+          <p:cNvPr id="10" name="TextBox 9"/>
           <p:cNvSpPr txBox="1"/>
           <p:nvPr/>
         </p:nvSpPr>
         <p:spPr>
           <a:xfrm>
-            <a:off x="8549640" y="2148840"/>
-            <a:ext cx="3337560" cy="2377440"/>
+            <a:off x="7086600" y="5358384"/>
+            <a:ext cx="4434840" cy="502920"/>
           </a:xfrm>
           <a:prstGeom prst="rect">
             <a:avLst/>
@@ -3210,210 +3573,30 @@
           <a:noFill/>
         </p:spPr>
         <p:txBody>
-          <a:bodyPr wrap="square">
+          <a:bodyPr wrap="square" anchor="t" lIns="0" rIns="0" tIns="0" bIns="0">
             <a:spAutoFit/>
           </a:bodyPr>
           <a:lstStyle/>
           <a:p>
             <a:pPr>
+              <a:lnSpc>
+                <a:spcPct val="113000"/>
+              </a:lnSpc>
               <a:spcBef>
                 <a:spcPts val="0"/>
               </a:spcBef>
               <a:spcAft>
-                <a:spcPts val="400"/>
+                <a:spcPts val="0"/>
               </a:spcAft>
             </a:pPr>
             <a:r>
-              <a:rPr sz="6600" b="1" i="0">
-                <a:solidFill>
-                  <a:srgbClr val="F5C542"/>
+              <a:rPr sz="1250" b="1">
+                <a:solidFill>
+                  <a:srgbClr val="FFFFFF"/>
                 </a:solidFill>
                 <a:latin typeface="Noto Sans"/>
               </a:rPr>
-              <a:t>16,1%</a:t>
-            </a:r>
-          </a:p>
-          <a:p>
-            <a:pPr>
-              <a:spcBef>
-                <a:spcPts val="0"/>
-              </a:spcBef>
-              <a:spcAft>
-                <a:spcPts val="200"/>
-              </a:spcAft>
-            </a:pPr>
-            <a:r>
-              <a:rPr sz="1500" b="0" i="0">
-                <a:solidFill>
-                  <a:srgbClr val="FFFFFF"/>
-                </a:solidFill>
-                <a:latin typeface="Noto Sans"/>
-              </a:rPr>
-              <a:t>attrition rate keseluruhan</a:t>
-            </a:r>
-          </a:p>
-          <a:p>
-            <a:pPr>
-              <a:spcBef>
-                <a:spcPts val="0"/>
-              </a:spcBef>
-              <a:spcAft>
-                <a:spcPts val="0"/>
-              </a:spcAft>
-            </a:pPr>
-            <a:r>
-              <a:rPr sz="1300" b="0" i="0">
-                <a:solidFill>
-                  <a:srgbClr val="C9D6E2"/>
-                </a:solidFill>
-                <a:latin typeface="Noto Sans"/>
-              </a:rPr>
-              <a:t>237 dari 1.470 karyawan resign</a:t>
-            </a:r>
-          </a:p>
-        </p:txBody>
-      </p:sp>
-      <p:sp>
-        <p:nvSpPr>
-          <p:cNvPr id="5" name="TextBox 4"/>
-          <p:cNvSpPr txBox="1"/>
-          <p:nvPr/>
-        </p:nvSpPr>
-        <p:spPr>
-          <a:xfrm>
-            <a:off x="822960" y="1417320"/>
-            <a:ext cx="6858000" cy="2103120"/>
-          </a:xfrm>
-          <a:prstGeom prst="rect">
-            <a:avLst/>
-          </a:prstGeom>
-          <a:noFill/>
-        </p:spPr>
-        <p:txBody>
-          <a:bodyPr wrap="square">
-            <a:spAutoFit/>
-          </a:bodyPr>
-          <a:lstStyle/>
-          <a:p>
-            <a:pPr>
-              <a:spcBef>
-                <a:spcPts val="0"/>
-              </a:spcBef>
-              <a:spcAft>
-                <a:spcPts val="800"/>
-              </a:spcAft>
-            </a:pPr>
-            <a:r>
-              <a:rPr sz="4000" b="1" i="0">
-                <a:solidFill>
-                  <a:srgbClr val="0B2A44"/>
-                </a:solidFill>
-                <a:latin typeface="Noto Sans"/>
-              </a:rPr>
-              <a:t>Analisis HR Attrition dengan SQL dan Python</a:t>
-            </a:r>
-          </a:p>
-        </p:txBody>
-      </p:sp>
-      <p:sp>
-        <p:nvSpPr>
-          <p:cNvPr id="6" name="TextBox 5"/>
-          <p:cNvSpPr txBox="1"/>
-          <p:nvPr/>
-        </p:nvSpPr>
-        <p:spPr>
-          <a:xfrm>
-            <a:off x="822960" y="3429000"/>
-            <a:ext cx="6675120" cy="731520"/>
-          </a:xfrm>
-          <a:prstGeom prst="rect">
-            <a:avLst/>
-          </a:prstGeom>
-          <a:noFill/>
-        </p:spPr>
-        <p:txBody>
-          <a:bodyPr wrap="square">
-            <a:spAutoFit/>
-          </a:bodyPr>
-          <a:lstStyle/>
-          <a:p>
-            <a:pPr>
-              <a:spcBef>
-                <a:spcPts val="0"/>
-              </a:spcBef>
-              <a:spcAft>
-                <a:spcPts val="800"/>
-              </a:spcAft>
-            </a:pPr>
-            <a:r>
-              <a:rPr sz="1800" b="0" i="0">
-                <a:solidFill>
-                  <a:srgbClr val="0E4D7A"/>
-                </a:solidFill>
-                <a:latin typeface="Noto Sans"/>
-              </a:rPr>
-              <a:t>Studi Kasus: IBM HR Analytics Employee Attrition Dataset</a:t>
-            </a:r>
-          </a:p>
-        </p:txBody>
-      </p:sp>
-      <p:sp>
-        <p:nvSpPr>
-          <p:cNvPr id="7" name="TextBox 6"/>
-          <p:cNvSpPr txBox="1"/>
-          <p:nvPr/>
-        </p:nvSpPr>
-        <p:spPr>
-          <a:xfrm>
-            <a:off x="822960" y="5349240"/>
-            <a:ext cx="6675120" cy="1005840"/>
-          </a:xfrm>
-          <a:prstGeom prst="rect">
-            <a:avLst/>
-          </a:prstGeom>
-          <a:noFill/>
-        </p:spPr>
-        <p:txBody>
-          <a:bodyPr wrap="square">
-            <a:spAutoFit/>
-          </a:bodyPr>
-          <a:lstStyle/>
-          <a:p>
-            <a:pPr>
-              <a:spcBef>
-                <a:spcPts val="0"/>
-              </a:spcBef>
-              <a:spcAft>
-                <a:spcPts val="400"/>
-              </a:spcAft>
-            </a:pPr>
-            <a:r>
-              <a:rPr sz="2000" b="1" i="0">
-                <a:solidFill>
-                  <a:srgbClr val="0E4D7A"/>
-                </a:solidFill>
-                <a:latin typeface="Noto Sans"/>
-              </a:rPr>
-              <a:t>BAGHIZ ASSHIDDIQIE ARASYA</a:t>
-            </a:r>
-          </a:p>
-          <a:p>
-            <a:pPr>
-              <a:spcBef>
-                <a:spcPts val="0"/>
-              </a:spcBef>
-              <a:spcAft>
-                <a:spcPts val="0"/>
-              </a:spcAft>
-            </a:pPr>
-            <a:r>
-              <a:rPr sz="1300" b="0" i="0">
-                <a:solidFill>
-                  <a:srgbClr val="54626F"/>
-                </a:solidFill>
-                <a:latin typeface="Noto Sans"/>
-              </a:rPr>
-              <a:t>Data Analyst Portfolio Project</a:t>
+              <a:t>Plus paket dashboard Power BI: star schema, DAX, panduan rakit.</a:t>
             </a:r>
           </a:p>
         </p:txBody>
@@ -3432,7 +3615,7 @@
     <p:bg>
       <p:bgPr>
         <a:solidFill>
-          <a:srgbClr val="0E4D7A"/>
+          <a:srgbClr val="F7F4EE"/>
         </a:solidFill>
         <a:effectLst/>
       </p:bgPr>
@@ -3446,20 +3629,67 @@
       <p:grpSpPr/>
       <p:sp>
         <p:nvSpPr>
-          <p:cNvPr id="2" name="Rectangle 1"/>
-          <p:cNvSpPr/>
-          <p:nvPr/>
-        </p:nvSpPr>
-        <p:spPr>
-          <a:xfrm>
-            <a:off x="822960" y="777240"/>
-            <a:ext cx="502920" cy="118872"/>
+          <p:cNvPr id="2" name="TextBox 1"/>
+          <p:cNvSpPr txBox="1"/>
+          <p:nvPr/>
+        </p:nvSpPr>
+        <p:spPr>
+          <a:xfrm>
+            <a:off x="502920" y="384048"/>
+            <a:ext cx="11155680" cy="914400"/>
           </a:xfrm>
           <a:prstGeom prst="rect">
             <a:avLst/>
           </a:prstGeom>
+          <a:noFill/>
+        </p:spPr>
+        <p:txBody>
+          <a:bodyPr wrap="square" anchor="t" lIns="0" rIns="0" tIns="0" bIns="0">
+            <a:spAutoFit/>
+          </a:bodyPr>
+          <a:lstStyle/>
+          <a:p>
+            <a:pPr>
+              <a:lnSpc>
+                <a:spcPct val="113000"/>
+              </a:lnSpc>
+              <a:spcBef>
+                <a:spcPts val="0"/>
+              </a:spcBef>
+              <a:spcAft>
+                <a:spcPts val="0"/>
+              </a:spcAft>
+            </a:pPr>
+            <a:r>
+              <a:rPr sz="3100" b="1">
+                <a:solidFill>
+                  <a:srgbClr val="0B2A44"/>
+                </a:solidFill>
+                <a:latin typeface="Noto Sans"/>
+              </a:rPr>
+              <a:t>Penutup</a:t>
+            </a:r>
+          </a:p>
+        </p:txBody>
+      </p:sp>
+      <p:sp>
+        <p:nvSpPr>
+          <p:cNvPr id="3" name="Rounded Rectangle 2"/>
+          <p:cNvSpPr/>
+          <p:nvPr/>
+        </p:nvSpPr>
+        <p:spPr>
+          <a:xfrm>
+            <a:off x="521207" y="1097280"/>
+            <a:ext cx="777240" cy="82296"/>
+          </a:xfrm>
+          <a:prstGeom prst="roundRect">
+            <a:avLst>
+              <a:gd name="adj" fmla="val 5500"/>
+            </a:avLst>
+          </a:prstGeom>
           <a:solidFill>
-            <a:srgbClr val="F5C542"/>
+            <a:srgbClr val="E5322D"/>
           </a:solidFill>
           <a:ln>
             <a:noFill/>
@@ -3490,14 +3720,106 @@
       </p:sp>
       <p:sp>
         <p:nvSpPr>
-          <p:cNvPr id="3" name="TextBox 2"/>
+          <p:cNvPr id="4" name="Rounded Rectangle 3"/>
+          <p:cNvSpPr/>
+          <p:nvPr/>
+        </p:nvSpPr>
+        <p:spPr>
+          <a:xfrm>
+            <a:off x="566928" y="1435608"/>
+            <a:ext cx="6720840" cy="3246120"/>
+          </a:xfrm>
+          <a:prstGeom prst="roundRect">
+            <a:avLst>
+              <a:gd name="adj" fmla="val 5500"/>
+            </a:avLst>
+          </a:prstGeom>
+          <a:solidFill>
+            <a:srgbClr val="DFD5C0"/>
+          </a:solidFill>
+          <a:ln>
+            <a:noFill/>
+          </a:ln>
+          <a:effectLst/>
+        </p:spPr>
+        <p:style>
+          <a:lnRef idx="1">
+            <a:schemeClr val="accent1"/>
+          </a:lnRef>
+          <a:fillRef idx="3">
+            <a:schemeClr val="accent1"/>
+          </a:fillRef>
+          <a:effectRef idx="2">
+            <a:schemeClr val="accent1"/>
+          </a:effectRef>
+          <a:fontRef idx="minor">
+            <a:schemeClr val="lt1"/>
+          </a:fontRef>
+        </p:style>
+        <p:txBody>
+          <a:bodyPr rtlCol="0" anchor="ctr"/>
+          <a:lstStyle/>
+          <a:p>
+            <a:pPr algn="ctr"/>
+          </a:p>
+        </p:txBody>
+      </p:sp>
+      <p:sp>
+        <p:nvSpPr>
+          <p:cNvPr id="5" name="Rounded Rectangle 4"/>
+          <p:cNvSpPr/>
+          <p:nvPr/>
+        </p:nvSpPr>
+        <p:spPr>
+          <a:xfrm>
+            <a:off x="502920" y="1371600"/>
+            <a:ext cx="6720840" cy="3246120"/>
+          </a:xfrm>
+          <a:prstGeom prst="roundRect">
+            <a:avLst>
+              <a:gd name="adj" fmla="val 5500"/>
+            </a:avLst>
+          </a:prstGeom>
+          <a:solidFill>
+            <a:srgbClr val="FDFBF6"/>
+          </a:solidFill>
+          <a:ln>
+            <a:noFill/>
+          </a:ln>
+          <a:effectLst/>
+        </p:spPr>
+        <p:style>
+          <a:lnRef idx="1">
+            <a:schemeClr val="accent1"/>
+          </a:lnRef>
+          <a:fillRef idx="3">
+            <a:schemeClr val="accent1"/>
+          </a:fillRef>
+          <a:effectRef idx="2">
+            <a:schemeClr val="accent1"/>
+          </a:effectRef>
+          <a:fontRef idx="minor">
+            <a:schemeClr val="lt1"/>
+          </a:fontRef>
+        </p:style>
+        <p:txBody>
+          <a:bodyPr rtlCol="0" anchor="ctr"/>
+          <a:lstStyle/>
+          <a:p>
+            <a:pPr algn="ctr"/>
+          </a:p>
+        </p:txBody>
+      </p:sp>
+      <p:sp>
+        <p:nvSpPr>
+          <p:cNvPr id="6" name="TextBox 5"/>
           <p:cNvSpPr txBox="1"/>
           <p:nvPr/>
         </p:nvSpPr>
         <p:spPr>
           <a:xfrm>
-            <a:off x="822960" y="1051560"/>
-            <a:ext cx="10515600" cy="822960"/>
+            <a:off x="868680" y="1691640"/>
+            <a:ext cx="6035040" cy="2697480"/>
           </a:xfrm>
           <a:prstGeom prst="rect">
             <a:avLst/>
@@ -3505,12 +3827,15 @@
           <a:noFill/>
         </p:spPr>
         <p:txBody>
-          <a:bodyPr wrap="square">
+          <a:bodyPr wrap="square" anchor="t" lIns="0" rIns="0" tIns="0" bIns="0">
             <a:spAutoFit/>
           </a:bodyPr>
           <a:lstStyle/>
           <a:p>
             <a:pPr>
+              <a:lnSpc>
+                <a:spcPct val="113000"/>
+              </a:lnSpc>
               <a:spcBef>
                 <a:spcPts val="0"/>
               </a:spcBef>
@@ -3519,27 +3844,95 @@
               </a:spcAft>
             </a:pPr>
             <a:r>
-              <a:rPr sz="3400" b="1" i="0">
-                <a:solidFill>
-                  <a:srgbClr val="FFFFFF"/>
+              <a:rPr sz="1600" b="1">
+                <a:solidFill>
+                  <a:srgbClr val="0E4D7A"/>
                 </a:solidFill>
                 <a:latin typeface="Noto Sans"/>
               </a:rPr>
               <a:t>Kesimpulan</a:t>
             </a:r>
           </a:p>
-        </p:txBody>
-      </p:sp>
-      <p:sp>
-        <p:nvSpPr>
-          <p:cNvPr id="4" name="TextBox 3"/>
+          <a:p>
+            <a:pPr>
+              <a:lnSpc>
+                <a:spcPct val="113000"/>
+              </a:lnSpc>
+              <a:spcBef>
+                <a:spcPts val="0"/>
+              </a:spcBef>
+              <a:spcAft>
+                <a:spcPts val="0"/>
+              </a:spcAft>
+            </a:pPr>
+            <a:r>
+              <a:rPr sz="1500" b="0">
+                <a:solidFill>
+                  <a:srgbClr val="0B2A44"/>
+                </a:solidFill>
+                <a:latin typeface="Noto Sans"/>
+              </a:rPr>
+              <a:t>Lembur, gaji rendah, dan masa kerja pendek adalah tiga pendorong resign terbesar. Fokus retensi pada Sales Representative, karyawan muda, dan dua tahun pertama masa kerja.</a:t>
+            </a:r>
+          </a:p>
+        </p:txBody>
+      </p:sp>
+      <p:sp>
+        <p:nvSpPr>
+          <p:cNvPr id="7" name="Rounded Rectangle 6"/>
+          <p:cNvSpPr/>
+          <p:nvPr/>
+        </p:nvSpPr>
+        <p:spPr>
+          <a:xfrm>
+            <a:off x="7543800" y="1371600"/>
+            <a:ext cx="4142232" cy="1536192"/>
+          </a:xfrm>
+          <a:prstGeom prst="roundRect">
+            <a:avLst>
+              <a:gd name="adj" fmla="val 5500"/>
+            </a:avLst>
+          </a:prstGeom>
+          <a:solidFill>
+            <a:srgbClr val="0E4D7A"/>
+          </a:solidFill>
+          <a:ln>
+            <a:noFill/>
+          </a:ln>
+          <a:effectLst/>
+        </p:spPr>
+        <p:style>
+          <a:lnRef idx="1">
+            <a:schemeClr val="accent1"/>
+          </a:lnRef>
+          <a:fillRef idx="3">
+            <a:schemeClr val="accent1"/>
+          </a:fillRef>
+          <a:effectRef idx="2">
+            <a:schemeClr val="accent1"/>
+          </a:effectRef>
+          <a:fontRef idx="minor">
+            <a:schemeClr val="lt1"/>
+          </a:fontRef>
+        </p:style>
+        <p:txBody>
+          <a:bodyPr rtlCol="0" anchor="ctr"/>
+          <a:lstStyle/>
+          <a:p>
+            <a:pPr algn="ctr"/>
+          </a:p>
+        </p:txBody>
+      </p:sp>
+      <p:sp>
+        <p:nvSpPr>
+          <p:cNvPr id="8" name="TextBox 7"/>
           <p:cNvSpPr txBox="1"/>
           <p:nvPr/>
         </p:nvSpPr>
         <p:spPr>
           <a:xfrm>
-            <a:off x="822960" y="2057400"/>
-            <a:ext cx="10515600" cy="2011680"/>
+            <a:off x="7863840" y="1572768"/>
+            <a:ext cx="3520440" cy="1188720"/>
           </a:xfrm>
           <a:prstGeom prst="rect">
             <a:avLst/>
@@ -3547,137 +3940,15 @@
           <a:noFill/>
         </p:spPr>
         <p:txBody>
-          <a:bodyPr wrap="square">
+          <a:bodyPr wrap="square" anchor="t" lIns="0" rIns="0" tIns="0" bIns="0">
             <a:spAutoFit/>
           </a:bodyPr>
           <a:lstStyle/>
           <a:p>
-            <a:pPr marL="171450" indent="-171450">
-              <a:spcBef>
-                <a:spcPts val="0"/>
-              </a:spcBef>
-              <a:spcAft>
-                <a:spcPts val="1200"/>
-              </a:spcAft>
-              <a:buChar char="•"/>
-            </a:pPr>
-            <a:r>
-              <a:rPr sz="1700" b="0" i="0">
-                <a:solidFill>
-                  <a:srgbClr val="FFFFFF"/>
-                </a:solidFill>
-                <a:latin typeface="Noto Sans"/>
-              </a:rPr>
-              <a:t>Lembur, gaji rendah, dan masa kerja pendek adalah tiga pendorong resign terbesar</a:t>
-            </a:r>
-          </a:p>
-          <a:p>
-            <a:pPr marL="171450" indent="-171450">
-              <a:spcBef>
-                <a:spcPts val="0"/>
-              </a:spcBef>
-              <a:spcAft>
-                <a:spcPts val="1200"/>
-              </a:spcAft>
-              <a:buChar char="•"/>
-            </a:pPr>
-            <a:r>
-              <a:rPr sz="1700" b="0" i="0">
-                <a:solidFill>
-                  <a:srgbClr val="FFFFFF"/>
-                </a:solidFill>
-                <a:latin typeface="Noto Sans"/>
-              </a:rPr>
-              <a:t>Fokus retensi pada Sales Representative, karyawan muda, dan dua tahun pertama</a:t>
-            </a:r>
-          </a:p>
-          <a:p>
-            <a:pPr marL="171450" indent="-171450">
-              <a:spcBef>
-                <a:spcPts val="0"/>
-              </a:spcBef>
-              <a:spcAft>
-                <a:spcPts val="0"/>
-              </a:spcAft>
-              <a:buChar char="•"/>
-            </a:pPr>
-            <a:r>
-              <a:rPr sz="1700" b="0" i="0">
-                <a:solidFill>
-                  <a:srgbClr val="FFFFFF"/>
-                </a:solidFill>
-                <a:latin typeface="Noto Sans"/>
-              </a:rPr>
-              <a:t>Tech stack: SQL di SQLite, Python dengan pandas, matplotlib, dan seaborn</a:t>
-            </a:r>
-          </a:p>
-        </p:txBody>
-      </p:sp>
-      <p:sp>
-        <p:nvSpPr>
-          <p:cNvPr id="5" name="TextBox 4"/>
-          <p:cNvSpPr txBox="1"/>
-          <p:nvPr/>
-        </p:nvSpPr>
-        <p:spPr>
-          <a:xfrm>
-            <a:off x="822960" y="4709160"/>
-            <a:ext cx="10515600" cy="777240"/>
-          </a:xfrm>
-          <a:prstGeom prst="rect">
-            <a:avLst/>
-          </a:prstGeom>
-          <a:noFill/>
-        </p:spPr>
-        <p:txBody>
-          <a:bodyPr wrap="square">
-            <a:spAutoFit/>
-          </a:bodyPr>
-          <a:lstStyle/>
-          <a:p>
             <a:pPr>
-              <a:spcBef>
-                <a:spcPts val="0"/>
-              </a:spcBef>
-              <a:spcAft>
-                <a:spcPts val="800"/>
-              </a:spcAft>
-            </a:pPr>
-            <a:r>
-              <a:rPr sz="3000" b="1" i="0">
-                <a:solidFill>
-                  <a:srgbClr val="F5C542"/>
-                </a:solidFill>
-                <a:latin typeface="Noto Sans"/>
-              </a:rPr>
-              <a:t>BAGHIZ ASSHIDDIQIE ARASYA</a:t>
-            </a:r>
-          </a:p>
-        </p:txBody>
-      </p:sp>
-      <p:sp>
-        <p:nvSpPr>
-          <p:cNvPr id="6" name="TextBox 5"/>
-          <p:cNvSpPr txBox="1"/>
-          <p:nvPr/>
-        </p:nvSpPr>
-        <p:spPr>
-          <a:xfrm>
-            <a:off x="822960" y="5623560"/>
-            <a:ext cx="10515600" cy="914400"/>
-          </a:xfrm>
-          <a:prstGeom prst="rect">
-            <a:avLst/>
-          </a:prstGeom>
-          <a:noFill/>
-        </p:spPr>
-        <p:txBody>
-          <a:bodyPr wrap="square">
-            <a:spAutoFit/>
-          </a:bodyPr>
-          <a:lstStyle/>
-          <a:p>
-            <a:pPr>
+              <a:lnSpc>
+                <a:spcPct val="113000"/>
+              </a:lnSpc>
               <a:spcBef>
                 <a:spcPts val="0"/>
               </a:spcBef>
@@ -3686,17 +3957,20 @@
               </a:spcAft>
             </a:pPr>
             <a:r>
-              <a:rPr sz="1500" b="0" i="0">
-                <a:solidFill>
-                  <a:srgbClr val="FFFFFF"/>
+              <a:rPr sz="1450" b="1">
+                <a:solidFill>
+                  <a:srgbClr val="F5C542"/>
                 </a:solidFill>
                 <a:latin typeface="Noto Sans"/>
               </a:rPr>
-              <a:t>Terbuka untuk peluang data analyst dan diskusi seputar people analytics.</a:t>
+              <a:t>Rekomendasi utama</a:t>
             </a:r>
           </a:p>
           <a:p>
             <a:pPr>
+              <a:lnSpc>
+                <a:spcPct val="113000"/>
+              </a:lnSpc>
               <a:spcBef>
                 <a:spcPts val="0"/>
               </a:spcBef>
@@ -3705,13 +3979,284 @@
               </a:spcAft>
             </a:pPr>
             <a:r>
-              <a:rPr sz="1500" b="0" i="0">
-                <a:solidFill>
-                  <a:srgbClr val="C9D6E2"/>
+              <a:rPr sz="1200" b="0">
+                <a:solidFill>
+                  <a:srgbClr val="DCE9F2"/>
+                </a:solidFill>
+                <a:latin typeface="Noto Sans"/>
+              </a:rPr>
+              <a:t>Onboarding terstruktur 2 tahun pertama; kelola lembur dengan ketat; tinjau gaji dan jalur promosi peran rawan; survei kepuasan sebagai pemicu intervensi dini.</a:t>
+            </a:r>
+          </a:p>
+        </p:txBody>
+      </p:sp>
+      <p:sp>
+        <p:nvSpPr>
+          <p:cNvPr id="9" name="Rounded Rectangle 8"/>
+          <p:cNvSpPr/>
+          <p:nvPr/>
+        </p:nvSpPr>
+        <p:spPr>
+          <a:xfrm>
+            <a:off x="7543800" y="3081528"/>
+            <a:ext cx="4142232" cy="1536192"/>
+          </a:xfrm>
+          <a:prstGeom prst="roundRect">
+            <a:avLst>
+              <a:gd name="adj" fmla="val 5500"/>
+            </a:avLst>
+          </a:prstGeom>
+          <a:solidFill>
+            <a:srgbClr val="FDFBF6"/>
+          </a:solidFill>
+          <a:ln>
+            <a:noFill/>
+          </a:ln>
+          <a:effectLst/>
+        </p:spPr>
+        <p:style>
+          <a:lnRef idx="1">
+            <a:schemeClr val="accent1"/>
+          </a:lnRef>
+          <a:fillRef idx="3">
+            <a:schemeClr val="accent1"/>
+          </a:fillRef>
+          <a:effectRef idx="2">
+            <a:schemeClr val="accent1"/>
+          </a:effectRef>
+          <a:fontRef idx="minor">
+            <a:schemeClr val="lt1"/>
+          </a:fontRef>
+        </p:style>
+        <p:txBody>
+          <a:bodyPr rtlCol="0" anchor="ctr"/>
+          <a:lstStyle/>
+          <a:p>
+            <a:pPr algn="ctr"/>
+          </a:p>
+        </p:txBody>
+      </p:sp>
+      <p:sp>
+        <p:nvSpPr>
+          <p:cNvPr id="10" name="TextBox 9"/>
+          <p:cNvSpPr txBox="1"/>
+          <p:nvPr/>
+        </p:nvSpPr>
+        <p:spPr>
+          <a:xfrm>
+            <a:off x="7863840" y="3282696"/>
+            <a:ext cx="3520440" cy="1188720"/>
+          </a:xfrm>
+          <a:prstGeom prst="rect">
+            <a:avLst/>
+          </a:prstGeom>
+          <a:noFill/>
+        </p:spPr>
+        <p:txBody>
+          <a:bodyPr wrap="square" anchor="t" lIns="0" rIns="0" tIns="0" bIns="0">
+            <a:spAutoFit/>
+          </a:bodyPr>
+          <a:lstStyle/>
+          <a:p>
+            <a:pPr>
+              <a:lnSpc>
+                <a:spcPct val="113000"/>
+              </a:lnSpc>
+              <a:spcBef>
+                <a:spcPts val="0"/>
+              </a:spcBef>
+              <a:spcAft>
+                <a:spcPts val="400"/>
+              </a:spcAft>
+            </a:pPr>
+            <a:r>
+              <a:rPr sz="1450" b="1">
+                <a:solidFill>
+                  <a:srgbClr val="0E4D7A"/>
+                </a:solidFill>
+                <a:latin typeface="Noto Sans"/>
+              </a:rPr>
+              <a:t>Terbuka untuk direproduksi</a:t>
+            </a:r>
+          </a:p>
+          <a:p>
+            <a:pPr>
+              <a:lnSpc>
+                <a:spcPct val="113000"/>
+              </a:lnSpc>
+              <a:spcBef>
+                <a:spcPts val="0"/>
+              </a:spcBef>
+              <a:spcAft>
+                <a:spcPts val="0"/>
+              </a:spcAft>
+            </a:pPr>
+            <a:r>
+              <a:rPr sz="1200" b="0">
+                <a:solidFill>
+                  <a:srgbClr val="0B2A44"/>
+                </a:solidFill>
+                <a:latin typeface="Noto Sans"/>
+              </a:rPr>
+              <a:t>Notebook analisis, query SQL, dan dataset terbuka di repo untuk dihitung ulang dari nol.</a:t>
+            </a:r>
+          </a:p>
+        </p:txBody>
+      </p:sp>
+      <p:sp>
+        <p:nvSpPr>
+          <p:cNvPr id="11" name="Rounded Rectangle 10"/>
+          <p:cNvSpPr/>
+          <p:nvPr/>
+        </p:nvSpPr>
+        <p:spPr>
+          <a:xfrm>
+            <a:off x="502920" y="4892040"/>
+            <a:ext cx="11183112" cy="1463040"/>
+          </a:xfrm>
+          <a:prstGeom prst="roundRect">
+            <a:avLst>
+              <a:gd name="adj" fmla="val 5500"/>
+            </a:avLst>
+          </a:prstGeom>
+          <a:solidFill>
+            <a:srgbClr val="0E4D7A"/>
+          </a:solidFill>
+          <a:ln>
+            <a:noFill/>
+          </a:ln>
+          <a:effectLst/>
+        </p:spPr>
+        <p:style>
+          <a:lnRef idx="1">
+            <a:schemeClr val="accent1"/>
+          </a:lnRef>
+          <a:fillRef idx="3">
+            <a:schemeClr val="accent1"/>
+          </a:fillRef>
+          <a:effectRef idx="2">
+            <a:schemeClr val="accent1"/>
+          </a:effectRef>
+          <a:fontRef idx="minor">
+            <a:schemeClr val="lt1"/>
+          </a:fontRef>
+        </p:style>
+        <p:txBody>
+          <a:bodyPr rtlCol="0" anchor="ctr"/>
+          <a:lstStyle/>
+          <a:p>
+            <a:pPr algn="ctr"/>
+          </a:p>
+        </p:txBody>
+      </p:sp>
+      <p:sp>
+        <p:nvSpPr>
+          <p:cNvPr id="12" name="TextBox 11"/>
+          <p:cNvSpPr txBox="1"/>
+          <p:nvPr/>
+        </p:nvSpPr>
+        <p:spPr>
+          <a:xfrm>
+            <a:off x="914400" y="5193792"/>
+            <a:ext cx="6949440" cy="914400"/>
+          </a:xfrm>
+          <a:prstGeom prst="rect">
+            <a:avLst/>
+          </a:prstGeom>
+          <a:noFill/>
+        </p:spPr>
+        <p:txBody>
+          <a:bodyPr wrap="square" anchor="t" lIns="0" rIns="0" tIns="0" bIns="0">
+            <a:spAutoFit/>
+          </a:bodyPr>
+          <a:lstStyle/>
+          <a:p>
+            <a:pPr>
+              <a:lnSpc>
+                <a:spcPct val="113000"/>
+              </a:lnSpc>
+              <a:spcBef>
+                <a:spcPts val="0"/>
+              </a:spcBef>
+              <a:spcAft>
+                <a:spcPts val="300"/>
+              </a:spcAft>
+            </a:pPr>
+            <a:r>
+              <a:rPr sz="2300" b="1">
+                <a:solidFill>
+                  <a:srgbClr val="FFFFFF"/>
+                </a:solidFill>
+                <a:latin typeface="Noto Sans"/>
+              </a:rPr>
+              <a:t>BAGHIZ ASSHIDDIQIE ARASYA</a:t>
+            </a:r>
+          </a:p>
+          <a:p>
+            <a:pPr>
+              <a:lnSpc>
+                <a:spcPct val="113000"/>
+              </a:lnSpc>
+              <a:spcBef>
+                <a:spcPts val="0"/>
+              </a:spcBef>
+              <a:spcAft>
+                <a:spcPts val="0"/>
+              </a:spcAft>
+            </a:pPr>
+            <a:r>
+              <a:rPr sz="1350" b="0">
+                <a:solidFill>
+                  <a:srgbClr val="F5C542"/>
                 </a:solidFill>
                 <a:latin typeface="Noto Sans"/>
               </a:rPr>
               <a:t>github.com/baghizash/ibm-hr-attrition-people-analytics</a:t>
+            </a:r>
+          </a:p>
+        </p:txBody>
+      </p:sp>
+      <p:sp>
+        <p:nvSpPr>
+          <p:cNvPr id="13" name="TextBox 12"/>
+          <p:cNvSpPr txBox="1"/>
+          <p:nvPr/>
+        </p:nvSpPr>
+        <p:spPr>
+          <a:xfrm>
+            <a:off x="8138160" y="5321808"/>
+            <a:ext cx="3154680" cy="777240"/>
+          </a:xfrm>
+          <a:prstGeom prst="rect">
+            <a:avLst/>
+          </a:prstGeom>
+          <a:noFill/>
+        </p:spPr>
+        <p:txBody>
+          <a:bodyPr wrap="square" anchor="t" lIns="0" rIns="0" tIns="0" bIns="0">
+            <a:spAutoFit/>
+          </a:bodyPr>
+          <a:lstStyle/>
+          <a:p>
+            <a:pPr>
+              <a:lnSpc>
+                <a:spcPct val="113000"/>
+              </a:lnSpc>
+              <a:spcBef>
+                <a:spcPts val="0"/>
+              </a:spcBef>
+              <a:spcAft>
+                <a:spcPts val="0"/>
+              </a:spcAft>
+            </a:pPr>
+            <a:r>
+              <a:rPr sz="1250" b="0">
+                <a:solidFill>
+                  <a:srgbClr val="DCE9F2"/>
+                </a:solidFill>
+                <a:latin typeface="Noto Sans"/>
+              </a:rPr>
+              <a:t>Terima kasih. Silakan jelajahi repo dan dashboardnya, semua angka terbuka untuk dicek ulang.</a:t>
             </a:r>
           </a:p>
         </p:txBody>
@@ -3750,8 +4295,8 @@
         </p:nvSpPr>
         <p:spPr>
           <a:xfrm>
-            <a:off x="640080" y="457200"/>
-            <a:ext cx="10881360" cy="777240"/>
+            <a:off x="502920" y="384048"/>
+            <a:ext cx="11155680" cy="914400"/>
           </a:xfrm>
           <a:prstGeom prst="rect">
             <a:avLst/>
@@ -3759,21 +4304,24 @@
           <a:noFill/>
         </p:spPr>
         <p:txBody>
-          <a:bodyPr wrap="square">
+          <a:bodyPr wrap="square" anchor="t" lIns="0" rIns="0" tIns="0" bIns="0">
             <a:spAutoFit/>
           </a:bodyPr>
           <a:lstStyle/>
           <a:p>
             <a:pPr>
+              <a:lnSpc>
+                <a:spcPct val="113000"/>
+              </a:lnSpc>
               <a:spcBef>
                 <a:spcPts val="0"/>
               </a:spcBef>
               <a:spcAft>
-                <a:spcPts val="800"/>
+                <a:spcPts val="0"/>
               </a:spcAft>
             </a:pPr>
             <a:r>
-              <a:rPr sz="3200" b="1" i="0">
+              <a:rPr sz="3100" b="1">
                 <a:solidFill>
                   <a:srgbClr val="0B2A44"/>
                 </a:solidFill>
@@ -3786,14 +4334,152 @@
       </p:sp>
       <p:sp>
         <p:nvSpPr>
-          <p:cNvPr id="3" name="TextBox 2"/>
+          <p:cNvPr id="3" name="Rounded Rectangle 2"/>
+          <p:cNvSpPr/>
+          <p:nvPr/>
+        </p:nvSpPr>
+        <p:spPr>
+          <a:xfrm>
+            <a:off x="521207" y="1097280"/>
+            <a:ext cx="777240" cy="82296"/>
+          </a:xfrm>
+          <a:prstGeom prst="roundRect">
+            <a:avLst>
+              <a:gd name="adj" fmla="val 5500"/>
+            </a:avLst>
+          </a:prstGeom>
+          <a:solidFill>
+            <a:srgbClr val="E5322D"/>
+          </a:solidFill>
+          <a:ln>
+            <a:noFill/>
+          </a:ln>
+          <a:effectLst/>
+        </p:spPr>
+        <p:style>
+          <a:lnRef idx="1">
+            <a:schemeClr val="accent1"/>
+          </a:lnRef>
+          <a:fillRef idx="3">
+            <a:schemeClr val="accent1"/>
+          </a:fillRef>
+          <a:effectRef idx="2">
+            <a:schemeClr val="accent1"/>
+          </a:effectRef>
+          <a:fontRef idx="minor">
+            <a:schemeClr val="lt1"/>
+          </a:fontRef>
+        </p:style>
+        <p:txBody>
+          <a:bodyPr rtlCol="0" anchor="ctr"/>
+          <a:lstStyle/>
+          <a:p>
+            <a:pPr algn="ctr"/>
+          </a:p>
+        </p:txBody>
+      </p:sp>
+      <p:sp>
+        <p:nvSpPr>
+          <p:cNvPr id="4" name="Rounded Rectangle 3"/>
+          <p:cNvSpPr/>
+          <p:nvPr/>
+        </p:nvSpPr>
+        <p:spPr>
+          <a:xfrm>
+            <a:off x="566928" y="1481328"/>
+            <a:ext cx="6903720" cy="4206240"/>
+          </a:xfrm>
+          <a:prstGeom prst="roundRect">
+            <a:avLst>
+              <a:gd name="adj" fmla="val 5500"/>
+            </a:avLst>
+          </a:prstGeom>
+          <a:solidFill>
+            <a:srgbClr val="DFD5C0"/>
+          </a:solidFill>
+          <a:ln>
+            <a:noFill/>
+          </a:ln>
+          <a:effectLst/>
+        </p:spPr>
+        <p:style>
+          <a:lnRef idx="1">
+            <a:schemeClr val="accent1"/>
+          </a:lnRef>
+          <a:fillRef idx="3">
+            <a:schemeClr val="accent1"/>
+          </a:fillRef>
+          <a:effectRef idx="2">
+            <a:schemeClr val="accent1"/>
+          </a:effectRef>
+          <a:fontRef idx="minor">
+            <a:schemeClr val="lt1"/>
+          </a:fontRef>
+        </p:style>
+        <p:txBody>
+          <a:bodyPr rtlCol="0" anchor="ctr"/>
+          <a:lstStyle/>
+          <a:p>
+            <a:pPr algn="ctr"/>
+          </a:p>
+        </p:txBody>
+      </p:sp>
+      <p:sp>
+        <p:nvSpPr>
+          <p:cNvPr id="5" name="Rounded Rectangle 4"/>
+          <p:cNvSpPr/>
+          <p:nvPr/>
+        </p:nvSpPr>
+        <p:spPr>
+          <a:xfrm>
+            <a:off x="502920" y="1417320"/>
+            <a:ext cx="6903720" cy="4206240"/>
+          </a:xfrm>
+          <a:prstGeom prst="roundRect">
+            <a:avLst>
+              <a:gd name="adj" fmla="val 5500"/>
+            </a:avLst>
+          </a:prstGeom>
+          <a:solidFill>
+            <a:srgbClr val="FDFBF6"/>
+          </a:solidFill>
+          <a:ln>
+            <a:noFill/>
+          </a:ln>
+          <a:effectLst/>
+        </p:spPr>
+        <p:style>
+          <a:lnRef idx="1">
+            <a:schemeClr val="accent1"/>
+          </a:lnRef>
+          <a:fillRef idx="3">
+            <a:schemeClr val="accent1"/>
+          </a:fillRef>
+          <a:effectRef idx="2">
+            <a:schemeClr val="accent1"/>
+          </a:effectRef>
+          <a:fontRef idx="minor">
+            <a:schemeClr val="lt1"/>
+          </a:fontRef>
+        </p:style>
+        <p:txBody>
+          <a:bodyPr rtlCol="0" anchor="ctr"/>
+          <a:lstStyle/>
+          <a:p>
+            <a:pPr algn="ctr"/>
+          </a:p>
+        </p:txBody>
+      </p:sp>
+      <p:sp>
+        <p:nvSpPr>
+          <p:cNvPr id="6" name="TextBox 5"/>
           <p:cNvSpPr txBox="1"/>
           <p:nvPr/>
         </p:nvSpPr>
         <p:spPr>
           <a:xfrm>
-            <a:off x="640080" y="1600200"/>
-            <a:ext cx="6675120" cy="4937760"/>
+            <a:off x="868680" y="1783080"/>
+            <a:ext cx="6217920" cy="3566160"/>
           </a:xfrm>
           <a:prstGeom prst="rect">
             <a:avLst/>
@@ -3801,126 +4487,161 @@
           <a:noFill/>
         </p:spPr>
         <p:txBody>
-          <a:bodyPr wrap="square">
+          <a:bodyPr wrap="square" anchor="t" lIns="0" rIns="0" tIns="0" bIns="0">
             <a:spAutoFit/>
           </a:bodyPr>
           <a:lstStyle/>
           <a:p>
-            <a:pPr marL="171450" indent="-171450">
+            <a:pPr>
+              <a:lnSpc>
+                <a:spcPct val="113000"/>
+              </a:lnSpc>
               <a:spcBef>
                 <a:spcPts val="0"/>
               </a:spcBef>
               <a:spcAft>
-                <a:spcPts val="1600"/>
+                <a:spcPts val="1000"/>
               </a:spcAft>
-              <a:buChar char="•"/>
             </a:pPr>
             <a:r>
-              <a:rPr sz="1600" b="0" i="0">
+              <a:rPr sz="1550" b="0">
                 <a:solidFill>
                   <a:srgbClr val="0B2A44"/>
                 </a:solidFill>
                 <a:latin typeface="Noto Sans"/>
               </a:rPr>
-              <a:t>Dataset IBM HR Analytics: 1.470 karyawan dengan 35 kolom data demografi, pekerjaan, kompensasi, dan kepuasan</a:t>
-            </a:r>
-          </a:p>
-          <a:p>
-            <a:pPr marL="171450" indent="-171450">
+              <a:t>Dataset IBM HR Analytics berisi 1.470 karyawan dengan 35 kolom data: demografi, pekerjaan, kompensasi, dan kepuasan kerja.</a:t>
+            </a:r>
+          </a:p>
+          <a:p>
+            <a:pPr>
+              <a:lnSpc>
+                <a:spcPct val="113000"/>
+              </a:lnSpc>
               <a:spcBef>
                 <a:spcPts val="0"/>
               </a:spcBef>
               <a:spcAft>
-                <a:spcPts val="1600"/>
+                <a:spcPts val="1000"/>
               </a:spcAft>
-              <a:buChar char="•"/>
             </a:pPr>
             <a:r>
-              <a:rPr sz="1600" b="0" i="0">
+              <a:rPr sz="1550" b="0">
                 <a:solidFill>
                   <a:srgbClr val="0B2A44"/>
                 </a:solidFill>
                 <a:latin typeface="Noto Sans"/>
               </a:rPr>
-              <a:t>Pertanyaan utama: kenapa karyawan resign dan siapa yang paling berisiko pergi</a:t>
-            </a:r>
-          </a:p>
-          <a:p>
-            <a:pPr marL="171450" indent="-171450">
+              <a:t>Pertanyaan utama analisis ini: kenapa karyawan resign, dan siapa yang paling berisiko pergi?</a:t>
+            </a:r>
+          </a:p>
+          <a:p>
+            <a:pPr>
+              <a:lnSpc>
+                <a:spcPct val="113000"/>
+              </a:lnSpc>
               <a:spcBef>
                 <a:spcPts val="0"/>
               </a:spcBef>
               <a:spcAft>
-                <a:spcPts val="1600"/>
+                <a:spcPts val="1000"/>
               </a:spcAft>
-              <a:buChar char="•"/>
             </a:pPr>
             <a:r>
-              <a:rPr sz="1600" b="0" i="0">
+              <a:rPr sz="1550" b="0">
                 <a:solidFill>
                   <a:srgbClr val="0B2A44"/>
                 </a:solidFill>
                 <a:latin typeface="Noto Sans"/>
               </a:rPr>
-              <a:t>Attrition rate keseluruhan 16,1 persen atau 237 karyawan, angka yang cukup tinggi untuk diabaikan</a:t>
-            </a:r>
-          </a:p>
-          <a:p>
-            <a:pPr marL="171450" indent="-171450">
+              <a:t>Attrition rate keseluruhan 16,1% atau 237 karyawan. Setiap resign berarti biaya rekrutmen, pelatihan ulang, dan pengetahuan yang hilang, jadi polanya layak dibaca sebagai sinyal manajemen, bukan sekadar statistik.</a:t>
+            </a:r>
+          </a:p>
+        </p:txBody>
+      </p:sp>
+      <p:sp>
+        <p:nvSpPr>
+          <p:cNvPr id="7" name="Rounded Rectangle 6"/>
+          <p:cNvSpPr/>
+          <p:nvPr/>
+        </p:nvSpPr>
+        <p:spPr>
+          <a:xfrm>
+            <a:off x="7726679" y="1417320"/>
+            <a:ext cx="3959352" cy="1207008"/>
+          </a:xfrm>
+          <a:prstGeom prst="roundRect">
+            <a:avLst>
+              <a:gd name="adj" fmla="val 5500"/>
+            </a:avLst>
+          </a:prstGeom>
+          <a:solidFill>
+            <a:srgbClr val="FDFBF6"/>
+          </a:solidFill>
+          <a:ln>
+            <a:noFill/>
+          </a:ln>
+          <a:effectLst/>
+        </p:spPr>
+        <p:style>
+          <a:lnRef idx="1">
+            <a:schemeClr val="accent1"/>
+          </a:lnRef>
+          <a:fillRef idx="3">
+            <a:schemeClr val="accent1"/>
+          </a:fillRef>
+          <a:effectRef idx="2">
+            <a:schemeClr val="accent1"/>
+          </a:effectRef>
+          <a:fontRef idx="minor">
+            <a:schemeClr val="lt1"/>
+          </a:fontRef>
+        </p:style>
+        <p:txBody>
+          <a:bodyPr rtlCol="0" anchor="ctr"/>
+          <a:lstStyle/>
+          <a:p>
+            <a:pPr algn="ctr"/>
+          </a:p>
+        </p:txBody>
+      </p:sp>
+      <p:sp>
+        <p:nvSpPr>
+          <p:cNvPr id="8" name="TextBox 7"/>
+          <p:cNvSpPr txBox="1"/>
+          <p:nvPr/>
+        </p:nvSpPr>
+        <p:spPr>
+          <a:xfrm>
+            <a:off x="8046720" y="1581912"/>
+            <a:ext cx="3383280" cy="1024128"/>
+          </a:xfrm>
+          <a:prstGeom prst="rect">
+            <a:avLst/>
+          </a:prstGeom>
+          <a:noFill/>
+        </p:spPr>
+        <p:txBody>
+          <a:bodyPr wrap="square" anchor="t" lIns="0" rIns="0" tIns="0" bIns="0">
+            <a:spAutoFit/>
+          </a:bodyPr>
+          <a:lstStyle/>
+          <a:p>
+            <a:pPr>
+              <a:lnSpc>
+                <a:spcPct val="113000"/>
+              </a:lnSpc>
               <a:spcBef>
                 <a:spcPts val="0"/>
               </a:spcBef>
               <a:spcAft>
-                <a:spcPts val="1600"/>
-              </a:spcAft>
-              <a:buChar char="•"/>
-            </a:pPr>
-            <a:r>
-              <a:rPr sz="1600" b="0" i="0">
-                <a:solidFill>
-                  <a:srgbClr val="0B2A44"/>
-                </a:solidFill>
-                <a:latin typeface="Noto Sans"/>
-              </a:rPr>
-              <a:t>Tujuan analisis: menemukan faktor pendorong resign lalu menyusun rekomendasi retensi yang konkret</a:t>
-            </a:r>
-          </a:p>
-        </p:txBody>
-      </p:sp>
-      <p:sp>
-        <p:nvSpPr>
-          <p:cNvPr id="4" name="TextBox 3"/>
-          <p:cNvSpPr txBox="1"/>
-          <p:nvPr/>
-        </p:nvSpPr>
-        <p:spPr>
-          <a:xfrm>
-            <a:off x="7863840" y="1645920"/>
-            <a:ext cx="3657600" cy="1280160"/>
-          </a:xfrm>
-          <a:prstGeom prst="rect">
-            <a:avLst/>
-          </a:prstGeom>
-          <a:noFill/>
-        </p:spPr>
-        <p:txBody>
-          <a:bodyPr wrap="square">
-            <a:spAutoFit/>
-          </a:bodyPr>
-          <a:lstStyle/>
-          <a:p>
-            <a:pPr>
-              <a:spcBef>
-                <a:spcPts val="0"/>
-              </a:spcBef>
-              <a:spcAft>
-                <a:spcPts val="0"/>
+                <a:spcPts val="200"/>
               </a:spcAft>
             </a:pPr>
             <a:r>
-              <a:rPr sz="3800" b="1" i="0">
-                <a:solidFill>
-                  <a:srgbClr val="0E4D7A"/>
+              <a:rPr sz="3200" b="1">
+                <a:solidFill>
+                  <a:srgbClr val="E5322D"/>
                 </a:solidFill>
                 <a:latin typeface="Noto Sans"/>
               </a:rPr>
@@ -3929,6 +4650,9 @@
           </a:p>
           <a:p>
             <a:pPr>
+              <a:lnSpc>
+                <a:spcPct val="113000"/>
+              </a:lnSpc>
               <a:spcBef>
                 <a:spcPts val="0"/>
               </a:spcBef>
@@ -3937,9 +4661,9 @@
               </a:spcAft>
             </a:pPr>
             <a:r>
-              <a:rPr sz="1300" b="0" i="0">
-                <a:solidFill>
-                  <a:srgbClr val="54626F"/>
+              <a:rPr sz="1250" b="0">
+                <a:solidFill>
+                  <a:srgbClr val="0B2A44"/>
                 </a:solidFill>
                 <a:latin typeface="Noto Sans"/>
               </a:rPr>
@@ -3950,14 +4674,60 @@
       </p:sp>
       <p:sp>
         <p:nvSpPr>
-          <p:cNvPr id="5" name="TextBox 4"/>
+          <p:cNvPr id="9" name="Rounded Rectangle 8"/>
+          <p:cNvSpPr/>
+          <p:nvPr/>
+        </p:nvSpPr>
+        <p:spPr>
+          <a:xfrm>
+            <a:off x="7726679" y="2770632"/>
+            <a:ext cx="3959352" cy="1207008"/>
+          </a:xfrm>
+          <a:prstGeom prst="roundRect">
+            <a:avLst>
+              <a:gd name="adj" fmla="val 5500"/>
+            </a:avLst>
+          </a:prstGeom>
+          <a:solidFill>
+            <a:srgbClr val="FDFBF6"/>
+          </a:solidFill>
+          <a:ln>
+            <a:noFill/>
+          </a:ln>
+          <a:effectLst/>
+        </p:spPr>
+        <p:style>
+          <a:lnRef idx="1">
+            <a:schemeClr val="accent1"/>
+          </a:lnRef>
+          <a:fillRef idx="3">
+            <a:schemeClr val="accent1"/>
+          </a:fillRef>
+          <a:effectRef idx="2">
+            <a:schemeClr val="accent1"/>
+          </a:effectRef>
+          <a:fontRef idx="minor">
+            <a:schemeClr val="lt1"/>
+          </a:fontRef>
+        </p:style>
+        <p:txBody>
+          <a:bodyPr rtlCol="0" anchor="ctr"/>
+          <a:lstStyle/>
+          <a:p>
+            <a:pPr algn="ctr"/>
+          </a:p>
+        </p:txBody>
+      </p:sp>
+      <p:sp>
+        <p:nvSpPr>
+          <p:cNvPr id="10" name="TextBox 9"/>
           <p:cNvSpPr txBox="1"/>
           <p:nvPr/>
         </p:nvSpPr>
         <p:spPr>
           <a:xfrm>
-            <a:off x="7863840" y="3063240"/>
-            <a:ext cx="3657600" cy="1280160"/>
+            <a:off x="8046720" y="2935224"/>
+            <a:ext cx="3383280" cy="1024128"/>
           </a:xfrm>
           <a:prstGeom prst="rect">
             <a:avLst/>
@@ -3965,84 +4735,26 @@
           <a:noFill/>
         </p:spPr>
         <p:txBody>
-          <a:bodyPr wrap="square">
+          <a:bodyPr wrap="square" anchor="t" lIns="0" rIns="0" tIns="0" bIns="0">
             <a:spAutoFit/>
           </a:bodyPr>
           <a:lstStyle/>
           <a:p>
             <a:pPr>
+              <a:lnSpc>
+                <a:spcPct val="113000"/>
+              </a:lnSpc>
               <a:spcBef>
                 <a:spcPts val="0"/>
               </a:spcBef>
               <a:spcAft>
-                <a:spcPts val="0"/>
+                <a:spcPts val="200"/>
               </a:spcAft>
             </a:pPr>
             <a:r>
-              <a:rPr sz="3800" b="1" i="0">
-                <a:solidFill>
-                  <a:srgbClr val="0E4D7A"/>
-                </a:solidFill>
-                <a:latin typeface="Noto Sans"/>
-              </a:rPr>
-              <a:t>35</a:t>
-            </a:r>
-          </a:p>
-          <a:p>
-            <a:pPr>
-              <a:spcBef>
-                <a:spcPts val="0"/>
-              </a:spcBef>
-              <a:spcAft>
-                <a:spcPts val="0"/>
-              </a:spcAft>
-            </a:pPr>
-            <a:r>
-              <a:rPr sz="1300" b="0" i="0">
-                <a:solidFill>
-                  <a:srgbClr val="54626F"/>
-                </a:solidFill>
-                <a:latin typeface="Noto Sans"/>
-              </a:rPr>
-              <a:t>kolom data per karyawan</a:t>
-            </a:r>
-          </a:p>
-        </p:txBody>
-      </p:sp>
-      <p:sp>
-        <p:nvSpPr>
-          <p:cNvPr id="6" name="TextBox 5"/>
-          <p:cNvSpPr txBox="1"/>
-          <p:nvPr/>
-        </p:nvSpPr>
-        <p:spPr>
-          <a:xfrm>
-            <a:off x="7863840" y="4480560"/>
-            <a:ext cx="3657600" cy="1280160"/>
-          </a:xfrm>
-          <a:prstGeom prst="rect">
-            <a:avLst/>
-          </a:prstGeom>
-          <a:noFill/>
-        </p:spPr>
-        <p:txBody>
-          <a:bodyPr wrap="square">
-            <a:spAutoFit/>
-          </a:bodyPr>
-          <a:lstStyle/>
-          <a:p>
-            <a:pPr>
-              <a:spcBef>
-                <a:spcPts val="0"/>
-              </a:spcBef>
-              <a:spcAft>
-                <a:spcPts val="0"/>
-              </a:spcAft>
-            </a:pPr>
-            <a:r>
-              <a:rPr sz="3800" b="1" i="0">
-                <a:solidFill>
-                  <a:srgbClr val="0E4D7A"/>
+              <a:rPr sz="3200" b="1">
+                <a:solidFill>
+                  <a:srgbClr val="E5322D"/>
                 </a:solidFill>
                 <a:latin typeface="Noto Sans"/>
               </a:rPr>
@@ -4051,6 +4763,9 @@
           </a:p>
           <a:p>
             <a:pPr>
+              <a:lnSpc>
+                <a:spcPct val="113000"/>
+              </a:lnSpc>
               <a:spcBef>
                 <a:spcPts val="0"/>
               </a:spcBef>
@@ -4059,13 +4774,171 @@
               </a:spcAft>
             </a:pPr>
             <a:r>
-              <a:rPr sz="1300" b="0" i="0">
-                <a:solidFill>
-                  <a:srgbClr val="54626F"/>
+              <a:rPr sz="1250" b="0">
+                <a:solidFill>
+                  <a:srgbClr val="0B2A44"/>
                 </a:solidFill>
                 <a:latin typeface="Noto Sans"/>
               </a:rPr>
               <a:t>karyawan resign dari keseluruhan</a:t>
+            </a:r>
+          </a:p>
+        </p:txBody>
+      </p:sp>
+      <p:sp>
+        <p:nvSpPr>
+          <p:cNvPr id="11" name="Rounded Rectangle 10"/>
+          <p:cNvSpPr/>
+          <p:nvPr/>
+        </p:nvSpPr>
+        <p:spPr>
+          <a:xfrm>
+            <a:off x="7726679" y="4123944"/>
+            <a:ext cx="3959352" cy="1499616"/>
+          </a:xfrm>
+          <a:prstGeom prst="roundRect">
+            <a:avLst>
+              <a:gd name="adj" fmla="val 5500"/>
+            </a:avLst>
+          </a:prstGeom>
+          <a:solidFill>
+            <a:srgbClr val="0E4D7A"/>
+          </a:solidFill>
+          <a:ln>
+            <a:noFill/>
+          </a:ln>
+          <a:effectLst/>
+        </p:spPr>
+        <p:style>
+          <a:lnRef idx="1">
+            <a:schemeClr val="accent1"/>
+          </a:lnRef>
+          <a:fillRef idx="3">
+            <a:schemeClr val="accent1"/>
+          </a:fillRef>
+          <a:effectRef idx="2">
+            <a:schemeClr val="accent1"/>
+          </a:effectRef>
+          <a:fontRef idx="minor">
+            <a:schemeClr val="lt1"/>
+          </a:fontRef>
+        </p:style>
+        <p:txBody>
+          <a:bodyPr rtlCol="0" anchor="ctr"/>
+          <a:lstStyle/>
+          <a:p>
+            <a:pPr algn="ctr"/>
+          </a:p>
+        </p:txBody>
+      </p:sp>
+      <p:sp>
+        <p:nvSpPr>
+          <p:cNvPr id="12" name="TextBox 11"/>
+          <p:cNvSpPr txBox="1"/>
+          <p:nvPr/>
+        </p:nvSpPr>
+        <p:spPr>
+          <a:xfrm>
+            <a:off x="8046720" y="4288536"/>
+            <a:ext cx="3383280" cy="1316736"/>
+          </a:xfrm>
+          <a:prstGeom prst="rect">
+            <a:avLst/>
+          </a:prstGeom>
+          <a:noFill/>
+        </p:spPr>
+        <p:txBody>
+          <a:bodyPr wrap="square" anchor="t" lIns="0" rIns="0" tIns="0" bIns="0">
+            <a:spAutoFit/>
+          </a:bodyPr>
+          <a:lstStyle/>
+          <a:p>
+            <a:pPr>
+              <a:lnSpc>
+                <a:spcPct val="113000"/>
+              </a:lnSpc>
+              <a:spcBef>
+                <a:spcPts val="0"/>
+              </a:spcBef>
+              <a:spcAft>
+                <a:spcPts val="200"/>
+              </a:spcAft>
+            </a:pPr>
+            <a:r>
+              <a:rPr sz="3200" b="1">
+                <a:solidFill>
+                  <a:srgbClr val="F5C542"/>
+                </a:solidFill>
+                <a:latin typeface="Noto Sans"/>
+              </a:rPr>
+              <a:t>39,8%</a:t>
+            </a:r>
+          </a:p>
+          <a:p>
+            <a:pPr>
+              <a:lnSpc>
+                <a:spcPct val="113000"/>
+              </a:lnSpc>
+              <a:spcBef>
+                <a:spcPts val="0"/>
+              </a:spcBef>
+              <a:spcAft>
+                <a:spcPts val="0"/>
+              </a:spcAft>
+            </a:pPr>
+            <a:r>
+              <a:rPr sz="1250" b="0">
+                <a:solidFill>
+                  <a:srgbClr val="DCE9F2"/>
+                </a:solidFill>
+                <a:latin typeface="Noto Sans"/>
+              </a:rPr>
+              <a:t>attrition Sales Representative, peran tertinggi</a:t>
+            </a:r>
+          </a:p>
+        </p:txBody>
+      </p:sp>
+      <p:sp>
+        <p:nvSpPr>
+          <p:cNvPr id="13" name="TextBox 12"/>
+          <p:cNvSpPr txBox="1"/>
+          <p:nvPr/>
+        </p:nvSpPr>
+        <p:spPr>
+          <a:xfrm>
+            <a:off x="502920" y="6355080"/>
+            <a:ext cx="11155680" cy="365760"/>
+          </a:xfrm>
+          <a:prstGeom prst="rect">
+            <a:avLst/>
+          </a:prstGeom>
+          <a:noFill/>
+        </p:spPr>
+        <p:txBody>
+          <a:bodyPr wrap="square" anchor="t" lIns="0" rIns="0" tIns="0" bIns="0">
+            <a:spAutoFit/>
+          </a:bodyPr>
+          <a:lstStyle/>
+          <a:p>
+            <a:pPr>
+              <a:lnSpc>
+                <a:spcPct val="113000"/>
+              </a:lnSpc>
+              <a:spcBef>
+                <a:spcPts val="0"/>
+              </a:spcBef>
+              <a:spcAft>
+                <a:spcPts val="0"/>
+              </a:spcAft>
+            </a:pPr>
+            <a:r>
+              <a:rPr sz="1100" b="0">
+                <a:solidFill>
+                  <a:srgbClr val="5B7186"/>
+                </a:solidFill>
+                <a:latin typeface="Noto Sans"/>
+              </a:rPr>
+              <a:t>Sumber data: IBM HR Analytics Employee Attrition (dataset sampel publik untuk pembelajaran).</a:t>
             </a:r>
           </a:p>
         </p:txBody>
@@ -4104,8 +4977,8 @@
         </p:nvSpPr>
         <p:spPr>
           <a:xfrm>
-            <a:off x="640080" y="457200"/>
-            <a:ext cx="10881360" cy="777240"/>
+            <a:off x="502920" y="384048"/>
+            <a:ext cx="11155680" cy="914400"/>
           </a:xfrm>
           <a:prstGeom prst="rect">
             <a:avLst/>
@@ -4113,21 +4986,24 @@
           <a:noFill/>
         </p:spPr>
         <p:txBody>
-          <a:bodyPr wrap="square">
+          <a:bodyPr wrap="square" anchor="t" lIns="0" rIns="0" tIns="0" bIns="0">
             <a:spAutoFit/>
           </a:bodyPr>
           <a:lstStyle/>
           <a:p>
             <a:pPr>
+              <a:lnSpc>
+                <a:spcPct val="113000"/>
+              </a:lnSpc>
               <a:spcBef>
                 <a:spcPts val="0"/>
               </a:spcBef>
               <a:spcAft>
-                <a:spcPts val="800"/>
+                <a:spcPts val="0"/>
               </a:spcAft>
             </a:pPr>
             <a:r>
-              <a:rPr sz="3200" b="1" i="0">
+              <a:rPr sz="3100" b="1">
                 <a:solidFill>
                   <a:srgbClr val="0B2A44"/>
                 </a:solidFill>
@@ -4140,120 +5016,65 @@
       </p:sp>
       <p:sp>
         <p:nvSpPr>
-          <p:cNvPr id="3" name="TextBox 2"/>
-          <p:cNvSpPr txBox="1"/>
-          <p:nvPr/>
-        </p:nvSpPr>
-        <p:spPr>
-          <a:xfrm>
-            <a:off x="640080" y="1600200"/>
-            <a:ext cx="10881360" cy="4937760"/>
-          </a:xfrm>
-          <a:prstGeom prst="rect">
-            <a:avLst/>
-          </a:prstGeom>
-          <a:noFill/>
-        </p:spPr>
-        <p:txBody>
-          <a:bodyPr wrap="square">
-            <a:spAutoFit/>
-          </a:bodyPr>
-          <a:lstStyle/>
-          <a:p>
-            <a:pPr marL="171450" indent="-171450">
-              <a:spcBef>
-                <a:spcPts val="0"/>
-              </a:spcBef>
-              <a:spcAft>
-                <a:spcPts val="1600"/>
-              </a:spcAft>
-              <a:buChar char="•"/>
-            </a:pPr>
-            <a:r>
-              <a:rPr sz="1600" b="0" i="0">
-                <a:solidFill>
-                  <a:srgbClr val="0B2A44"/>
-                </a:solidFill>
-                <a:latin typeface="Noto Sans"/>
-              </a:rPr>
-              <a:t>Data dimuat ke SQLite lalu dianalisis dengan query SQL asli: agregasi, grouping, dan perbandingan antar segmen</a:t>
-            </a:r>
-          </a:p>
-          <a:p>
-            <a:pPr marL="171450" indent="-171450">
-              <a:spcBef>
-                <a:spcPts val="0"/>
-              </a:spcBef>
-              <a:spcAft>
-                <a:spcPts val="1600"/>
-              </a:spcAft>
-              <a:buChar char="•"/>
-            </a:pPr>
-            <a:r>
-              <a:rPr sz="1600" b="0" i="0">
-                <a:solidFill>
-                  <a:srgbClr val="0B2A44"/>
-                </a:solidFill>
-                <a:latin typeface="Noto Sans"/>
-              </a:rPr>
-              <a:t>Pandas dipakai untuk eksplorasi lanjutan dan pembuatan 12 chart visual</a:t>
-            </a:r>
-          </a:p>
-          <a:p>
-            <a:pPr marL="171450" indent="-171450">
-              <a:spcBef>
-                <a:spcPts val="0"/>
-              </a:spcBef>
-              <a:spcAft>
-                <a:spcPts val="1600"/>
-              </a:spcAft>
-              <a:buChar char="•"/>
-            </a:pPr>
-            <a:r>
-              <a:rPr sz="1600" b="0" i="0">
-                <a:solidFill>
-                  <a:srgbClr val="0B2A44"/>
-                </a:solidFill>
-                <a:latin typeface="Noto Sans"/>
-              </a:rPr>
-              <a:t>Attrition didefinisikan sebagai kolom Attrition bernilai Yes; rate dihitung sebagai Yes dibagi total karyawan</a:t>
-            </a:r>
-          </a:p>
-          <a:p>
-            <a:pPr marL="171450" indent="-171450">
-              <a:spcBef>
-                <a:spcPts val="0"/>
-              </a:spcBef>
-              <a:spcAft>
-                <a:spcPts val="1600"/>
-              </a:spcAft>
-              <a:buChar char="•"/>
-            </a:pPr>
-            <a:r>
-              <a:rPr sz="1600" b="0" i="0">
-                <a:solidFill>
-                  <a:srgbClr val="0B2A44"/>
-                </a:solidFill>
-                <a:latin typeface="Noto Sans"/>
-              </a:rPr>
-              <a:t>Segmen yang dianalisis: departemen, job role, lembur, band gaji, kelompok umur, jarak rumah, kepuasan, masa kerja, demografi, dan frekuensi dinas</a:t>
-            </a:r>
-          </a:p>
-        </p:txBody>
-      </p:sp>
-      <p:sp>
-        <p:nvSpPr>
-          <p:cNvPr id="4" name="Rectangle 3"/>
+          <p:cNvPr id="3" name="Rounded Rectangle 2"/>
           <p:cNvSpPr/>
           <p:nvPr/>
         </p:nvSpPr>
         <p:spPr>
           <a:xfrm>
-            <a:off x="640080" y="5212080"/>
-            <a:ext cx="10908792" cy="868680"/>
-          </a:xfrm>
-          <a:prstGeom prst="rect">
-            <a:avLst/>
+            <a:off x="521207" y="1097280"/>
+            <a:ext cx="777240" cy="82296"/>
+          </a:xfrm>
+          <a:prstGeom prst="roundRect">
+            <a:avLst>
+              <a:gd name="adj" fmla="val 5500"/>
+            </a:avLst>
+          </a:prstGeom>
+          <a:solidFill>
+            <a:srgbClr val="E5322D"/>
+          </a:solidFill>
+          <a:ln>
+            <a:noFill/>
+          </a:ln>
+          <a:effectLst/>
+        </p:spPr>
+        <p:style>
+          <a:lnRef idx="1">
+            <a:schemeClr val="accent1"/>
+          </a:lnRef>
+          <a:fillRef idx="3">
+            <a:schemeClr val="accent1"/>
+          </a:fillRef>
+          <a:effectRef idx="2">
+            <a:schemeClr val="accent1"/>
+          </a:effectRef>
+          <a:fontRef idx="minor">
+            <a:schemeClr val="lt1"/>
+          </a:fontRef>
+        </p:style>
+        <p:txBody>
+          <a:bodyPr rtlCol="0" anchor="ctr"/>
+          <a:lstStyle/>
+          <a:p>
+            <a:pPr algn="ctr"/>
+          </a:p>
+        </p:txBody>
+      </p:sp>
+      <p:sp>
+        <p:nvSpPr>
+          <p:cNvPr id="4" name="Rounded Rectangle 3"/>
+          <p:cNvSpPr/>
+          <p:nvPr/>
+        </p:nvSpPr>
+        <p:spPr>
+          <a:xfrm>
+            <a:off x="502920" y="1417320"/>
+            <a:ext cx="3291840" cy="2011680"/>
+          </a:xfrm>
+          <a:prstGeom prst="roundRect">
+            <a:avLst>
+              <a:gd name="adj" fmla="val 5500"/>
+            </a:avLst>
           </a:prstGeom>
           <a:solidFill>
             <a:srgbClr val="0E4D7A"/>
@@ -4293,8 +5114,8 @@
         </p:nvSpPr>
         <p:spPr>
           <a:xfrm>
-            <a:off x="640080" y="5440680"/>
-            <a:ext cx="10908792" cy="548640"/>
+            <a:off x="822960" y="1664208"/>
+            <a:ext cx="2697480" cy="1737360"/>
           </a:xfrm>
           <a:prstGeom prst="rect">
             <a:avLst/>
@@ -4302,27 +5123,346 @@
           <a:noFill/>
         </p:spPr>
         <p:txBody>
-          <a:bodyPr wrap="square">
+          <a:bodyPr wrap="square" anchor="t" lIns="0" rIns="0" tIns="0" bIns="0">
             <a:spAutoFit/>
           </a:bodyPr>
           <a:lstStyle/>
           <a:p>
-            <a:pPr algn="ctr">
+            <a:pPr>
+              <a:lnSpc>
+                <a:spcPct val="113000"/>
+              </a:lnSpc>
               <a:spcBef>
                 <a:spcPts val="0"/>
               </a:spcBef>
               <a:spcAft>
-                <a:spcPts val="800"/>
+                <a:spcPts val="300"/>
               </a:spcAft>
             </a:pPr>
             <a:r>
-              <a:rPr sz="1500" b="0" i="0">
-                <a:solidFill>
-                  <a:srgbClr val="FFFFFF"/>
+              <a:rPr sz="2800" b="1">
+                <a:solidFill>
+                  <a:srgbClr val="F5C542"/>
                 </a:solidFill>
                 <a:latin typeface="Noto Sans"/>
               </a:rPr>
-              <a:t>Alur kerja: file CSV dimuat ke SQLite, dianalisis dengan query SQL, dieksplorasi dengan pandas, lalu divisualisasi menjadi 12 chart</a:t>
+              <a:t>1.470</a:t>
+            </a:r>
+          </a:p>
+          <a:p>
+            <a:pPr>
+              <a:lnSpc>
+                <a:spcPct val="113000"/>
+              </a:lnSpc>
+              <a:spcBef>
+                <a:spcPts val="0"/>
+              </a:spcBef>
+              <a:spcAft>
+                <a:spcPts val="0"/>
+              </a:spcAft>
+            </a:pPr>
+            <a:r>
+              <a:rPr sz="1250" b="0">
+                <a:solidFill>
+                  <a:srgbClr val="DCE9F2"/>
+                </a:solidFill>
+                <a:latin typeface="Noto Sans"/>
+              </a:rPr>
+              <a:t>karyawan dianalisis, satu baris per orang</a:t>
+            </a:r>
+          </a:p>
+        </p:txBody>
+      </p:sp>
+      <p:sp>
+        <p:nvSpPr>
+          <p:cNvPr id="6" name="Rounded Rectangle 5"/>
+          <p:cNvSpPr/>
+          <p:nvPr/>
+        </p:nvSpPr>
+        <p:spPr>
+          <a:xfrm>
+            <a:off x="502920" y="3611880"/>
+            <a:ext cx="3291840" cy="2011680"/>
+          </a:xfrm>
+          <a:prstGeom prst="roundRect">
+            <a:avLst>
+              <a:gd name="adj" fmla="val 5500"/>
+            </a:avLst>
+          </a:prstGeom>
+          <a:solidFill>
+            <a:srgbClr val="FDFBF6"/>
+          </a:solidFill>
+          <a:ln>
+            <a:noFill/>
+          </a:ln>
+          <a:effectLst/>
+        </p:spPr>
+        <p:style>
+          <a:lnRef idx="1">
+            <a:schemeClr val="accent1"/>
+          </a:lnRef>
+          <a:fillRef idx="3">
+            <a:schemeClr val="accent1"/>
+          </a:fillRef>
+          <a:effectRef idx="2">
+            <a:schemeClr val="accent1"/>
+          </a:effectRef>
+          <a:fontRef idx="minor">
+            <a:schemeClr val="lt1"/>
+          </a:fontRef>
+        </p:style>
+        <p:txBody>
+          <a:bodyPr rtlCol="0" anchor="ctr"/>
+          <a:lstStyle/>
+          <a:p>
+            <a:pPr algn="ctr"/>
+          </a:p>
+        </p:txBody>
+      </p:sp>
+      <p:sp>
+        <p:nvSpPr>
+          <p:cNvPr id="7" name="TextBox 6"/>
+          <p:cNvSpPr txBox="1"/>
+          <p:nvPr/>
+        </p:nvSpPr>
+        <p:spPr>
+          <a:xfrm>
+            <a:off x="822960" y="3858768"/>
+            <a:ext cx="2697480" cy="1737360"/>
+          </a:xfrm>
+          <a:prstGeom prst="rect">
+            <a:avLst/>
+          </a:prstGeom>
+          <a:noFill/>
+        </p:spPr>
+        <p:txBody>
+          <a:bodyPr wrap="square" anchor="t" lIns="0" rIns="0" tIns="0" bIns="0">
+            <a:spAutoFit/>
+          </a:bodyPr>
+          <a:lstStyle/>
+          <a:p>
+            <a:pPr>
+              <a:lnSpc>
+                <a:spcPct val="113000"/>
+              </a:lnSpc>
+              <a:spcBef>
+                <a:spcPts val="0"/>
+              </a:spcBef>
+              <a:spcAft>
+                <a:spcPts val="300"/>
+              </a:spcAft>
+            </a:pPr>
+            <a:r>
+              <a:rPr sz="2800" b="1">
+                <a:solidFill>
+                  <a:srgbClr val="E5322D"/>
+                </a:solidFill>
+                <a:latin typeface="Noto Sans"/>
+              </a:rPr>
+              <a:t>35</a:t>
+            </a:r>
+          </a:p>
+          <a:p>
+            <a:pPr>
+              <a:lnSpc>
+                <a:spcPct val="113000"/>
+              </a:lnSpc>
+              <a:spcBef>
+                <a:spcPts val="0"/>
+              </a:spcBef>
+              <a:spcAft>
+                <a:spcPts val="0"/>
+              </a:spcAft>
+            </a:pPr>
+            <a:r>
+              <a:rPr sz="1250" b="0">
+                <a:solidFill>
+                  <a:srgbClr val="0B2A44"/>
+                </a:solidFill>
+                <a:latin typeface="Noto Sans"/>
+              </a:rPr>
+              <a:t>kolom data per karyawan: demografi sampai kepuasan</a:t>
+            </a:r>
+          </a:p>
+        </p:txBody>
+      </p:sp>
+      <p:sp>
+        <p:nvSpPr>
+          <p:cNvPr id="8" name="Rounded Rectangle 7"/>
+          <p:cNvSpPr/>
+          <p:nvPr/>
+        </p:nvSpPr>
+        <p:spPr>
+          <a:xfrm>
+            <a:off x="4178808" y="1481328"/>
+            <a:ext cx="7571231" cy="4206240"/>
+          </a:xfrm>
+          <a:prstGeom prst="roundRect">
+            <a:avLst>
+              <a:gd name="adj" fmla="val 5500"/>
+            </a:avLst>
+          </a:prstGeom>
+          <a:solidFill>
+            <a:srgbClr val="DFD5C0"/>
+          </a:solidFill>
+          <a:ln>
+            <a:noFill/>
+          </a:ln>
+          <a:effectLst/>
+        </p:spPr>
+        <p:style>
+          <a:lnRef idx="1">
+            <a:schemeClr val="accent1"/>
+          </a:lnRef>
+          <a:fillRef idx="3">
+            <a:schemeClr val="accent1"/>
+          </a:fillRef>
+          <a:effectRef idx="2">
+            <a:schemeClr val="accent1"/>
+          </a:effectRef>
+          <a:fontRef idx="minor">
+            <a:schemeClr val="lt1"/>
+          </a:fontRef>
+        </p:style>
+        <p:txBody>
+          <a:bodyPr rtlCol="0" anchor="ctr"/>
+          <a:lstStyle/>
+          <a:p>
+            <a:pPr algn="ctr"/>
+          </a:p>
+        </p:txBody>
+      </p:sp>
+      <p:sp>
+        <p:nvSpPr>
+          <p:cNvPr id="9" name="Rounded Rectangle 8"/>
+          <p:cNvSpPr/>
+          <p:nvPr/>
+        </p:nvSpPr>
+        <p:spPr>
+          <a:xfrm>
+            <a:off x="4114800" y="1417320"/>
+            <a:ext cx="7571231" cy="4206240"/>
+          </a:xfrm>
+          <a:prstGeom prst="roundRect">
+            <a:avLst>
+              <a:gd name="adj" fmla="val 5500"/>
+            </a:avLst>
+          </a:prstGeom>
+          <a:solidFill>
+            <a:srgbClr val="FDFBF6"/>
+          </a:solidFill>
+          <a:ln>
+            <a:noFill/>
+          </a:ln>
+          <a:effectLst/>
+        </p:spPr>
+        <p:style>
+          <a:lnRef idx="1">
+            <a:schemeClr val="accent1"/>
+          </a:lnRef>
+          <a:fillRef idx="3">
+            <a:schemeClr val="accent1"/>
+          </a:fillRef>
+          <a:effectRef idx="2">
+            <a:schemeClr val="accent1"/>
+          </a:effectRef>
+          <a:fontRef idx="minor">
+            <a:schemeClr val="lt1"/>
+          </a:fontRef>
+        </p:style>
+        <p:txBody>
+          <a:bodyPr rtlCol="0" anchor="ctr"/>
+          <a:lstStyle/>
+          <a:p>
+            <a:pPr algn="ctr"/>
+          </a:p>
+        </p:txBody>
+      </p:sp>
+      <p:sp>
+        <p:nvSpPr>
+          <p:cNvPr id="10" name="TextBox 9"/>
+          <p:cNvSpPr txBox="1"/>
+          <p:nvPr/>
+        </p:nvSpPr>
+        <p:spPr>
+          <a:xfrm>
+            <a:off x="4480560" y="1755648"/>
+            <a:ext cx="6858000" cy="3611880"/>
+          </a:xfrm>
+          <a:prstGeom prst="rect">
+            <a:avLst/>
+          </a:prstGeom>
+          <a:noFill/>
+        </p:spPr>
+        <p:txBody>
+          <a:bodyPr wrap="square" anchor="t" lIns="0" rIns="0" tIns="0" bIns="0">
+            <a:spAutoFit/>
+          </a:bodyPr>
+          <a:lstStyle/>
+          <a:p>
+            <a:pPr>
+              <a:lnSpc>
+                <a:spcPct val="113000"/>
+              </a:lnSpc>
+              <a:spcBef>
+                <a:spcPts val="0"/>
+              </a:spcBef>
+              <a:spcAft>
+                <a:spcPts val="1000"/>
+              </a:spcAft>
+            </a:pPr>
+            <a:r>
+              <a:rPr sz="1500" b="0">
+                <a:solidFill>
+                  <a:srgbClr val="0B2A44"/>
+                </a:solidFill>
+                <a:latin typeface="Noto Sans"/>
+              </a:rPr>
+              <a:t>Data dimuat ke SQLite, lalu dianalisis dengan query SQL asli: agregasi, grouping, dan perbandingan antar segmen. Pandas dipakai untuk eksplorasi lanjutan dan pembuatan 12 chart visual.</a:t>
+            </a:r>
+          </a:p>
+          <a:p>
+            <a:pPr>
+              <a:lnSpc>
+                <a:spcPct val="113000"/>
+              </a:lnSpc>
+              <a:spcBef>
+                <a:spcPts val="0"/>
+              </a:spcBef>
+              <a:spcAft>
+                <a:spcPts val="1000"/>
+              </a:spcAft>
+            </a:pPr>
+            <a:r>
+              <a:rPr sz="1500" b="0">
+                <a:solidFill>
+                  <a:srgbClr val="0B2A44"/>
+                </a:solidFill>
+                <a:latin typeface="Noto Sans"/>
+              </a:rPr>
+              <a:t>Attrition didefinisikan sebagai kolom Attrition bernilai Yes; attrition rate adalah jumlah Yes dibagi total karyawan pada segmen yang sama.</a:t>
+            </a:r>
+          </a:p>
+          <a:p>
+            <a:pPr>
+              <a:lnSpc>
+                <a:spcPct val="113000"/>
+              </a:lnSpc>
+              <a:spcBef>
+                <a:spcPts val="0"/>
+              </a:spcBef>
+              <a:spcAft>
+                <a:spcPts val="1000"/>
+              </a:spcAft>
+            </a:pPr>
+            <a:r>
+              <a:rPr sz="1500" b="0">
+                <a:solidFill>
+                  <a:srgbClr val="0B2A44"/>
+                </a:solidFill>
+                <a:latin typeface="Noto Sans"/>
+              </a:rPr>
+              <a:t>Tidak ada baris yang dihapus pada pembersihan: seluruh 1.470 baris data mentah utuh dan setiap karyawan dihitung tepat satu kali.</a:t>
             </a:r>
           </a:p>
         </p:txBody>
@@ -4361,8 +5501,8 @@
         </p:nvSpPr>
         <p:spPr>
           <a:xfrm>
-            <a:off x="640080" y="457200"/>
-            <a:ext cx="10881360" cy="777240"/>
+            <a:off x="502920" y="384048"/>
+            <a:ext cx="11155680" cy="914400"/>
           </a:xfrm>
           <a:prstGeom prst="rect">
             <a:avLst/>
@@ -4370,21 +5510,24 @@
           <a:noFill/>
         </p:spPr>
         <p:txBody>
-          <a:bodyPr wrap="square">
+          <a:bodyPr wrap="square" anchor="t" lIns="0" rIns="0" tIns="0" bIns="0">
             <a:spAutoFit/>
           </a:bodyPr>
           <a:lstStyle/>
           <a:p>
             <a:pPr>
+              <a:lnSpc>
+                <a:spcPct val="113000"/>
+              </a:lnSpc>
               <a:spcBef>
                 <a:spcPts val="0"/>
               </a:spcBef>
               <a:spcAft>
-                <a:spcPts val="800"/>
+                <a:spcPts val="0"/>
               </a:spcAft>
             </a:pPr>
             <a:r>
-              <a:rPr sz="3200" b="1" i="0">
+              <a:rPr sz="3100" b="1">
                 <a:solidFill>
                   <a:srgbClr val="0B2A44"/>
                 </a:solidFill>
@@ -4397,14 +5540,60 @@
       </p:sp>
       <p:sp>
         <p:nvSpPr>
-          <p:cNvPr id="3" name="TextBox 2"/>
+          <p:cNvPr id="3" name="Rounded Rectangle 2"/>
+          <p:cNvSpPr/>
+          <p:nvPr/>
+        </p:nvSpPr>
+        <p:spPr>
+          <a:xfrm>
+            <a:off x="521207" y="1097280"/>
+            <a:ext cx="777240" cy="82296"/>
+          </a:xfrm>
+          <a:prstGeom prst="roundRect">
+            <a:avLst>
+              <a:gd name="adj" fmla="val 5500"/>
+            </a:avLst>
+          </a:prstGeom>
+          <a:solidFill>
+            <a:srgbClr val="E5322D"/>
+          </a:solidFill>
+          <a:ln>
+            <a:noFill/>
+          </a:ln>
+          <a:effectLst/>
+        </p:spPr>
+        <p:style>
+          <a:lnRef idx="1">
+            <a:schemeClr val="accent1"/>
+          </a:lnRef>
+          <a:fillRef idx="3">
+            <a:schemeClr val="accent1"/>
+          </a:fillRef>
+          <a:effectRef idx="2">
+            <a:schemeClr val="accent1"/>
+          </a:effectRef>
+          <a:fontRef idx="minor">
+            <a:schemeClr val="lt1"/>
+          </a:fontRef>
+        </p:style>
+        <p:txBody>
+          <a:bodyPr rtlCol="0" anchor="ctr"/>
+          <a:lstStyle/>
+          <a:p>
+            <a:pPr algn="ctr"/>
+          </a:p>
+        </p:txBody>
+      </p:sp>
+      <p:sp>
+        <p:nvSpPr>
+          <p:cNvPr id="4" name="TextBox 3"/>
           <p:cNvSpPr txBox="1"/>
           <p:nvPr/>
         </p:nvSpPr>
         <p:spPr>
           <a:xfrm>
-            <a:off x="640080" y="1371600"/>
-            <a:ext cx="5029200" cy="1371600"/>
+            <a:off x="502920" y="1463040"/>
+            <a:ext cx="4526280" cy="3291840"/>
           </a:xfrm>
           <a:prstGeom prst="rect">
             <a:avLst/>
@@ -4412,12 +5601,150 @@
           <a:noFill/>
         </p:spPr>
         <p:txBody>
-          <a:bodyPr wrap="square">
+          <a:bodyPr wrap="square" anchor="t" lIns="0" rIns="0" tIns="0" bIns="0">
             <a:spAutoFit/>
           </a:bodyPr>
           <a:lstStyle/>
           <a:p>
             <a:pPr>
+              <a:lnSpc>
+                <a:spcPct val="113000"/>
+              </a:lnSpc>
+              <a:spcBef>
+                <a:spcPts val="0"/>
+              </a:spcBef>
+              <a:spcAft>
+                <a:spcPts val="1000"/>
+              </a:spcAft>
+            </a:pPr>
+            <a:r>
+              <a:rPr sz="1550" b="0">
+                <a:solidFill>
+                  <a:srgbClr val="0B2A44"/>
+                </a:solidFill>
+                <a:latin typeface="Noto Sans"/>
+              </a:rPr>
+              <a:t>Sales Representative mencatat attrition 39,8%, hampir 2,5 kali rata-rata perusahaan (16,1%).</a:t>
+            </a:r>
+          </a:p>
+          <a:p>
+            <a:pPr>
+              <a:lnSpc>
+                <a:spcPct val="113000"/>
+              </a:lnSpc>
+              <a:spcBef>
+                <a:spcPts val="0"/>
+              </a:spcBef>
+              <a:spcAft>
+                <a:spcPts val="1000"/>
+              </a:spcAft>
+            </a:pPr>
+            <a:r>
+              <a:rPr sz="1550" b="0">
+                <a:solidFill>
+                  <a:srgbClr val="0B2A44"/>
+                </a:solidFill>
+                <a:latin typeface="Noto Sans"/>
+              </a:rPr>
+              <a:t>Menyusul Laboratory Technician (23,9%) dan staf Human Resources (23,1%). Peran paling aman: Research Director, hanya 2,5%.</a:t>
+            </a:r>
+          </a:p>
+          <a:p>
+            <a:pPr>
+              <a:lnSpc>
+                <a:spcPct val="113000"/>
+              </a:lnSpc>
+              <a:spcBef>
+                <a:spcPts val="0"/>
+              </a:spcBef>
+              <a:spcAft>
+                <a:spcPts val="1000"/>
+              </a:spcAft>
+            </a:pPr>
+            <a:r>
+              <a:rPr sz="1550" b="0">
+                <a:solidFill>
+                  <a:srgbClr val="0B2A44"/>
+                </a:solidFill>
+                <a:latin typeface="Noto Sans"/>
+              </a:rPr>
+              <a:t>Per departemen: Sales tertinggi (20,6%), lalu Human Resources (19,0%), dan Research and Development (13,8%).</a:t>
+            </a:r>
+          </a:p>
+        </p:txBody>
+      </p:sp>
+      <p:sp>
+        <p:nvSpPr>
+          <p:cNvPr id="5" name="Rounded Rectangle 4"/>
+          <p:cNvSpPr/>
+          <p:nvPr/>
+        </p:nvSpPr>
+        <p:spPr>
+          <a:xfrm>
+            <a:off x="502920" y="4846320"/>
+            <a:ext cx="4526280" cy="1170432"/>
+          </a:xfrm>
+          <a:prstGeom prst="roundRect">
+            <a:avLst>
+              <a:gd name="adj" fmla="val 5500"/>
+            </a:avLst>
+          </a:prstGeom>
+          <a:solidFill>
+            <a:srgbClr val="0E4D7A"/>
+          </a:solidFill>
+          <a:ln>
+            <a:noFill/>
+          </a:ln>
+          <a:effectLst/>
+        </p:spPr>
+        <p:style>
+          <a:lnRef idx="1">
+            <a:schemeClr val="accent1"/>
+          </a:lnRef>
+          <a:fillRef idx="3">
+            <a:schemeClr val="accent1"/>
+          </a:fillRef>
+          <a:effectRef idx="2">
+            <a:schemeClr val="accent1"/>
+          </a:effectRef>
+          <a:fontRef idx="minor">
+            <a:schemeClr val="lt1"/>
+          </a:fontRef>
+        </p:style>
+        <p:txBody>
+          <a:bodyPr rtlCol="0" anchor="ctr"/>
+          <a:lstStyle/>
+          <a:p>
+            <a:pPr algn="ctr"/>
+          </a:p>
+        </p:txBody>
+      </p:sp>
+      <p:sp>
+        <p:nvSpPr>
+          <p:cNvPr id="6" name="TextBox 5"/>
+          <p:cNvSpPr txBox="1"/>
+          <p:nvPr/>
+        </p:nvSpPr>
+        <p:spPr>
+          <a:xfrm>
+            <a:off x="777240" y="5010912"/>
+            <a:ext cx="4023360" cy="896112"/>
+          </a:xfrm>
+          <a:prstGeom prst="rect">
+            <a:avLst/>
+          </a:prstGeom>
+          <a:noFill/>
+        </p:spPr>
+        <p:txBody>
+          <a:bodyPr wrap="square" anchor="t" lIns="0" rIns="0" tIns="0" bIns="0">
+            <a:spAutoFit/>
+          </a:bodyPr>
+          <a:lstStyle/>
+          <a:p>
+            <a:pPr>
+              <a:lnSpc>
+                <a:spcPct val="113000"/>
+              </a:lnSpc>
               <a:spcBef>
                 <a:spcPts val="0"/>
               </a:spcBef>
@@ -4426,9 +5753,9 @@
               </a:spcAft>
             </a:pPr>
             <a:r>
-              <a:rPr sz="6200" b="1" i="0">
-                <a:solidFill>
-                  <a:srgbClr val="E5322D"/>
+              <a:rPr sz="2700" b="1">
+                <a:solidFill>
+                  <a:srgbClr val="F5C542"/>
                 </a:solidFill>
                 <a:latin typeface="Noto Sans"/>
               </a:rPr>
@@ -4437,6 +5764,9 @@
           </a:p>
           <a:p>
             <a:pPr>
+              <a:lnSpc>
+                <a:spcPct val="113000"/>
+              </a:lnSpc>
               <a:spcBef>
                 <a:spcPts val="0"/>
               </a:spcBef>
@@ -4445,123 +5775,112 @@
               </a:spcAft>
             </a:pPr>
             <a:r>
-              <a:rPr sz="1400" b="0" i="0">
-                <a:solidFill>
-                  <a:srgbClr val="0B2A44"/>
+              <a:rPr sz="1250" b="0">
+                <a:solidFill>
+                  <a:srgbClr val="DCE9F2"/>
                 </a:solidFill>
                 <a:latin typeface="Noto Sans"/>
               </a:rPr>
-              <a:t>attrition Sales Representative</a:t>
-            </a:r>
-          </a:p>
-        </p:txBody>
-      </p:sp>
-      <p:sp>
-        <p:nvSpPr>
-          <p:cNvPr id="4" name="TextBox 3"/>
-          <p:cNvSpPr txBox="1"/>
-          <p:nvPr/>
-        </p:nvSpPr>
-        <p:spPr>
-          <a:xfrm>
-            <a:off x="640080" y="2880360"/>
-            <a:ext cx="5029200" cy="4937760"/>
-          </a:xfrm>
-          <a:prstGeom prst="rect">
-            <a:avLst/>
-          </a:prstGeom>
-          <a:noFill/>
-        </p:spPr>
-        <p:txBody>
-          <a:bodyPr wrap="square">
-            <a:spAutoFit/>
-          </a:bodyPr>
-          <a:lstStyle/>
-          <a:p>
-            <a:pPr marL="171450" indent="-171450">
-              <a:spcBef>
-                <a:spcPts val="0"/>
-              </a:spcBef>
-              <a:spcAft>
-                <a:spcPts val="1000"/>
-              </a:spcAft>
-              <a:buChar char="•"/>
-            </a:pPr>
-            <a:r>
-              <a:rPr sz="1500" b="0" i="0">
-                <a:solidFill>
-                  <a:srgbClr val="0B2A44"/>
-                </a:solidFill>
-                <a:latin typeface="Noto Sans"/>
-              </a:rPr>
-              <a:t>Sales Representative mencatat attrition 39,8 persen, hampir 2,5 kali rata rata perusahaan</a:t>
-            </a:r>
-          </a:p>
-          <a:p>
-            <a:pPr marL="171450" indent="-171450">
-              <a:spcBef>
-                <a:spcPts val="0"/>
-              </a:spcBef>
-              <a:spcAft>
-                <a:spcPts val="1000"/>
-              </a:spcAft>
-              <a:buChar char="•"/>
-            </a:pPr>
-            <a:r>
-              <a:rPr sz="1500" b="0" i="0">
-                <a:solidFill>
-                  <a:srgbClr val="0B2A44"/>
-                </a:solidFill>
-                <a:latin typeface="Noto Sans"/>
-              </a:rPr>
-              <a:t>Laboratory Technician 23,9 persen dan staf Human Resources 23,1 persen menyusul di posisi berikutnya</a:t>
-            </a:r>
-          </a:p>
-          <a:p>
-            <a:pPr marL="171450" indent="-171450">
-              <a:spcBef>
-                <a:spcPts val="0"/>
-              </a:spcBef>
-              <a:spcAft>
-                <a:spcPts val="1000"/>
-              </a:spcAft>
-              <a:buChar char="•"/>
-            </a:pPr>
-            <a:r>
-              <a:rPr sz="1500" b="0" i="0">
-                <a:solidFill>
-                  <a:srgbClr val="0B2A44"/>
-                </a:solidFill>
-                <a:latin typeface="Noto Sans"/>
-              </a:rPr>
-              <a:t>Departemen Sales tertinggi 20,6 persen, lalu Human Resources 19,0 persen, Research and Development 13,8 persen</a:t>
-            </a:r>
-          </a:p>
-          <a:p>
-            <a:pPr marL="171450" indent="-171450">
-              <a:spcBef>
-                <a:spcPts val="0"/>
-              </a:spcBef>
-              <a:spcAft>
-                <a:spcPts val="1000"/>
-              </a:spcAft>
-              <a:buChar char="•"/>
-            </a:pPr>
-            <a:r>
-              <a:rPr sz="1500" b="0" i="0">
-                <a:solidFill>
-                  <a:srgbClr val="0B2A44"/>
-                </a:solidFill>
-                <a:latin typeface="Noto Sans"/>
-              </a:rPr>
-              <a:t>Sebaliknya Research Director hanya 2,5 persen dan Manager 4,9 persen, sangat stabil</a:t>
-            </a:r>
+              <a:t>attrition Sales Representative, tertinggi di perusahaan</a:t>
+            </a:r>
+          </a:p>
+        </p:txBody>
+      </p:sp>
+      <p:sp>
+        <p:nvSpPr>
+          <p:cNvPr id="7" name="Rounded Rectangle 6"/>
+          <p:cNvSpPr/>
+          <p:nvPr/>
+        </p:nvSpPr>
+        <p:spPr>
+          <a:xfrm>
+            <a:off x="5413248" y="1481328"/>
+            <a:ext cx="6336792" cy="3977639"/>
+          </a:xfrm>
+          <a:prstGeom prst="roundRect">
+            <a:avLst>
+              <a:gd name="adj" fmla="val 5500"/>
+            </a:avLst>
+          </a:prstGeom>
+          <a:solidFill>
+            <a:srgbClr val="DFD5C0"/>
+          </a:solidFill>
+          <a:ln>
+            <a:noFill/>
+          </a:ln>
+          <a:effectLst/>
+        </p:spPr>
+        <p:style>
+          <a:lnRef idx="1">
+            <a:schemeClr val="accent1"/>
+          </a:lnRef>
+          <a:fillRef idx="3">
+            <a:schemeClr val="accent1"/>
+          </a:fillRef>
+          <a:effectRef idx="2">
+            <a:schemeClr val="accent1"/>
+          </a:effectRef>
+          <a:fontRef idx="minor">
+            <a:schemeClr val="lt1"/>
+          </a:fontRef>
+        </p:style>
+        <p:txBody>
+          <a:bodyPr rtlCol="0" anchor="ctr"/>
+          <a:lstStyle/>
+          <a:p>
+            <a:pPr algn="ctr"/>
+          </a:p>
+        </p:txBody>
+      </p:sp>
+      <p:sp>
+        <p:nvSpPr>
+          <p:cNvPr id="8" name="Rounded Rectangle 7"/>
+          <p:cNvSpPr/>
+          <p:nvPr/>
+        </p:nvSpPr>
+        <p:spPr>
+          <a:xfrm>
+            <a:off x="5349240" y="1417320"/>
+            <a:ext cx="6336792" cy="3977639"/>
+          </a:xfrm>
+          <a:prstGeom prst="roundRect">
+            <a:avLst>
+              <a:gd name="adj" fmla="val 5500"/>
+            </a:avLst>
+          </a:prstGeom>
+          <a:solidFill>
+            <a:srgbClr val="FDFBF6"/>
+          </a:solidFill>
+          <a:ln>
+            <a:noFill/>
+          </a:ln>
+          <a:effectLst/>
+        </p:spPr>
+        <p:style>
+          <a:lnRef idx="1">
+            <a:schemeClr val="accent1"/>
+          </a:lnRef>
+          <a:fillRef idx="3">
+            <a:schemeClr val="accent1"/>
+          </a:fillRef>
+          <a:effectRef idx="2">
+            <a:schemeClr val="accent1"/>
+          </a:effectRef>
+          <a:fontRef idx="minor">
+            <a:schemeClr val="lt1"/>
+          </a:fontRef>
+        </p:style>
+        <p:txBody>
+          <a:bodyPr rtlCol="0" anchor="ctr"/>
+          <a:lstStyle/>
+          <a:p>
+            <a:pPr algn="ctr"/>
           </a:p>
         </p:txBody>
       </p:sp>
       <p:pic>
         <p:nvPicPr>
-          <p:cNvPr id="5" name="Picture 4" descr="03_attrition_jobrole.png"/>
+          <p:cNvPr id="9" name="Picture 8" descr="03_attrition_jobrole.png"/>
           <p:cNvPicPr>
             <a:picLocks noChangeAspect="1"/>
           </p:cNvPicPr>
@@ -4575,8 +5894,8 @@
         </p:blipFill>
         <p:spPr>
           <a:xfrm>
-            <a:off x="5943600" y="1554480"/>
-            <a:ext cx="5760720" cy="3304262"/>
+            <a:off x="5550408" y="1704182"/>
+            <a:ext cx="5934455" cy="3403914"/>
           </a:xfrm>
           <a:prstGeom prst="rect">
             <a:avLst/>
@@ -4585,14 +5904,14 @@
       </p:pic>
       <p:sp>
         <p:nvSpPr>
-          <p:cNvPr id="6" name="TextBox 5"/>
+          <p:cNvPr id="10" name="TextBox 9"/>
           <p:cNvSpPr txBox="1"/>
           <p:nvPr/>
         </p:nvSpPr>
         <p:spPr>
           <a:xfrm>
-            <a:off x="5943600" y="4968470"/>
-            <a:ext cx="5760720" cy="365760"/>
+            <a:off x="5349240" y="5486399"/>
+            <a:ext cx="6336792" cy="274320"/>
           </a:xfrm>
           <a:prstGeom prst="rect">
             <a:avLst/>
@@ -4600,27 +5919,30 @@
           <a:noFill/>
         </p:spPr>
         <p:txBody>
-          <a:bodyPr wrap="square">
+          <a:bodyPr wrap="square" anchor="t" lIns="0" rIns="0" tIns="0" bIns="0">
             <a:spAutoFit/>
           </a:bodyPr>
           <a:lstStyle/>
           <a:p>
-            <a:pPr algn="ctr">
+            <a:pPr>
+              <a:lnSpc>
+                <a:spcPct val="113000"/>
+              </a:lnSpc>
               <a:spcBef>
                 <a:spcPts val="0"/>
               </a:spcBef>
               <a:spcAft>
-                <a:spcPts val="800"/>
+                <a:spcPts val="0"/>
               </a:spcAft>
             </a:pPr>
             <a:r>
-              <a:rPr sz="1200" b="0" i="1">
-                <a:solidFill>
-                  <a:srgbClr val="54626F"/>
+              <a:rPr sz="1050" b="0">
+                <a:solidFill>
+                  <a:srgbClr val="5B7186"/>
                 </a:solidFill>
                 <a:latin typeface="Noto Sans"/>
               </a:rPr>
-              <a:t>Attrition rate per job role</a:t>
+              <a:t>Chart: attrition rate per job role.</a:t>
             </a:r>
           </a:p>
         </p:txBody>
@@ -4659,8 +5981,8 @@
         </p:nvSpPr>
         <p:spPr>
           <a:xfrm>
-            <a:off x="640080" y="457200"/>
-            <a:ext cx="10881360" cy="777240"/>
+            <a:off x="502920" y="384048"/>
+            <a:ext cx="11155680" cy="914400"/>
           </a:xfrm>
           <a:prstGeom prst="rect">
             <a:avLst/>
@@ -4668,21 +5990,24 @@
           <a:noFill/>
         </p:spPr>
         <p:txBody>
-          <a:bodyPr wrap="square">
+          <a:bodyPr wrap="square" anchor="t" lIns="0" rIns="0" tIns="0" bIns="0">
             <a:spAutoFit/>
           </a:bodyPr>
           <a:lstStyle/>
           <a:p>
             <a:pPr>
+              <a:lnSpc>
+                <a:spcPct val="113000"/>
+              </a:lnSpc>
               <a:spcBef>
                 <a:spcPts val="0"/>
               </a:spcBef>
               <a:spcAft>
-                <a:spcPts val="800"/>
+                <a:spcPts val="0"/>
               </a:spcAft>
             </a:pPr>
             <a:r>
-              <a:rPr sz="3200" b="1" i="0">
+              <a:rPr sz="3100" b="1">
                 <a:solidFill>
                   <a:srgbClr val="0B2A44"/>
                 </a:solidFill>
@@ -4693,9 +6018,349 @@
           </a:p>
         </p:txBody>
       </p:sp>
+      <p:sp>
+        <p:nvSpPr>
+          <p:cNvPr id="3" name="Rounded Rectangle 2"/>
+          <p:cNvSpPr/>
+          <p:nvPr/>
+        </p:nvSpPr>
+        <p:spPr>
+          <a:xfrm>
+            <a:off x="521207" y="1097280"/>
+            <a:ext cx="777240" cy="82296"/>
+          </a:xfrm>
+          <a:prstGeom prst="roundRect">
+            <a:avLst>
+              <a:gd name="adj" fmla="val 5500"/>
+            </a:avLst>
+          </a:prstGeom>
+          <a:solidFill>
+            <a:srgbClr val="E5322D"/>
+          </a:solidFill>
+          <a:ln>
+            <a:noFill/>
+          </a:ln>
+          <a:effectLst/>
+        </p:spPr>
+        <p:style>
+          <a:lnRef idx="1">
+            <a:schemeClr val="accent1"/>
+          </a:lnRef>
+          <a:fillRef idx="3">
+            <a:schemeClr val="accent1"/>
+          </a:fillRef>
+          <a:effectRef idx="2">
+            <a:schemeClr val="accent1"/>
+          </a:effectRef>
+          <a:fontRef idx="minor">
+            <a:schemeClr val="lt1"/>
+          </a:fontRef>
+        </p:style>
+        <p:txBody>
+          <a:bodyPr rtlCol="0" anchor="ctr"/>
+          <a:lstStyle/>
+          <a:p>
+            <a:pPr algn="ctr"/>
+          </a:p>
+        </p:txBody>
+      </p:sp>
+      <p:sp>
+        <p:nvSpPr>
+          <p:cNvPr id="4" name="Rounded Rectangle 3"/>
+          <p:cNvSpPr/>
+          <p:nvPr/>
+        </p:nvSpPr>
+        <p:spPr>
+          <a:xfrm>
+            <a:off x="502920" y="1417320"/>
+            <a:ext cx="4572000" cy="1783080"/>
+          </a:xfrm>
+          <a:prstGeom prst="roundRect">
+            <a:avLst>
+              <a:gd name="adj" fmla="val 5500"/>
+            </a:avLst>
+          </a:prstGeom>
+          <a:solidFill>
+            <a:srgbClr val="0E4D7A"/>
+          </a:solidFill>
+          <a:ln>
+            <a:noFill/>
+          </a:ln>
+          <a:effectLst/>
+        </p:spPr>
+        <p:style>
+          <a:lnRef idx="1">
+            <a:schemeClr val="accent1"/>
+          </a:lnRef>
+          <a:fillRef idx="3">
+            <a:schemeClr val="accent1"/>
+          </a:fillRef>
+          <a:effectRef idx="2">
+            <a:schemeClr val="accent1"/>
+          </a:effectRef>
+          <a:fontRef idx="minor">
+            <a:schemeClr val="lt1"/>
+          </a:fontRef>
+        </p:style>
+        <p:txBody>
+          <a:bodyPr rtlCol="0" anchor="ctr"/>
+          <a:lstStyle/>
+          <a:p>
+            <a:pPr algn="ctr"/>
+          </a:p>
+        </p:txBody>
+      </p:sp>
+      <p:sp>
+        <p:nvSpPr>
+          <p:cNvPr id="5" name="TextBox 4"/>
+          <p:cNvSpPr txBox="1"/>
+          <p:nvPr/>
+        </p:nvSpPr>
+        <p:spPr>
+          <a:xfrm>
+            <a:off x="822960" y="1627632"/>
+            <a:ext cx="3977639" cy="1463040"/>
+          </a:xfrm>
+          <a:prstGeom prst="rect">
+            <a:avLst/>
+          </a:prstGeom>
+          <a:noFill/>
+        </p:spPr>
+        <p:txBody>
+          <a:bodyPr wrap="square" anchor="t" lIns="0" rIns="0" tIns="0" bIns="0">
+            <a:spAutoFit/>
+          </a:bodyPr>
+          <a:lstStyle/>
+          <a:p>
+            <a:pPr>
+              <a:lnSpc>
+                <a:spcPct val="113000"/>
+              </a:lnSpc>
+              <a:spcBef>
+                <a:spcPts val="0"/>
+              </a:spcBef>
+              <a:spcAft>
+                <a:spcPts val="200"/>
+              </a:spcAft>
+            </a:pPr>
+            <a:r>
+              <a:rPr sz="4400" b="1">
+                <a:solidFill>
+                  <a:srgbClr val="F5C542"/>
+                </a:solidFill>
+                <a:latin typeface="Noto Sans"/>
+              </a:rPr>
+              <a:t>30,5%</a:t>
+            </a:r>
+          </a:p>
+          <a:p>
+            <a:pPr>
+              <a:lnSpc>
+                <a:spcPct val="113000"/>
+              </a:lnSpc>
+              <a:spcBef>
+                <a:spcPts val="0"/>
+              </a:spcBef>
+              <a:spcAft>
+                <a:spcPts val="0"/>
+              </a:spcAft>
+            </a:pPr>
+            <a:r>
+              <a:rPr sz="1250" b="0">
+                <a:solidFill>
+                  <a:srgbClr val="DCE9F2"/>
+                </a:solidFill>
+                <a:latin typeface="Noto Sans"/>
+              </a:rPr>
+              <a:t>attrition karyawan lembur, vs 10,4% yang tidak lembur</a:t>
+            </a:r>
+          </a:p>
+        </p:txBody>
+      </p:sp>
+      <p:sp>
+        <p:nvSpPr>
+          <p:cNvPr id="6" name="TextBox 5"/>
+          <p:cNvSpPr txBox="1"/>
+          <p:nvPr/>
+        </p:nvSpPr>
+        <p:spPr>
+          <a:xfrm>
+            <a:off x="502920" y="3429000"/>
+            <a:ext cx="4572000" cy="2651760"/>
+          </a:xfrm>
+          <a:prstGeom prst="rect">
+            <a:avLst/>
+          </a:prstGeom>
+          <a:noFill/>
+        </p:spPr>
+        <p:txBody>
+          <a:bodyPr wrap="square" anchor="t" lIns="0" rIns="0" tIns="0" bIns="0">
+            <a:spAutoFit/>
+          </a:bodyPr>
+          <a:lstStyle/>
+          <a:p>
+            <a:pPr>
+              <a:lnSpc>
+                <a:spcPct val="113000"/>
+              </a:lnSpc>
+              <a:spcBef>
+                <a:spcPts val="0"/>
+              </a:spcBef>
+              <a:spcAft>
+                <a:spcPts val="1000"/>
+              </a:spcAft>
+            </a:pPr>
+            <a:r>
+              <a:rPr sz="1450" b="0">
+                <a:solidFill>
+                  <a:srgbClr val="0B2A44"/>
+                </a:solidFill>
+                <a:latin typeface="Noto Sans"/>
+              </a:rPr>
+              <a:t>Karyawan yang lembur resign 30,5%, dibanding 10,4% untuk yang tidak lembur: risiko hampir 3 kali lipat (rasio 2,9 kali).</a:t>
+            </a:r>
+          </a:p>
+          <a:p>
+            <a:pPr>
+              <a:lnSpc>
+                <a:spcPct val="113000"/>
+              </a:lnSpc>
+              <a:spcBef>
+                <a:spcPts val="0"/>
+              </a:spcBef>
+              <a:spcAft>
+                <a:spcPts val="1000"/>
+              </a:spcAft>
+            </a:pPr>
+            <a:r>
+              <a:rPr sz="1450" b="0">
+                <a:solidFill>
+                  <a:srgbClr val="0B2A44"/>
+                </a:solidFill>
+                <a:latin typeface="Noto Sans"/>
+              </a:rPr>
+              <a:t>Dari 416 karyawan lembur (28,3% dari seluruh karyawan), 127 di antaranya resign.</a:t>
+            </a:r>
+          </a:p>
+          <a:p>
+            <a:pPr>
+              <a:lnSpc>
+                <a:spcPct val="113000"/>
+              </a:lnSpc>
+              <a:spcBef>
+                <a:spcPts val="0"/>
+              </a:spcBef>
+              <a:spcAft>
+                <a:spcPts val="1000"/>
+              </a:spcAft>
+            </a:pPr>
+            <a:r>
+              <a:rPr sz="1450" b="0">
+                <a:solidFill>
+                  <a:srgbClr val="0B2A44"/>
+                </a:solidFill>
+                <a:latin typeface="Noto Sans"/>
+              </a:rPr>
+              <a:t>Ini sinyal kuat burnout, terutama di tim Sales dan laboratorium yang lemburnya paling berat.</a:t>
+            </a:r>
+          </a:p>
+        </p:txBody>
+      </p:sp>
+      <p:sp>
+        <p:nvSpPr>
+          <p:cNvPr id="7" name="Rounded Rectangle 6"/>
+          <p:cNvSpPr/>
+          <p:nvPr/>
+        </p:nvSpPr>
+        <p:spPr>
+          <a:xfrm>
+            <a:off x="5458968" y="1481328"/>
+            <a:ext cx="6291072" cy="4206240"/>
+          </a:xfrm>
+          <a:prstGeom prst="roundRect">
+            <a:avLst>
+              <a:gd name="adj" fmla="val 5500"/>
+            </a:avLst>
+          </a:prstGeom>
+          <a:solidFill>
+            <a:srgbClr val="DFD5C0"/>
+          </a:solidFill>
+          <a:ln>
+            <a:noFill/>
+          </a:ln>
+          <a:effectLst/>
+        </p:spPr>
+        <p:style>
+          <a:lnRef idx="1">
+            <a:schemeClr val="accent1"/>
+          </a:lnRef>
+          <a:fillRef idx="3">
+            <a:schemeClr val="accent1"/>
+          </a:fillRef>
+          <a:effectRef idx="2">
+            <a:schemeClr val="accent1"/>
+          </a:effectRef>
+          <a:fontRef idx="minor">
+            <a:schemeClr val="lt1"/>
+          </a:fontRef>
+        </p:style>
+        <p:txBody>
+          <a:bodyPr rtlCol="0" anchor="ctr"/>
+          <a:lstStyle/>
+          <a:p>
+            <a:pPr algn="ctr"/>
+          </a:p>
+        </p:txBody>
+      </p:sp>
+      <p:sp>
+        <p:nvSpPr>
+          <p:cNvPr id="8" name="Rounded Rectangle 7"/>
+          <p:cNvSpPr/>
+          <p:nvPr/>
+        </p:nvSpPr>
+        <p:spPr>
+          <a:xfrm>
+            <a:off x="5394960" y="1417320"/>
+            <a:ext cx="6291072" cy="4206240"/>
+          </a:xfrm>
+          <a:prstGeom prst="roundRect">
+            <a:avLst>
+              <a:gd name="adj" fmla="val 5500"/>
+            </a:avLst>
+          </a:prstGeom>
+          <a:solidFill>
+            <a:srgbClr val="FDFBF6"/>
+          </a:solidFill>
+          <a:ln>
+            <a:noFill/>
+          </a:ln>
+          <a:effectLst/>
+        </p:spPr>
+        <p:style>
+          <a:lnRef idx="1">
+            <a:schemeClr val="accent1"/>
+          </a:lnRef>
+          <a:fillRef idx="3">
+            <a:schemeClr val="accent1"/>
+          </a:fillRef>
+          <a:effectRef idx="2">
+            <a:schemeClr val="accent1"/>
+          </a:effectRef>
+          <a:fontRef idx="minor">
+            <a:schemeClr val="lt1"/>
+          </a:fontRef>
+        </p:style>
+        <p:txBody>
+          <a:bodyPr rtlCol="0" anchor="ctr"/>
+          <a:lstStyle/>
+          <a:p>
+            <a:pPr algn="ctr"/>
+          </a:p>
+        </p:txBody>
+      </p:sp>
       <p:pic>
         <p:nvPicPr>
-          <p:cNvPr id="3" name="Picture 2" descr="04_attrition_overtime.png"/>
+          <p:cNvPr id="9" name="Picture 8" descr="04_attrition_overtime.png"/>
           <p:cNvPicPr>
             <a:picLocks noChangeAspect="1"/>
           </p:cNvPicPr>
@@ -4709,8 +6374,8 @@
         </p:blipFill>
         <p:spPr>
           <a:xfrm>
-            <a:off x="640080" y="1691640"/>
-            <a:ext cx="4846320" cy="3350912"/>
+            <a:off x="5789762" y="1618488"/>
+            <a:ext cx="5501467" cy="3803903"/>
           </a:xfrm>
           <a:prstGeom prst="rect">
             <a:avLst/>
@@ -4719,14 +6384,14 @@
       </p:pic>
       <p:sp>
         <p:nvSpPr>
-          <p:cNvPr id="4" name="TextBox 3"/>
+          <p:cNvPr id="10" name="TextBox 9"/>
           <p:cNvSpPr txBox="1"/>
           <p:nvPr/>
         </p:nvSpPr>
         <p:spPr>
           <a:xfrm>
-            <a:off x="640080" y="5152280"/>
-            <a:ext cx="4846320" cy="365760"/>
+            <a:off x="5394960" y="5714999"/>
+            <a:ext cx="6291072" cy="274320"/>
           </a:xfrm>
           <a:prstGeom prst="rect">
             <a:avLst/>
@@ -4734,191 +6399,30 @@
           <a:noFill/>
         </p:spPr>
         <p:txBody>
-          <a:bodyPr wrap="square">
+          <a:bodyPr wrap="square" anchor="t" lIns="0" rIns="0" tIns="0" bIns="0">
             <a:spAutoFit/>
           </a:bodyPr>
           <a:lstStyle/>
           <a:p>
-            <a:pPr algn="ctr">
+            <a:pPr>
+              <a:lnSpc>
+                <a:spcPct val="113000"/>
+              </a:lnSpc>
               <a:spcBef>
                 <a:spcPts val="0"/>
               </a:spcBef>
               <a:spcAft>
-                <a:spcPts val="800"/>
+                <a:spcPts val="0"/>
               </a:spcAft>
             </a:pPr>
             <a:r>
-              <a:rPr sz="1200" b="0" i="1">
-                <a:solidFill>
-                  <a:srgbClr val="54626F"/>
+              <a:rPr sz="1050" b="0">
+                <a:solidFill>
+                  <a:srgbClr val="5B7186"/>
                 </a:solidFill>
                 <a:latin typeface="Noto Sans"/>
               </a:rPr>
-              <a:t>Attrition rate: lembur vs tidak lembur</a:t>
-            </a:r>
-          </a:p>
-        </p:txBody>
-      </p:sp>
-      <p:sp>
-        <p:nvSpPr>
-          <p:cNvPr id="5" name="TextBox 4"/>
-          <p:cNvSpPr txBox="1"/>
-          <p:nvPr/>
-        </p:nvSpPr>
-        <p:spPr>
-          <a:xfrm>
-            <a:off x="6035040" y="1463040"/>
-            <a:ext cx="5486400" cy="1234440"/>
-          </a:xfrm>
-          <a:prstGeom prst="rect">
-            <a:avLst/>
-          </a:prstGeom>
-          <a:noFill/>
-        </p:spPr>
-        <p:txBody>
-          <a:bodyPr wrap="square">
-            <a:spAutoFit/>
-          </a:bodyPr>
-          <a:lstStyle/>
-          <a:p>
-            <a:pPr>
-              <a:spcBef>
-                <a:spcPts val="0"/>
-              </a:spcBef>
-              <a:spcAft>
-                <a:spcPts val="200"/>
-              </a:spcAft>
-            </a:pPr>
-            <a:r>
-              <a:rPr sz="5400" b="1" i="0">
-                <a:solidFill>
-                  <a:srgbClr val="0E4D7A"/>
-                </a:solidFill>
-                <a:latin typeface="Noto Sans"/>
-              </a:rPr>
-              <a:t>30,5%</a:t>
-            </a:r>
-          </a:p>
-          <a:p>
-            <a:pPr>
-              <a:spcBef>
-                <a:spcPts val="0"/>
-              </a:spcBef>
-              <a:spcAft>
-                <a:spcPts val="0"/>
-              </a:spcAft>
-            </a:pPr>
-            <a:r>
-              <a:rPr sz="1400" b="0" i="0">
-                <a:solidFill>
-                  <a:srgbClr val="0B2A44"/>
-                </a:solidFill>
-                <a:latin typeface="Noto Sans"/>
-              </a:rPr>
-              <a:t>attrition karyawan yang lembur</a:t>
-            </a:r>
-          </a:p>
-        </p:txBody>
-      </p:sp>
-      <p:sp>
-        <p:nvSpPr>
-          <p:cNvPr id="6" name="TextBox 5"/>
-          <p:cNvSpPr txBox="1"/>
-          <p:nvPr/>
-        </p:nvSpPr>
-        <p:spPr>
-          <a:xfrm>
-            <a:off x="6035040" y="2834640"/>
-            <a:ext cx="5486400" cy="4937760"/>
-          </a:xfrm>
-          <a:prstGeom prst="rect">
-            <a:avLst/>
-          </a:prstGeom>
-          <a:noFill/>
-        </p:spPr>
-        <p:txBody>
-          <a:bodyPr wrap="square">
-            <a:spAutoFit/>
-          </a:bodyPr>
-          <a:lstStyle/>
-          <a:p>
-            <a:pPr marL="171450" indent="-171450">
-              <a:spcBef>
-                <a:spcPts val="0"/>
-              </a:spcBef>
-              <a:spcAft>
-                <a:spcPts val="1200"/>
-              </a:spcAft>
-              <a:buChar char="•"/>
-            </a:pPr>
-            <a:r>
-              <a:rPr sz="1600" b="0" i="0">
-                <a:solidFill>
-                  <a:srgbClr val="0B2A44"/>
-                </a:solidFill>
-                <a:latin typeface="Noto Sans"/>
-              </a:rPr>
-              <a:t>Karyawan yang lembur resign 30,5 persen, dibanding yang tidak lembur hanya 10,4 persen</a:t>
-            </a:r>
-          </a:p>
-          <a:p>
-            <a:pPr marL="171450" indent="-171450">
-              <a:spcBef>
-                <a:spcPts val="0"/>
-              </a:spcBef>
-              <a:spcAft>
-                <a:spcPts val="1200"/>
-              </a:spcAft>
-              <a:buChar char="•"/>
-            </a:pPr>
-            <a:r>
-              <a:rPr sz="1600" b="0" i="0">
-                <a:solidFill>
-                  <a:srgbClr val="0B2A44"/>
-                </a:solidFill>
-                <a:latin typeface="Noto Sans"/>
-              </a:rPr>
-              <a:t>Artinya karyawan lembur berisiko hampir 3 kali lipat untuk pergi</a:t>
-            </a:r>
-          </a:p>
-          <a:p>
-            <a:pPr marL="171450" indent="-171450">
-              <a:spcBef>
-                <a:spcPts val="0"/>
-              </a:spcBef>
-              <a:spcAft>
-                <a:spcPts val="1200"/>
-              </a:spcAft>
-              <a:buChar char="•"/>
-            </a:pPr>
-            <a:r>
-              <a:rPr sz="1600" b="0" i="0">
-                <a:solidFill>
-                  <a:srgbClr val="0B2A44"/>
-                </a:solidFill>
-                <a:latin typeface="Noto Sans"/>
-              </a:rPr>
-              <a:t>Dari 416 karyawan lembur, 127 di antaranya resign, porsi yang sangat besar</a:t>
-            </a:r>
-          </a:p>
-          <a:p>
-            <a:pPr marL="171450" indent="-171450">
-              <a:spcBef>
-                <a:spcPts val="0"/>
-              </a:spcBef>
-              <a:spcAft>
-                <a:spcPts val="1200"/>
-              </a:spcAft>
-              <a:buChar char="•"/>
-            </a:pPr>
-            <a:r>
-              <a:rPr sz="1600" b="0" i="0">
-                <a:solidFill>
-                  <a:srgbClr val="0B2A44"/>
-                </a:solidFill>
-                <a:latin typeface="Noto Sans"/>
-              </a:rPr>
-              <a:t>Ini sinyal kuat burnout, terutama di tim Sales dan laboratorium yang lemburnya tinggi</a:t>
+              <a:t>Chart: attrition rate lembur vs tidak lembur.</a:t>
             </a:r>
           </a:p>
         </p:txBody>
@@ -4957,8 +6461,8 @@
         </p:nvSpPr>
         <p:spPr>
           <a:xfrm>
-            <a:off x="640080" y="457200"/>
-            <a:ext cx="10881360" cy="777240"/>
+            <a:off x="502920" y="384048"/>
+            <a:ext cx="11155680" cy="914400"/>
           </a:xfrm>
           <a:prstGeom prst="rect">
             <a:avLst/>
@@ -4966,21 +6470,24 @@
           <a:noFill/>
         </p:spPr>
         <p:txBody>
-          <a:bodyPr wrap="square">
+          <a:bodyPr wrap="square" anchor="t" lIns="0" rIns="0" tIns="0" bIns="0">
             <a:spAutoFit/>
           </a:bodyPr>
           <a:lstStyle/>
           <a:p>
             <a:pPr>
+              <a:lnSpc>
+                <a:spcPct val="113000"/>
+              </a:lnSpc>
               <a:spcBef>
                 <a:spcPts val="0"/>
               </a:spcBef>
               <a:spcAft>
-                <a:spcPts val="800"/>
+                <a:spcPts val="0"/>
               </a:spcAft>
             </a:pPr>
             <a:r>
-              <a:rPr sz="3200" b="1" i="0">
+              <a:rPr sz="3100" b="1">
                 <a:solidFill>
                   <a:srgbClr val="0B2A44"/>
                 </a:solidFill>
@@ -4993,110 +6500,145 @@
       </p:sp>
       <p:sp>
         <p:nvSpPr>
-          <p:cNvPr id="3" name="TextBox 2"/>
-          <p:cNvSpPr txBox="1"/>
-          <p:nvPr/>
-        </p:nvSpPr>
-        <p:spPr>
-          <a:xfrm>
-            <a:off x="640080" y="1600200"/>
-            <a:ext cx="5303520" cy="4937760"/>
-          </a:xfrm>
-          <a:prstGeom prst="rect">
-            <a:avLst/>
-          </a:prstGeom>
-          <a:noFill/>
-        </p:spPr>
-        <p:txBody>
-          <a:bodyPr wrap="square">
-            <a:spAutoFit/>
-          </a:bodyPr>
-          <a:lstStyle/>
-          <a:p>
-            <a:pPr marL="171450" indent="-171450">
-              <a:spcBef>
-                <a:spcPts val="0"/>
-              </a:spcBef>
-              <a:spcAft>
-                <a:spcPts val="1400"/>
-              </a:spcAft>
-              <a:buChar char="•"/>
-            </a:pPr>
-            <a:r>
-              <a:rPr sz="1600" b="0" i="0">
-                <a:solidFill>
-                  <a:srgbClr val="0B2A44"/>
-                </a:solidFill>
-                <a:latin typeface="Noto Sans"/>
-              </a:rPr>
-              <a:t>Gaji di bawah 3.000 resign 28,6 persen, jauh di atas band gaji lain yang berkisar 9 sampai 13 persen</a:t>
-            </a:r>
-          </a:p>
-          <a:p>
-            <a:pPr marL="171450" indent="-171450">
-              <a:spcBef>
-                <a:spcPts val="0"/>
-              </a:spcBef>
-              <a:spcAft>
-                <a:spcPts val="1400"/>
-              </a:spcAft>
-              <a:buChar char="•"/>
-            </a:pPr>
-            <a:r>
-              <a:rPr sz="1600" b="0" i="0">
-                <a:solidFill>
-                  <a:srgbClr val="0B2A44"/>
-                </a:solidFill>
-                <a:latin typeface="Noto Sans"/>
-              </a:rPr>
-              <a:t>Karyawan di bawah 30 tahun resign 27,9 persen, lalu turun bertahap sampai 9,7 persen di usia 40an</a:t>
-            </a:r>
-          </a:p>
-          <a:p>
-            <a:pPr marL="171450" indent="-171450">
-              <a:spcBef>
-                <a:spcPts val="0"/>
-              </a:spcBef>
-              <a:spcAft>
-                <a:spcPts val="1400"/>
-              </a:spcAft>
-              <a:buChar char="•"/>
-            </a:pPr>
-            <a:r>
-              <a:rPr sz="1600" b="0" i="0">
-                <a:solidFill>
-                  <a:srgbClr val="0B2A44"/>
-                </a:solidFill>
-                <a:latin typeface="Noto Sans"/>
-              </a:rPr>
-              <a:t>Masa kerja 0 sampai 2 tahun resign 29,8 persen, lalu turun ke 8,1 persen setelah 11 tahun</a:t>
-            </a:r>
-          </a:p>
-          <a:p>
-            <a:pPr marL="171450" indent="-171450">
-              <a:spcBef>
-                <a:spcPts val="0"/>
-              </a:spcBef>
-              <a:spcAft>
-                <a:spcPts val="1400"/>
-              </a:spcAft>
-              <a:buChar char="•"/>
-            </a:pPr>
-            <a:r>
-              <a:rPr sz="1600" b="0" i="0">
-                <a:solidFill>
-                  <a:srgbClr val="0B2A44"/>
-                </a:solidFill>
-                <a:latin typeface="Noto Sans"/>
-              </a:rPr>
-              <a:t>Pola jelas: karyawan muda bergaji rendah di dua tahun pertama adalah kelompok paling rentan</a:t>
-            </a:r>
+          <p:cNvPr id="3" name="Rounded Rectangle 2"/>
+          <p:cNvSpPr/>
+          <p:nvPr/>
+        </p:nvSpPr>
+        <p:spPr>
+          <a:xfrm>
+            <a:off x="521207" y="1097280"/>
+            <a:ext cx="777240" cy="82296"/>
+          </a:xfrm>
+          <a:prstGeom prst="roundRect">
+            <a:avLst>
+              <a:gd name="adj" fmla="val 5500"/>
+            </a:avLst>
+          </a:prstGeom>
+          <a:solidFill>
+            <a:srgbClr val="E5322D"/>
+          </a:solidFill>
+          <a:ln>
+            <a:noFill/>
+          </a:ln>
+          <a:effectLst/>
+        </p:spPr>
+        <p:style>
+          <a:lnRef idx="1">
+            <a:schemeClr val="accent1"/>
+          </a:lnRef>
+          <a:fillRef idx="3">
+            <a:schemeClr val="accent1"/>
+          </a:fillRef>
+          <a:effectRef idx="2">
+            <a:schemeClr val="accent1"/>
+          </a:effectRef>
+          <a:fontRef idx="minor">
+            <a:schemeClr val="lt1"/>
+          </a:fontRef>
+        </p:style>
+        <p:txBody>
+          <a:bodyPr rtlCol="0" anchor="ctr"/>
+          <a:lstStyle/>
+          <a:p>
+            <a:pPr algn="ctr"/>
+          </a:p>
+        </p:txBody>
+      </p:sp>
+      <p:sp>
+        <p:nvSpPr>
+          <p:cNvPr id="4" name="Rounded Rectangle 3"/>
+          <p:cNvSpPr/>
+          <p:nvPr/>
+        </p:nvSpPr>
+        <p:spPr>
+          <a:xfrm>
+            <a:off x="566928" y="1481328"/>
+            <a:ext cx="5120640" cy="3520440"/>
+          </a:xfrm>
+          <a:prstGeom prst="roundRect">
+            <a:avLst>
+              <a:gd name="adj" fmla="val 5500"/>
+            </a:avLst>
+          </a:prstGeom>
+          <a:solidFill>
+            <a:srgbClr val="DFD5C0"/>
+          </a:solidFill>
+          <a:ln>
+            <a:noFill/>
+          </a:ln>
+          <a:effectLst/>
+        </p:spPr>
+        <p:style>
+          <a:lnRef idx="1">
+            <a:schemeClr val="accent1"/>
+          </a:lnRef>
+          <a:fillRef idx="3">
+            <a:schemeClr val="accent1"/>
+          </a:fillRef>
+          <a:effectRef idx="2">
+            <a:schemeClr val="accent1"/>
+          </a:effectRef>
+          <a:fontRef idx="minor">
+            <a:schemeClr val="lt1"/>
+          </a:fontRef>
+        </p:style>
+        <p:txBody>
+          <a:bodyPr rtlCol="0" anchor="ctr"/>
+          <a:lstStyle/>
+          <a:p>
+            <a:pPr algn="ctr"/>
+          </a:p>
+        </p:txBody>
+      </p:sp>
+      <p:sp>
+        <p:nvSpPr>
+          <p:cNvPr id="5" name="Rounded Rectangle 4"/>
+          <p:cNvSpPr/>
+          <p:nvPr/>
+        </p:nvSpPr>
+        <p:spPr>
+          <a:xfrm>
+            <a:off x="502920" y="1417320"/>
+            <a:ext cx="5120640" cy="3520440"/>
+          </a:xfrm>
+          <a:prstGeom prst="roundRect">
+            <a:avLst>
+              <a:gd name="adj" fmla="val 5500"/>
+            </a:avLst>
+          </a:prstGeom>
+          <a:solidFill>
+            <a:srgbClr val="FDFBF6"/>
+          </a:solidFill>
+          <a:ln>
+            <a:noFill/>
+          </a:ln>
+          <a:effectLst/>
+        </p:spPr>
+        <p:style>
+          <a:lnRef idx="1">
+            <a:schemeClr val="accent1"/>
+          </a:lnRef>
+          <a:fillRef idx="3">
+            <a:schemeClr val="accent1"/>
+          </a:fillRef>
+          <a:effectRef idx="2">
+            <a:schemeClr val="accent1"/>
+          </a:effectRef>
+          <a:fontRef idx="minor">
+            <a:schemeClr val="lt1"/>
+          </a:fontRef>
+        </p:style>
+        <p:txBody>
+          <a:bodyPr rtlCol="0" anchor="ctr"/>
+          <a:lstStyle/>
+          <a:p>
+            <a:pPr algn="ctr"/>
           </a:p>
         </p:txBody>
       </p:sp>
       <p:pic>
         <p:nvPicPr>
-          <p:cNvPr id="4" name="Picture 3" descr="05_attrition_income_band.png"/>
+          <p:cNvPr id="6" name="Picture 5" descr="05_attrition_income_band.png"/>
           <p:cNvPicPr>
             <a:picLocks noChangeAspect="1"/>
           </p:cNvPicPr>
@@ -5110,8 +6652,8 @@
         </p:blipFill>
         <p:spPr>
           <a:xfrm>
-            <a:off x="6172200" y="1691640"/>
-            <a:ext cx="5486400" cy="3329608"/>
+            <a:off x="704088" y="1745808"/>
+            <a:ext cx="4718303" cy="2863463"/>
           </a:xfrm>
           <a:prstGeom prst="rect">
             <a:avLst/>
@@ -5120,14 +6662,14 @@
       </p:pic>
       <p:sp>
         <p:nvSpPr>
-          <p:cNvPr id="5" name="TextBox 4"/>
+          <p:cNvPr id="7" name="TextBox 6"/>
           <p:cNvSpPr txBox="1"/>
           <p:nvPr/>
         </p:nvSpPr>
         <p:spPr>
           <a:xfrm>
-            <a:off x="6172200" y="5130976"/>
-            <a:ext cx="5486400" cy="365760"/>
+            <a:off x="502920" y="5029200"/>
+            <a:ext cx="5120640" cy="274320"/>
           </a:xfrm>
           <a:prstGeom prst="rect">
             <a:avLst/>
@@ -5135,27 +6677,210 @@
           <a:noFill/>
         </p:spPr>
         <p:txBody>
-          <a:bodyPr wrap="square">
+          <a:bodyPr wrap="square" anchor="t" lIns="0" rIns="0" tIns="0" bIns="0">
             <a:spAutoFit/>
           </a:bodyPr>
           <a:lstStyle/>
           <a:p>
-            <a:pPr algn="ctr">
+            <a:pPr>
+              <a:lnSpc>
+                <a:spcPct val="113000"/>
+              </a:lnSpc>
               <a:spcBef>
                 <a:spcPts val="0"/>
               </a:spcBef>
               <a:spcAft>
-                <a:spcPts val="800"/>
+                <a:spcPts val="0"/>
               </a:spcAft>
             </a:pPr>
             <a:r>
-              <a:rPr sz="1200" b="0" i="1">
-                <a:solidFill>
-                  <a:srgbClr val="54626F"/>
+              <a:rPr sz="1050" b="0">
+                <a:solidFill>
+                  <a:srgbClr val="5B7186"/>
                 </a:solidFill>
                 <a:latin typeface="Noto Sans"/>
               </a:rPr>
-              <a:t>Attrition rate per band gaji bulanan</a:t>
+              <a:t>Chart: attrition rate per band gaji bulanan.</a:t>
+            </a:r>
+          </a:p>
+        </p:txBody>
+      </p:sp>
+      <p:sp>
+        <p:nvSpPr>
+          <p:cNvPr id="8" name="TextBox 7"/>
+          <p:cNvSpPr txBox="1"/>
+          <p:nvPr/>
+        </p:nvSpPr>
+        <p:spPr>
+          <a:xfrm>
+            <a:off x="5989320" y="1481328"/>
+            <a:ext cx="5715000" cy="3474720"/>
+          </a:xfrm>
+          <a:prstGeom prst="rect">
+            <a:avLst/>
+          </a:prstGeom>
+          <a:noFill/>
+        </p:spPr>
+        <p:txBody>
+          <a:bodyPr wrap="square" anchor="t" lIns="0" rIns="0" tIns="0" bIns="0">
+            <a:spAutoFit/>
+          </a:bodyPr>
+          <a:lstStyle/>
+          <a:p>
+            <a:pPr>
+              <a:lnSpc>
+                <a:spcPct val="113000"/>
+              </a:lnSpc>
+              <a:spcBef>
+                <a:spcPts val="0"/>
+              </a:spcBef>
+              <a:spcAft>
+                <a:spcPts val="1000"/>
+              </a:spcAft>
+            </a:pPr>
+            <a:r>
+              <a:rPr sz="1550" b="0">
+                <a:solidFill>
+                  <a:srgbClr val="0B2A44"/>
+                </a:solidFill>
+                <a:latin typeface="Noto Sans"/>
+              </a:rPr>
+              <a:t>Gaji bulanan di bawah USD 3.000 resign 28,6%, jauh di atas band gaji lain yang berkisar 9-13%.</a:t>
+            </a:r>
+          </a:p>
+          <a:p>
+            <a:pPr>
+              <a:lnSpc>
+                <a:spcPct val="113000"/>
+              </a:lnSpc>
+              <a:spcBef>
+                <a:spcPts val="0"/>
+              </a:spcBef>
+              <a:spcAft>
+                <a:spcPts val="1000"/>
+              </a:spcAft>
+            </a:pPr>
+            <a:r>
+              <a:rPr sz="1550" b="0">
+                <a:solidFill>
+                  <a:srgbClr val="0B2A44"/>
+                </a:solidFill>
+                <a:latin typeface="Noto Sans"/>
+              </a:rPr>
+              <a:t>Karyawan di bawah 30 tahun resign 27,9%, lalu turun bertahap sampai 9,7% di usia 40-an. Masa kerja 0-2 tahun resign 29,8%, turun ke 8,1% setelah 11 tahun.</a:t>
+            </a:r>
+          </a:p>
+          <a:p>
+            <a:pPr>
+              <a:lnSpc>
+                <a:spcPct val="113000"/>
+              </a:lnSpc>
+              <a:spcBef>
+                <a:spcPts val="0"/>
+              </a:spcBef>
+              <a:spcAft>
+                <a:spcPts val="1000"/>
+              </a:spcAft>
+            </a:pPr>
+            <a:r>
+              <a:rPr sz="1550" b="0">
+                <a:solidFill>
+                  <a:srgbClr val="0B2A44"/>
+                </a:solidFill>
+                <a:latin typeface="Noto Sans"/>
+              </a:rPr>
+              <a:t>Pola jelas: risiko resign menumpuk pada karyawan bergaji rendah, muda, dan baru bergabung.</a:t>
+            </a:r>
+          </a:p>
+        </p:txBody>
+      </p:sp>
+      <p:sp>
+        <p:nvSpPr>
+          <p:cNvPr id="9" name="Rounded Rectangle 8"/>
+          <p:cNvSpPr/>
+          <p:nvPr/>
+        </p:nvSpPr>
+        <p:spPr>
+          <a:xfrm>
+            <a:off x="502920" y="5193792"/>
+            <a:ext cx="11183112" cy="932688"/>
+          </a:xfrm>
+          <a:prstGeom prst="roundRect">
+            <a:avLst>
+              <a:gd name="adj" fmla="val 5500"/>
+            </a:avLst>
+          </a:prstGeom>
+          <a:solidFill>
+            <a:srgbClr val="FDFBF6"/>
+          </a:solidFill>
+          <a:ln>
+            <a:noFill/>
+          </a:ln>
+          <a:effectLst/>
+        </p:spPr>
+        <p:style>
+          <a:lnRef idx="1">
+            <a:schemeClr val="accent1"/>
+          </a:lnRef>
+          <a:fillRef idx="3">
+            <a:schemeClr val="accent1"/>
+          </a:fillRef>
+          <a:effectRef idx="2">
+            <a:schemeClr val="accent1"/>
+          </a:effectRef>
+          <a:fontRef idx="minor">
+            <a:schemeClr val="lt1"/>
+          </a:fontRef>
+        </p:style>
+        <p:txBody>
+          <a:bodyPr rtlCol="0" anchor="ctr"/>
+          <a:lstStyle/>
+          <a:p>
+            <a:pPr algn="ctr"/>
+          </a:p>
+        </p:txBody>
+      </p:sp>
+      <p:sp>
+        <p:nvSpPr>
+          <p:cNvPr id="10" name="TextBox 9"/>
+          <p:cNvSpPr txBox="1"/>
+          <p:nvPr/>
+        </p:nvSpPr>
+        <p:spPr>
+          <a:xfrm>
+            <a:off x="960120" y="5394960"/>
+            <a:ext cx="10424160" cy="548640"/>
+          </a:xfrm>
+          <a:prstGeom prst="rect">
+            <a:avLst/>
+          </a:prstGeom>
+          <a:noFill/>
+        </p:spPr>
+        <p:txBody>
+          <a:bodyPr wrap="square" anchor="ctr" lIns="0" rIns="0" tIns="0" bIns="0">
+            <a:spAutoFit/>
+          </a:bodyPr>
+          <a:lstStyle/>
+          <a:p>
+            <a:pPr>
+              <a:lnSpc>
+                <a:spcPct val="113000"/>
+              </a:lnSpc>
+              <a:spcBef>
+                <a:spcPts val="0"/>
+              </a:spcBef>
+              <a:spcAft>
+                <a:spcPts val="0"/>
+              </a:spcAft>
+            </a:pPr>
+            <a:r>
+              <a:rPr sz="1600" b="1">
+                <a:solidFill>
+                  <a:srgbClr val="0E4D7A"/>
+                </a:solidFill>
+                <a:latin typeface="Noto Sans"/>
+              </a:rPr>
+              <a:t>Gaji di bawah USD 3.000: 28,6% resign</a:t>
             </a:r>
           </a:p>
         </p:txBody>
@@ -5194,8 +6919,8 @@
         </p:nvSpPr>
         <p:spPr>
           <a:xfrm>
-            <a:off x="640080" y="457200"/>
-            <a:ext cx="10881360" cy="777240"/>
+            <a:off x="502920" y="384048"/>
+            <a:ext cx="11155680" cy="914400"/>
           </a:xfrm>
           <a:prstGeom prst="rect">
             <a:avLst/>
@@ -5203,21 +6928,24 @@
           <a:noFill/>
         </p:spPr>
         <p:txBody>
-          <a:bodyPr wrap="square">
+          <a:bodyPr wrap="square" anchor="t" lIns="0" rIns="0" tIns="0" bIns="0">
             <a:spAutoFit/>
           </a:bodyPr>
           <a:lstStyle/>
           <a:p>
             <a:pPr>
+              <a:lnSpc>
+                <a:spcPct val="113000"/>
+              </a:lnSpc>
               <a:spcBef>
                 <a:spcPts val="0"/>
               </a:spcBef>
               <a:spcAft>
-                <a:spcPts val="800"/>
+                <a:spcPts val="0"/>
               </a:spcAft>
             </a:pPr>
             <a:r>
-              <a:rPr sz="3200" b="1" i="0">
+              <a:rPr sz="3100" b="1">
                 <a:solidFill>
                   <a:srgbClr val="0B2A44"/>
                 </a:solidFill>
@@ -5230,14 +6958,60 @@
       </p:sp>
       <p:sp>
         <p:nvSpPr>
-          <p:cNvPr id="3" name="TextBox 2"/>
+          <p:cNvPr id="3" name="Rounded Rectangle 2"/>
+          <p:cNvSpPr/>
+          <p:nvPr/>
+        </p:nvSpPr>
+        <p:spPr>
+          <a:xfrm>
+            <a:off x="521207" y="1097280"/>
+            <a:ext cx="777240" cy="82296"/>
+          </a:xfrm>
+          <a:prstGeom prst="roundRect">
+            <a:avLst>
+              <a:gd name="adj" fmla="val 5500"/>
+            </a:avLst>
+          </a:prstGeom>
+          <a:solidFill>
+            <a:srgbClr val="E5322D"/>
+          </a:solidFill>
+          <a:ln>
+            <a:noFill/>
+          </a:ln>
+          <a:effectLst/>
+        </p:spPr>
+        <p:style>
+          <a:lnRef idx="1">
+            <a:schemeClr val="accent1"/>
+          </a:lnRef>
+          <a:fillRef idx="3">
+            <a:schemeClr val="accent1"/>
+          </a:fillRef>
+          <a:effectRef idx="2">
+            <a:schemeClr val="accent1"/>
+          </a:effectRef>
+          <a:fontRef idx="minor">
+            <a:schemeClr val="lt1"/>
+          </a:fontRef>
+        </p:style>
+        <p:txBody>
+          <a:bodyPr rtlCol="0" anchor="ctr"/>
+          <a:lstStyle/>
+          <a:p>
+            <a:pPr algn="ctr"/>
+          </a:p>
+        </p:txBody>
+      </p:sp>
+      <p:sp>
+        <p:nvSpPr>
+          <p:cNvPr id="4" name="TextBox 3"/>
           <p:cNvSpPr txBox="1"/>
           <p:nvPr/>
         </p:nvSpPr>
         <p:spPr>
           <a:xfrm>
-            <a:off x="640080" y="1463040"/>
-            <a:ext cx="5394960" cy="2011680"/>
+            <a:off x="502920" y="1463040"/>
+            <a:ext cx="4526280" cy="3291840"/>
           </a:xfrm>
           <a:prstGeom prst="rect">
             <a:avLst/>
@@ -5245,62 +7019,134 @@
           <a:noFill/>
         </p:spPr>
         <p:txBody>
-          <a:bodyPr wrap="square">
+          <a:bodyPr wrap="square" anchor="t" lIns="0" rIns="0" tIns="0" bIns="0">
             <a:spAutoFit/>
           </a:bodyPr>
           <a:lstStyle/>
           <a:p>
-            <a:pPr marL="171450" indent="-171450">
+            <a:pPr>
+              <a:lnSpc>
+                <a:spcPct val="113000"/>
+              </a:lnSpc>
               <a:spcBef>
                 <a:spcPts val="0"/>
               </a:spcBef>
               <a:spcAft>
-                <a:spcPts val="1200"/>
+                <a:spcPts val="1000"/>
               </a:spcAft>
-              <a:buChar char="•"/>
             </a:pPr>
             <a:r>
-              <a:rPr sz="1600" b="0" i="0">
+              <a:rPr sz="1550" b="0">
                 <a:solidFill>
                   <a:srgbClr val="0B2A44"/>
                 </a:solidFill>
                 <a:latin typeface="Noto Sans"/>
               </a:rPr>
-              <a:t>Work life balance buruk mencatat attrition 31,3 persen, faktor tunggal tertinggi dalam analisis kepuasan</a:t>
-            </a:r>
-          </a:p>
-          <a:p>
-            <a:pPr marL="171450" indent="-171450">
+              <a:t>Work-life balance buruk mencatat attrition 31,3%, faktor tunggal tertinggi dalam analisis kepuasan.</a:t>
+            </a:r>
+          </a:p>
+          <a:p>
+            <a:pPr>
+              <a:lnSpc>
+                <a:spcPct val="113000"/>
+              </a:lnSpc>
               <a:spcBef>
                 <a:spcPts val="0"/>
               </a:spcBef>
               <a:spcAft>
-                <a:spcPts val="0"/>
+                <a:spcPts val="1000"/>
               </a:spcAft>
-              <a:buChar char="•"/>
             </a:pPr>
             <a:r>
-              <a:rPr sz="1600" b="0" i="0">
+              <a:rPr sz="1550" b="0">
                 <a:solidFill>
                   <a:srgbClr val="0B2A44"/>
                 </a:solidFill>
                 <a:latin typeface="Noto Sans"/>
               </a:rPr>
-              <a:t>Kepuasan lingkungan rendah 25,4 persen dibanding sangat tinggi 13,5 persen</a:t>
-            </a:r>
-          </a:p>
-        </p:txBody>
-      </p:sp>
-      <p:sp>
-        <p:nvSpPr>
-          <p:cNvPr id="4" name="TextBox 3"/>
+              <a:t>Kepuasan lingkungan rendah 25,4% (vs sangat tinggi 13,5%); kepuasan kerja rendah 22,8% (vs sangat tinggi 11,3%).</a:t>
+            </a:r>
+          </a:p>
+          <a:p>
+            <a:pPr>
+              <a:lnSpc>
+                <a:spcPct val="113000"/>
+              </a:lnSpc>
+              <a:spcBef>
+                <a:spcPts val="0"/>
+              </a:spcBef>
+              <a:spcAft>
+                <a:spcPts val="1000"/>
+              </a:spcAft>
+            </a:pPr>
+            <a:r>
+              <a:rPr sz="1550" b="0">
+                <a:solidFill>
+                  <a:srgbClr val="0B2A44"/>
+                </a:solidFill>
+                <a:latin typeface="Noto Sans"/>
+              </a:rPr>
+              <a:t>Survei kepuasan rutin bisa menjadi sistem peringatan dini: sinyalnya muncul sebelum karyawan benar-benar pergi.</a:t>
+            </a:r>
+          </a:p>
+        </p:txBody>
+      </p:sp>
+      <p:sp>
+        <p:nvSpPr>
+          <p:cNvPr id="5" name="Rounded Rectangle 4"/>
+          <p:cNvSpPr/>
+          <p:nvPr/>
+        </p:nvSpPr>
+        <p:spPr>
+          <a:xfrm>
+            <a:off x="502920" y="4846320"/>
+            <a:ext cx="4526280" cy="1170432"/>
+          </a:xfrm>
+          <a:prstGeom prst="roundRect">
+            <a:avLst>
+              <a:gd name="adj" fmla="val 5500"/>
+            </a:avLst>
+          </a:prstGeom>
+          <a:solidFill>
+            <a:srgbClr val="0E4D7A"/>
+          </a:solidFill>
+          <a:ln>
+            <a:noFill/>
+          </a:ln>
+          <a:effectLst/>
+        </p:spPr>
+        <p:style>
+          <a:lnRef idx="1">
+            <a:schemeClr val="accent1"/>
+          </a:lnRef>
+          <a:fillRef idx="3">
+            <a:schemeClr val="accent1"/>
+          </a:fillRef>
+          <a:effectRef idx="2">
+            <a:schemeClr val="accent1"/>
+          </a:effectRef>
+          <a:fontRef idx="minor">
+            <a:schemeClr val="lt1"/>
+          </a:fontRef>
+        </p:style>
+        <p:txBody>
+          <a:bodyPr rtlCol="0" anchor="ctr"/>
+          <a:lstStyle/>
+          <a:p>
+            <a:pPr algn="ctr"/>
+          </a:p>
+        </p:txBody>
+      </p:sp>
+      <p:sp>
+        <p:nvSpPr>
+          <p:cNvPr id="6" name="TextBox 5"/>
           <p:cNvSpPr txBox="1"/>
           <p:nvPr/>
         </p:nvSpPr>
         <p:spPr>
           <a:xfrm>
-            <a:off x="6172200" y="1463040"/>
-            <a:ext cx="5349240" cy="2011680"/>
+            <a:off x="777240" y="5010912"/>
+            <a:ext cx="4023360" cy="896112"/>
           </a:xfrm>
           <a:prstGeom prst="rect">
             <a:avLst/>
@@ -5308,55 +7154,151 @@
           <a:noFill/>
         </p:spPr>
         <p:txBody>
-          <a:bodyPr wrap="square">
+          <a:bodyPr wrap="square" anchor="t" lIns="0" rIns="0" tIns="0" bIns="0">
             <a:spAutoFit/>
           </a:bodyPr>
           <a:lstStyle/>
           <a:p>
-            <a:pPr marL="171450" indent="-171450">
+            <a:pPr>
+              <a:lnSpc>
+                <a:spcPct val="113000"/>
+              </a:lnSpc>
               <a:spcBef>
                 <a:spcPts val="0"/>
               </a:spcBef>
               <a:spcAft>
-                <a:spcPts val="1200"/>
+                <a:spcPts val="200"/>
               </a:spcAft>
-              <a:buChar char="•"/>
             </a:pPr>
             <a:r>
-              <a:rPr sz="1600" b="0" i="0">
-                <a:solidFill>
-                  <a:srgbClr val="0B2A44"/>
+              <a:rPr sz="2700" b="1">
+                <a:solidFill>
+                  <a:srgbClr val="F5C542"/>
                 </a:solidFill>
                 <a:latin typeface="Noto Sans"/>
               </a:rPr>
-              <a:t>Kepuasan kerja rendah 22,8 persen dibanding sangat tinggi 11,3 persen</a:t>
-            </a:r>
-          </a:p>
-          <a:p>
-            <a:pPr marL="171450" indent="-171450">
+              <a:t>31,3%</a:t>
+            </a:r>
+          </a:p>
+          <a:p>
+            <a:pPr>
+              <a:lnSpc>
+                <a:spcPct val="113000"/>
+              </a:lnSpc>
               <a:spcBef>
                 <a:spcPts val="0"/>
               </a:spcBef>
               <a:spcAft>
                 <a:spcPts val="0"/>
               </a:spcAft>
-              <a:buChar char="•"/>
             </a:pPr>
             <a:r>
-              <a:rPr sz="1600" b="0" i="0">
-                <a:solidFill>
-                  <a:srgbClr val="0B2A44"/>
+              <a:rPr sz="1250" b="0">
+                <a:solidFill>
+                  <a:srgbClr val="DCE9F2"/>
                 </a:solidFill>
                 <a:latin typeface="Noto Sans"/>
               </a:rPr>
-              <a:t>Survei kepuasan rutin bisa menjadi sistem peringatan dini sebelum karyawan benar benar pergi</a:t>
-            </a:r>
+              <a:t>attrition pada work-life balance buruk</a:t>
+            </a:r>
+          </a:p>
+        </p:txBody>
+      </p:sp>
+      <p:sp>
+        <p:nvSpPr>
+          <p:cNvPr id="7" name="Rounded Rectangle 6"/>
+          <p:cNvSpPr/>
+          <p:nvPr/>
+        </p:nvSpPr>
+        <p:spPr>
+          <a:xfrm>
+            <a:off x="5413248" y="1481328"/>
+            <a:ext cx="6336792" cy="3977639"/>
+          </a:xfrm>
+          <a:prstGeom prst="roundRect">
+            <a:avLst>
+              <a:gd name="adj" fmla="val 5500"/>
+            </a:avLst>
+          </a:prstGeom>
+          <a:solidFill>
+            <a:srgbClr val="DFD5C0"/>
+          </a:solidFill>
+          <a:ln>
+            <a:noFill/>
+          </a:ln>
+          <a:effectLst/>
+        </p:spPr>
+        <p:style>
+          <a:lnRef idx="1">
+            <a:schemeClr val="accent1"/>
+          </a:lnRef>
+          <a:fillRef idx="3">
+            <a:schemeClr val="accent1"/>
+          </a:fillRef>
+          <a:effectRef idx="2">
+            <a:schemeClr val="accent1"/>
+          </a:effectRef>
+          <a:fontRef idx="minor">
+            <a:schemeClr val="lt1"/>
+          </a:fontRef>
+        </p:style>
+        <p:txBody>
+          <a:bodyPr rtlCol="0" anchor="ctr"/>
+          <a:lstStyle/>
+          <a:p>
+            <a:pPr algn="ctr"/>
+          </a:p>
+        </p:txBody>
+      </p:sp>
+      <p:sp>
+        <p:nvSpPr>
+          <p:cNvPr id="8" name="Rounded Rectangle 7"/>
+          <p:cNvSpPr/>
+          <p:nvPr/>
+        </p:nvSpPr>
+        <p:spPr>
+          <a:xfrm>
+            <a:off x="5349240" y="1417320"/>
+            <a:ext cx="6336792" cy="3977639"/>
+          </a:xfrm>
+          <a:prstGeom prst="roundRect">
+            <a:avLst>
+              <a:gd name="adj" fmla="val 5500"/>
+            </a:avLst>
+          </a:prstGeom>
+          <a:solidFill>
+            <a:srgbClr val="FDFBF6"/>
+          </a:solidFill>
+          <a:ln>
+            <a:noFill/>
+          </a:ln>
+          <a:effectLst/>
+        </p:spPr>
+        <p:style>
+          <a:lnRef idx="1">
+            <a:schemeClr val="accent1"/>
+          </a:lnRef>
+          <a:fillRef idx="3">
+            <a:schemeClr val="accent1"/>
+          </a:fillRef>
+          <a:effectRef idx="2">
+            <a:schemeClr val="accent1"/>
+          </a:effectRef>
+          <a:fontRef idx="minor">
+            <a:schemeClr val="lt1"/>
+          </a:fontRef>
+        </p:style>
+        <p:txBody>
+          <a:bodyPr rtlCol="0" anchor="ctr"/>
+          <a:lstStyle/>
+          <a:p>
+            <a:pPr algn="ctr"/>
           </a:p>
         </p:txBody>
       </p:sp>
       <p:pic>
         <p:nvPicPr>
-          <p:cNvPr id="5" name="Picture 4" descr="10_attrition_worklife_balance.png"/>
+          <p:cNvPr id="9" name="Picture 8" descr="10_attrition_worklife_balance.png"/>
           <p:cNvPicPr>
             <a:picLocks noChangeAspect="1"/>
           </p:cNvPicPr>
@@ -5370,8 +7312,8 @@
         </p:blipFill>
         <p:spPr>
           <a:xfrm>
-            <a:off x="640080" y="3246120"/>
-            <a:ext cx="4972152" cy="3017520"/>
+            <a:off x="5572012" y="1618488"/>
+            <a:ext cx="5891247" cy="3575303"/>
           </a:xfrm>
           <a:prstGeom prst="rect">
             <a:avLst/>
@@ -5380,14 +7322,14 @@
       </p:pic>
       <p:sp>
         <p:nvSpPr>
-          <p:cNvPr id="6" name="TextBox 5"/>
+          <p:cNvPr id="10" name="TextBox 9"/>
           <p:cNvSpPr txBox="1"/>
           <p:nvPr/>
         </p:nvSpPr>
         <p:spPr>
           <a:xfrm>
-            <a:off x="640080" y="6355079"/>
-            <a:ext cx="4972152" cy="365760"/>
+            <a:off x="5349240" y="5486399"/>
+            <a:ext cx="6336792" cy="274320"/>
           </a:xfrm>
           <a:prstGeom prst="rect">
             <a:avLst/>
@@ -5395,88 +7337,30 @@
           <a:noFill/>
         </p:spPr>
         <p:txBody>
-          <a:bodyPr wrap="square">
+          <a:bodyPr wrap="square" anchor="t" lIns="0" rIns="0" tIns="0" bIns="0">
             <a:spAutoFit/>
           </a:bodyPr>
           <a:lstStyle/>
           <a:p>
-            <a:pPr algn="ctr">
+            <a:pPr>
+              <a:lnSpc>
+                <a:spcPct val="113000"/>
+              </a:lnSpc>
               <a:spcBef>
                 <a:spcPts val="0"/>
               </a:spcBef>
               <a:spcAft>
-                <a:spcPts val="800"/>
+                <a:spcPts val="0"/>
               </a:spcAft>
             </a:pPr>
             <a:r>
-              <a:rPr sz="1200" b="0" i="1">
-                <a:solidFill>
-                  <a:srgbClr val="54626F"/>
+              <a:rPr sz="1050" b="0">
+                <a:solidFill>
+                  <a:srgbClr val="5B7186"/>
                 </a:solidFill>
                 <a:latin typeface="Noto Sans"/>
               </a:rPr>
-              <a:t>Attrition rate per tingkat work life balance</a:t>
-            </a:r>
-          </a:p>
-        </p:txBody>
-      </p:sp>
-      <p:sp>
-        <p:nvSpPr>
-          <p:cNvPr id="7" name="TextBox 6"/>
-          <p:cNvSpPr txBox="1"/>
-          <p:nvPr/>
-        </p:nvSpPr>
-        <p:spPr>
-          <a:xfrm>
-            <a:off x="6492240" y="3657600"/>
-            <a:ext cx="5029200" cy="1737360"/>
-          </a:xfrm>
-          <a:prstGeom prst="rect">
-            <a:avLst/>
-          </a:prstGeom>
-          <a:noFill/>
-        </p:spPr>
-        <p:txBody>
-          <a:bodyPr wrap="square">
-            <a:spAutoFit/>
-          </a:bodyPr>
-          <a:lstStyle/>
-          <a:p>
-            <a:pPr>
-              <a:spcBef>
-                <a:spcPts val="0"/>
-              </a:spcBef>
-              <a:spcAft>
-                <a:spcPts val="200"/>
-              </a:spcAft>
-            </a:pPr>
-            <a:r>
-              <a:rPr sz="5200" b="1" i="0">
-                <a:solidFill>
-                  <a:srgbClr val="0E4D7A"/>
-                </a:solidFill>
-                <a:latin typeface="Noto Sans"/>
-              </a:rPr>
-              <a:t>31,3%</a:t>
-            </a:r>
-          </a:p>
-          <a:p>
-            <a:pPr>
-              <a:spcBef>
-                <a:spcPts val="0"/>
-              </a:spcBef>
-              <a:spcAft>
-                <a:spcPts val="0"/>
-              </a:spcAft>
-            </a:pPr>
-            <a:r>
-              <a:rPr sz="1400" b="0" i="0">
-                <a:solidFill>
-                  <a:srgbClr val="0B2A44"/>
-                </a:solidFill>
-                <a:latin typeface="Noto Sans"/>
-              </a:rPr>
-              <a:t>attrition pada work life balance buruk</a:t>
+              <a:t>Chart: attrition rate per tingkat work-life balance.</a:t>
             </a:r>
           </a:p>
         </p:txBody>
@@ -5515,8 +7399,8 @@
         </p:nvSpPr>
         <p:spPr>
           <a:xfrm>
-            <a:off x="640080" y="457200"/>
-            <a:ext cx="10881360" cy="777240"/>
+            <a:off x="502920" y="384048"/>
+            <a:ext cx="11155680" cy="914400"/>
           </a:xfrm>
           <a:prstGeom prst="rect">
             <a:avLst/>
@@ -5524,21 +7408,24 @@
           <a:noFill/>
         </p:spPr>
         <p:txBody>
-          <a:bodyPr wrap="square">
+          <a:bodyPr wrap="square" anchor="t" lIns="0" rIns="0" tIns="0" bIns="0">
             <a:spAutoFit/>
           </a:bodyPr>
           <a:lstStyle/>
           <a:p>
             <a:pPr>
+              <a:lnSpc>
+                <a:spcPct val="113000"/>
+              </a:lnSpc>
               <a:spcBef>
                 <a:spcPts val="0"/>
               </a:spcBef>
               <a:spcAft>
-                <a:spcPts val="800"/>
+                <a:spcPts val="0"/>
               </a:spcAft>
             </a:pPr>
             <a:r>
-              <a:rPr sz="3200" b="1" i="0">
+              <a:rPr sz="3100" b="1">
                 <a:solidFill>
                   <a:srgbClr val="0B2A44"/>
                 </a:solidFill>
@@ -5551,110 +7438,145 @@
       </p:sp>
       <p:sp>
         <p:nvSpPr>
-          <p:cNvPr id="3" name="TextBox 2"/>
-          <p:cNvSpPr txBox="1"/>
-          <p:nvPr/>
-        </p:nvSpPr>
-        <p:spPr>
-          <a:xfrm>
-            <a:off x="640080" y="1600200"/>
-            <a:ext cx="5120640" cy="4937760"/>
-          </a:xfrm>
-          <a:prstGeom prst="rect">
-            <a:avLst/>
-          </a:prstGeom>
-          <a:noFill/>
-        </p:spPr>
-        <p:txBody>
-          <a:bodyPr wrap="square">
-            <a:spAutoFit/>
-          </a:bodyPr>
-          <a:lstStyle/>
-          <a:p>
-            <a:pPr marL="171450" indent="-171450">
-              <a:spcBef>
-                <a:spcPts val="0"/>
-              </a:spcBef>
-              <a:spcAft>
-                <a:spcPts val="1400"/>
-              </a:spcAft>
-              <a:buChar char="•"/>
-            </a:pPr>
-            <a:r>
-              <a:rPr sz="1600" b="0" i="0">
-                <a:solidFill>
-                  <a:srgbClr val="0B2A44"/>
-                </a:solidFill>
-                <a:latin typeface="Noto Sans"/>
-              </a:rPr>
-              <a:t>Jarak rumah 15 km atau lebih resign 20,6 persen, naik bertahap dari 13,6 persen untuk jarak dekat</a:t>
-            </a:r>
-          </a:p>
-          <a:p>
-            <a:pPr marL="171450" indent="-171450">
-              <a:spcBef>
-                <a:spcPts val="0"/>
-              </a:spcBef>
-              <a:spcAft>
-                <a:spcPts val="1400"/>
-              </a:spcAft>
-              <a:buChar char="•"/>
-            </a:pPr>
-            <a:r>
-              <a:rPr sz="1600" b="0" i="0">
-                <a:solidFill>
-                  <a:srgbClr val="0B2A44"/>
-                </a:solidFill>
-                <a:latin typeface="Noto Sans"/>
-              </a:rPr>
-              <a:t>Karyawan yang sering dinas resign 24,9 persen, dibanding tidak pernah dinas hanya 8,0 persen</a:t>
-            </a:r>
-          </a:p>
-          <a:p>
-            <a:pPr marL="171450" indent="-171450">
-              <a:spcBef>
-                <a:spcPts val="0"/>
-              </a:spcBef>
-              <a:spcAft>
-                <a:spcPts val="1400"/>
-              </a:spcAft>
-              <a:buChar char="•"/>
-            </a:pPr>
-            <a:r>
-              <a:rPr sz="1600" b="0" i="0">
-                <a:solidFill>
-                  <a:srgbClr val="0B2A44"/>
-                </a:solidFill>
-                <a:latin typeface="Noto Sans"/>
-              </a:rPr>
-              <a:t>Status single resign 25,5 persen, dua kali lipat dibanding menikah 12,5 persen</a:t>
-            </a:r>
-          </a:p>
-          <a:p>
-            <a:pPr marL="171450" indent="-171450">
-              <a:spcBef>
-                <a:spcPts val="0"/>
-              </a:spcBef>
-              <a:spcAft>
-                <a:spcPts val="1400"/>
-              </a:spcAft>
-              <a:buChar char="•"/>
-            </a:pPr>
-            <a:r>
-              <a:rPr sz="1600" b="0" i="0">
-                <a:solidFill>
-                  <a:srgbClr val="0B2A44"/>
-                </a:solidFill>
-                <a:latin typeface="Noto Sans"/>
-              </a:rPr>
-              <a:t>Stagnasi juga berbahaya: 6 tahun atau lebih tanpa promosi resign 16,3 persen, naik lagi setelah sempat turun</a:t>
-            </a:r>
+          <p:cNvPr id="3" name="Rounded Rectangle 2"/>
+          <p:cNvSpPr/>
+          <p:nvPr/>
+        </p:nvSpPr>
+        <p:spPr>
+          <a:xfrm>
+            <a:off x="521207" y="1097280"/>
+            <a:ext cx="777240" cy="82296"/>
+          </a:xfrm>
+          <a:prstGeom prst="roundRect">
+            <a:avLst>
+              <a:gd name="adj" fmla="val 5500"/>
+            </a:avLst>
+          </a:prstGeom>
+          <a:solidFill>
+            <a:srgbClr val="E5322D"/>
+          </a:solidFill>
+          <a:ln>
+            <a:noFill/>
+          </a:ln>
+          <a:effectLst/>
+        </p:spPr>
+        <p:style>
+          <a:lnRef idx="1">
+            <a:schemeClr val="accent1"/>
+          </a:lnRef>
+          <a:fillRef idx="3">
+            <a:schemeClr val="accent1"/>
+          </a:fillRef>
+          <a:effectRef idx="2">
+            <a:schemeClr val="accent1"/>
+          </a:effectRef>
+          <a:fontRef idx="minor">
+            <a:schemeClr val="lt1"/>
+          </a:fontRef>
+        </p:style>
+        <p:txBody>
+          <a:bodyPr rtlCol="0" anchor="ctr"/>
+          <a:lstStyle/>
+          <a:p>
+            <a:pPr algn="ctr"/>
+          </a:p>
+        </p:txBody>
+      </p:sp>
+      <p:sp>
+        <p:nvSpPr>
+          <p:cNvPr id="4" name="Rounded Rectangle 3"/>
+          <p:cNvSpPr/>
+          <p:nvPr/>
+        </p:nvSpPr>
+        <p:spPr>
+          <a:xfrm>
+            <a:off x="566928" y="1481328"/>
+            <a:ext cx="5120640" cy="3520440"/>
+          </a:xfrm>
+          <a:prstGeom prst="roundRect">
+            <a:avLst>
+              <a:gd name="adj" fmla="val 5500"/>
+            </a:avLst>
+          </a:prstGeom>
+          <a:solidFill>
+            <a:srgbClr val="DFD5C0"/>
+          </a:solidFill>
+          <a:ln>
+            <a:noFill/>
+          </a:ln>
+          <a:effectLst/>
+        </p:spPr>
+        <p:style>
+          <a:lnRef idx="1">
+            <a:schemeClr val="accent1"/>
+          </a:lnRef>
+          <a:fillRef idx="3">
+            <a:schemeClr val="accent1"/>
+          </a:fillRef>
+          <a:effectRef idx="2">
+            <a:schemeClr val="accent1"/>
+          </a:effectRef>
+          <a:fontRef idx="minor">
+            <a:schemeClr val="lt1"/>
+          </a:fontRef>
+        </p:style>
+        <p:txBody>
+          <a:bodyPr rtlCol="0" anchor="ctr"/>
+          <a:lstStyle/>
+          <a:p>
+            <a:pPr algn="ctr"/>
+          </a:p>
+        </p:txBody>
+      </p:sp>
+      <p:sp>
+        <p:nvSpPr>
+          <p:cNvPr id="5" name="Rounded Rectangle 4"/>
+          <p:cNvSpPr/>
+          <p:nvPr/>
+        </p:nvSpPr>
+        <p:spPr>
+          <a:xfrm>
+            <a:off x="502920" y="1417320"/>
+            <a:ext cx="5120640" cy="3520440"/>
+          </a:xfrm>
+          <a:prstGeom prst="roundRect">
+            <a:avLst>
+              <a:gd name="adj" fmla="val 5500"/>
+            </a:avLst>
+          </a:prstGeom>
+          <a:solidFill>
+            <a:srgbClr val="FDFBF6"/>
+          </a:solidFill>
+          <a:ln>
+            <a:noFill/>
+          </a:ln>
+          <a:effectLst/>
+        </p:spPr>
+        <p:style>
+          <a:lnRef idx="1">
+            <a:schemeClr val="accent1"/>
+          </a:lnRef>
+          <a:fillRef idx="3">
+            <a:schemeClr val="accent1"/>
+          </a:fillRef>
+          <a:effectRef idx="2">
+            <a:schemeClr val="accent1"/>
+          </a:effectRef>
+          <a:fontRef idx="minor">
+            <a:schemeClr val="lt1"/>
+          </a:fontRef>
+        </p:style>
+        <p:txBody>
+          <a:bodyPr rtlCol="0" anchor="ctr"/>
+          <a:lstStyle/>
+          <a:p>
+            <a:pPr algn="ctr"/>
           </a:p>
         </p:txBody>
       </p:sp>
       <p:pic>
         <p:nvPicPr>
-          <p:cNvPr id="4" name="Picture 3" descr="12_attrition_demografi_travel.png"/>
+          <p:cNvPr id="6" name="Picture 5" descr="12_attrition_demografi_travel.png"/>
           <p:cNvPicPr>
             <a:picLocks noChangeAspect="1"/>
           </p:cNvPicPr>
@@ -5668,8 +7590,8 @@
         </p:blipFill>
         <p:spPr>
           <a:xfrm>
-            <a:off x="6035040" y="1508760"/>
-            <a:ext cx="5669280" cy="3881524"/>
+            <a:off x="786118" y="1618488"/>
+            <a:ext cx="4554243" cy="3118104"/>
           </a:xfrm>
           <a:prstGeom prst="rect">
             <a:avLst/>
@@ -5678,14 +7600,14 @@
       </p:pic>
       <p:sp>
         <p:nvSpPr>
-          <p:cNvPr id="5" name="TextBox 4"/>
+          <p:cNvPr id="7" name="TextBox 6"/>
           <p:cNvSpPr txBox="1"/>
           <p:nvPr/>
         </p:nvSpPr>
         <p:spPr>
           <a:xfrm>
-            <a:off x="6035040" y="5500012"/>
-            <a:ext cx="5669280" cy="365760"/>
+            <a:off x="502920" y="5029200"/>
+            <a:ext cx="5120640" cy="274320"/>
           </a:xfrm>
           <a:prstGeom prst="rect">
             <a:avLst/>
@@ -5693,27 +7615,210 @@
           <a:noFill/>
         </p:spPr>
         <p:txBody>
-          <a:bodyPr wrap="square">
+          <a:bodyPr wrap="square" anchor="t" lIns="0" rIns="0" tIns="0" bIns="0">
             <a:spAutoFit/>
           </a:bodyPr>
           <a:lstStyle/>
           <a:p>
-            <a:pPr algn="ctr">
+            <a:pPr>
+              <a:lnSpc>
+                <a:spcPct val="113000"/>
+              </a:lnSpc>
               <a:spcBef>
                 <a:spcPts val="0"/>
               </a:spcBef>
               <a:spcAft>
-                <a:spcPts val="800"/>
+                <a:spcPts val="0"/>
               </a:spcAft>
             </a:pPr>
             <a:r>
-              <a:rPr sz="1200" b="0" i="1">
-                <a:solidFill>
-                  <a:srgbClr val="54626F"/>
+              <a:rPr sz="1050" b="0">
+                <a:solidFill>
+                  <a:srgbClr val="5B7186"/>
                 </a:solidFill>
                 <a:latin typeface="Noto Sans"/>
               </a:rPr>
-              <a:t>Attrition: demografi dan frekuensi dinas</a:t>
+              <a:t>Chart: attrition menurut demografi dan frekuensi dinas.</a:t>
+            </a:r>
+          </a:p>
+        </p:txBody>
+      </p:sp>
+      <p:sp>
+        <p:nvSpPr>
+          <p:cNvPr id="8" name="TextBox 7"/>
+          <p:cNvSpPr txBox="1"/>
+          <p:nvPr/>
+        </p:nvSpPr>
+        <p:spPr>
+          <a:xfrm>
+            <a:off x="5989320" y="1481328"/>
+            <a:ext cx="5715000" cy="3474720"/>
+          </a:xfrm>
+          <a:prstGeom prst="rect">
+            <a:avLst/>
+          </a:prstGeom>
+          <a:noFill/>
+        </p:spPr>
+        <p:txBody>
+          <a:bodyPr wrap="square" anchor="t" lIns="0" rIns="0" tIns="0" bIns="0">
+            <a:spAutoFit/>
+          </a:bodyPr>
+          <a:lstStyle/>
+          <a:p>
+            <a:pPr>
+              <a:lnSpc>
+                <a:spcPct val="113000"/>
+              </a:lnSpc>
+              <a:spcBef>
+                <a:spcPts val="0"/>
+              </a:spcBef>
+              <a:spcAft>
+                <a:spcPts val="1000"/>
+              </a:spcAft>
+            </a:pPr>
+            <a:r>
+              <a:rPr sz="1550" b="0">
+                <a:solidFill>
+                  <a:srgbClr val="0B2A44"/>
+                </a:solidFill>
+                <a:latin typeface="Noto Sans"/>
+              </a:rPr>
+              <a:t>Jarak rumah 15 km atau lebih resign 20,6%, naik bertahap dari 13,6% untuk jarak dekat.</a:t>
+            </a:r>
+          </a:p>
+          <a:p>
+            <a:pPr>
+              <a:lnSpc>
+                <a:spcPct val="113000"/>
+              </a:lnSpc>
+              <a:spcBef>
+                <a:spcPts val="0"/>
+              </a:spcBef>
+              <a:spcAft>
+                <a:spcPts val="1000"/>
+              </a:spcAft>
+            </a:pPr>
+            <a:r>
+              <a:rPr sz="1550" b="0">
+                <a:solidFill>
+                  <a:srgbClr val="0B2A44"/>
+                </a:solidFill>
+                <a:latin typeface="Noto Sans"/>
+              </a:rPr>
+              <a:t>Karyawan yang sering dinas resign 24,9%, dibanding tidak pernah dinas hanya 8,0%. Status single resign 25,5%, dua kali lipat dibanding menikah (12,5%).</a:t>
+            </a:r>
+          </a:p>
+          <a:p>
+            <a:pPr>
+              <a:lnSpc>
+                <a:spcPct val="113000"/>
+              </a:lnSpc>
+              <a:spcBef>
+                <a:spcPts val="0"/>
+              </a:spcBef>
+              <a:spcAft>
+                <a:spcPts val="1000"/>
+              </a:spcAft>
+            </a:pPr>
+            <a:r>
+              <a:rPr sz="1550" b="0">
+                <a:solidFill>
+                  <a:srgbClr val="0B2A44"/>
+                </a:solidFill>
+                <a:latin typeface="Noto Sans"/>
+              </a:rPr>
+              <a:t>Stagnasi juga berbahaya: karyawan 6 tahun atau lebih tanpa promosi kembali berisiko, dengan attrition 16,3%.</a:t>
+            </a:r>
+          </a:p>
+        </p:txBody>
+      </p:sp>
+      <p:sp>
+        <p:nvSpPr>
+          <p:cNvPr id="9" name="Rounded Rectangle 8"/>
+          <p:cNvSpPr/>
+          <p:nvPr/>
+        </p:nvSpPr>
+        <p:spPr>
+          <a:xfrm>
+            <a:off x="502920" y="5193792"/>
+            <a:ext cx="11183112" cy="932688"/>
+          </a:xfrm>
+          <a:prstGeom prst="roundRect">
+            <a:avLst>
+              <a:gd name="adj" fmla="val 5500"/>
+            </a:avLst>
+          </a:prstGeom>
+          <a:solidFill>
+            <a:srgbClr val="FDFBF6"/>
+          </a:solidFill>
+          <a:ln>
+            <a:noFill/>
+          </a:ln>
+          <a:effectLst/>
+        </p:spPr>
+        <p:style>
+          <a:lnRef idx="1">
+            <a:schemeClr val="accent1"/>
+          </a:lnRef>
+          <a:fillRef idx="3">
+            <a:schemeClr val="accent1"/>
+          </a:fillRef>
+          <a:effectRef idx="2">
+            <a:schemeClr val="accent1"/>
+          </a:effectRef>
+          <a:fontRef idx="minor">
+            <a:schemeClr val="lt1"/>
+          </a:fontRef>
+        </p:style>
+        <p:txBody>
+          <a:bodyPr rtlCol="0" anchor="ctr"/>
+          <a:lstStyle/>
+          <a:p>
+            <a:pPr algn="ctr"/>
+          </a:p>
+        </p:txBody>
+      </p:sp>
+      <p:sp>
+        <p:nvSpPr>
+          <p:cNvPr id="10" name="TextBox 9"/>
+          <p:cNvSpPr txBox="1"/>
+          <p:nvPr/>
+        </p:nvSpPr>
+        <p:spPr>
+          <a:xfrm>
+            <a:off x="960120" y="5394960"/>
+            <a:ext cx="10424160" cy="548640"/>
+          </a:xfrm>
+          <a:prstGeom prst="rect">
+            <a:avLst/>
+          </a:prstGeom>
+          <a:noFill/>
+        </p:spPr>
+        <p:txBody>
+          <a:bodyPr wrap="square" anchor="ctr" lIns="0" rIns="0" tIns="0" bIns="0">
+            <a:spAutoFit/>
+          </a:bodyPr>
+          <a:lstStyle/>
+          <a:p>
+            <a:pPr>
+              <a:lnSpc>
+                <a:spcPct val="113000"/>
+              </a:lnSpc>
+              <a:spcBef>
+                <a:spcPts val="0"/>
+              </a:spcBef>
+              <a:spcAft>
+                <a:spcPts val="0"/>
+              </a:spcAft>
+            </a:pPr>
+            <a:r>
+              <a:rPr sz="1600" b="1">
+                <a:solidFill>
+                  <a:srgbClr val="0E4D7A"/>
+                </a:solidFill>
+                <a:latin typeface="Noto Sans"/>
+              </a:rPr>
+              <a:t>Sering dinas: 24,9% resign, vs 8,0% tidak pernah dinas</a:t>
             </a:r>
           </a:p>
         </p:txBody>
@@ -5752,8 +7857,8 @@
         </p:nvSpPr>
         <p:spPr>
           <a:xfrm>
-            <a:off x="640080" y="457200"/>
-            <a:ext cx="10881360" cy="777240"/>
+            <a:off x="502920" y="384048"/>
+            <a:ext cx="11155680" cy="914400"/>
           </a:xfrm>
           <a:prstGeom prst="rect">
             <a:avLst/>
@@ -5761,44 +7866,798 @@
           <a:noFill/>
         </p:spPr>
         <p:txBody>
-          <a:bodyPr wrap="square">
+          <a:bodyPr wrap="square" anchor="t" lIns="0" rIns="0" tIns="0" bIns="0">
             <a:spAutoFit/>
           </a:bodyPr>
           <a:lstStyle/>
           <a:p>
             <a:pPr>
+              <a:lnSpc>
+                <a:spcPct val="113000"/>
+              </a:lnSpc>
               <a:spcBef>
                 <a:spcPts val="0"/>
               </a:spcBef>
               <a:spcAft>
-                <a:spcPts val="800"/>
+                <a:spcPts val="0"/>
               </a:spcAft>
             </a:pPr>
             <a:r>
-              <a:rPr sz="3200" b="1" i="0">
+              <a:rPr sz="3100" b="1">
                 <a:solidFill>
                   <a:srgbClr val="0B2A44"/>
                 </a:solidFill>
                 <a:latin typeface="Noto Sans"/>
               </a:rPr>
-              <a:t>Rekomendasi Retensi</a:t>
-            </a:r>
-          </a:p>
-        </p:txBody>
-      </p:sp>
-      <p:sp>
-        <p:nvSpPr>
-          <p:cNvPr id="3" name="Rectangle 2"/>
+              <a:t>Dashboard Power BI</a:t>
+            </a:r>
+          </a:p>
+        </p:txBody>
+      </p:sp>
+      <p:sp>
+        <p:nvSpPr>
+          <p:cNvPr id="3" name="Rounded Rectangle 2"/>
           <p:cNvSpPr/>
           <p:nvPr/>
         </p:nvSpPr>
         <p:spPr>
           <a:xfrm>
-            <a:off x="640080" y="1682496"/>
-            <a:ext cx="146304" cy="146304"/>
+            <a:off x="521207" y="1097280"/>
+            <a:ext cx="777240" cy="82296"/>
+          </a:xfrm>
+          <a:prstGeom prst="roundRect">
+            <a:avLst>
+              <a:gd name="adj" fmla="val 5500"/>
+            </a:avLst>
+          </a:prstGeom>
+          <a:solidFill>
+            <a:srgbClr val="E5322D"/>
+          </a:solidFill>
+          <a:ln>
+            <a:noFill/>
+          </a:ln>
+          <a:effectLst/>
+        </p:spPr>
+        <p:style>
+          <a:lnRef idx="1">
+            <a:schemeClr val="accent1"/>
+          </a:lnRef>
+          <a:fillRef idx="3">
+            <a:schemeClr val="accent1"/>
+          </a:fillRef>
+          <a:effectRef idx="2">
+            <a:schemeClr val="accent1"/>
+          </a:effectRef>
+          <a:fontRef idx="minor">
+            <a:schemeClr val="lt1"/>
+          </a:fontRef>
+        </p:style>
+        <p:txBody>
+          <a:bodyPr rtlCol="0" anchor="ctr"/>
+          <a:lstStyle/>
+          <a:p>
+            <a:pPr algn="ctr"/>
+          </a:p>
+        </p:txBody>
+      </p:sp>
+      <p:sp>
+        <p:nvSpPr>
+          <p:cNvPr id="4" name="Rounded Rectangle 3"/>
+          <p:cNvSpPr/>
+          <p:nvPr/>
+        </p:nvSpPr>
+        <p:spPr>
+          <a:xfrm>
+            <a:off x="566928" y="1481328"/>
+            <a:ext cx="6903720" cy="4160520"/>
+          </a:xfrm>
+          <a:prstGeom prst="roundRect">
+            <a:avLst>
+              <a:gd name="adj" fmla="val 5500"/>
+            </a:avLst>
+          </a:prstGeom>
+          <a:solidFill>
+            <a:srgbClr val="DFD5C0"/>
+          </a:solidFill>
+          <a:ln>
+            <a:noFill/>
+          </a:ln>
+          <a:effectLst/>
+        </p:spPr>
+        <p:style>
+          <a:lnRef idx="1">
+            <a:schemeClr val="accent1"/>
+          </a:lnRef>
+          <a:fillRef idx="3">
+            <a:schemeClr val="accent1"/>
+          </a:fillRef>
+          <a:effectRef idx="2">
+            <a:schemeClr val="accent1"/>
+          </a:effectRef>
+          <a:fontRef idx="minor">
+            <a:schemeClr val="lt1"/>
+          </a:fontRef>
+        </p:style>
+        <p:txBody>
+          <a:bodyPr rtlCol="0" anchor="ctr"/>
+          <a:lstStyle/>
+          <a:p>
+            <a:pPr algn="ctr"/>
+          </a:p>
+        </p:txBody>
+      </p:sp>
+      <p:sp>
+        <p:nvSpPr>
+          <p:cNvPr id="5" name="Rounded Rectangle 4"/>
+          <p:cNvSpPr/>
+          <p:nvPr/>
+        </p:nvSpPr>
+        <p:spPr>
+          <a:xfrm>
+            <a:off x="502920" y="1417320"/>
+            <a:ext cx="6903720" cy="4160520"/>
+          </a:xfrm>
+          <a:prstGeom prst="roundRect">
+            <a:avLst>
+              <a:gd name="adj" fmla="val 5500"/>
+            </a:avLst>
+          </a:prstGeom>
+          <a:solidFill>
+            <a:srgbClr val="FDFBF6"/>
+          </a:solidFill>
+          <a:ln>
+            <a:noFill/>
+          </a:ln>
+          <a:effectLst/>
+        </p:spPr>
+        <p:style>
+          <a:lnRef idx="1">
+            <a:schemeClr val="accent1"/>
+          </a:lnRef>
+          <a:fillRef idx="3">
+            <a:schemeClr val="accent1"/>
+          </a:fillRef>
+          <a:effectRef idx="2">
+            <a:schemeClr val="accent1"/>
+          </a:effectRef>
+          <a:fontRef idx="minor">
+            <a:schemeClr val="lt1"/>
+          </a:fontRef>
+        </p:style>
+        <p:txBody>
+          <a:bodyPr rtlCol="0" anchor="ctr"/>
+          <a:lstStyle/>
+          <a:p>
+            <a:pPr algn="ctr"/>
+          </a:p>
+        </p:txBody>
+      </p:sp>
+      <p:pic>
+        <p:nvPicPr>
+          <p:cNvPr id="6" name="Picture 5" descr="dashboard_preview_halaman1.png"/>
+          <p:cNvPicPr>
+            <a:picLocks noChangeAspect="1"/>
+          </p:cNvPicPr>
+          <p:nvPr/>
+        </p:nvPicPr>
+        <p:blipFill>
+          <a:blip r:embed="rId2"/>
+          <a:stretch>
+            <a:fillRect/>
+          </a:stretch>
+        </p:blipFill>
+        <p:spPr>
+          <a:xfrm>
+            <a:off x="704088" y="1669065"/>
+            <a:ext cx="6501383" cy="3657028"/>
           </a:xfrm>
           <a:prstGeom prst="rect">
             <a:avLst/>
+          </a:prstGeom>
+        </p:spPr>
+      </p:pic>
+      <p:sp>
+        <p:nvSpPr>
+          <p:cNvPr id="7" name="TextBox 6"/>
+          <p:cNvSpPr txBox="1"/>
+          <p:nvPr/>
+        </p:nvSpPr>
+        <p:spPr>
+          <a:xfrm>
+            <a:off x="502920" y="5669279"/>
+            <a:ext cx="6903720" cy="274320"/>
+          </a:xfrm>
+          <a:prstGeom prst="rect">
+            <a:avLst/>
+          </a:prstGeom>
+          <a:noFill/>
+        </p:spPr>
+        <p:txBody>
+          <a:bodyPr wrap="square" anchor="t" lIns="0" rIns="0" tIns="0" bIns="0">
+            <a:spAutoFit/>
+          </a:bodyPr>
+          <a:lstStyle/>
+          <a:p>
+            <a:pPr>
+              <a:lnSpc>
+                <a:spcPct val="113000"/>
+              </a:lnSpc>
+              <a:spcBef>
+                <a:spcPts val="0"/>
+              </a:spcBef>
+              <a:spcAft>
+                <a:spcPts val="0"/>
+              </a:spcAft>
+            </a:pPr>
+            <a:r>
+              <a:rPr sz="1050" b="0">
+                <a:solidFill>
+                  <a:srgbClr val="5B7186"/>
+                </a:solidFill>
+                <a:latin typeface="Noto Sans"/>
+              </a:rPr>
+              <a:t>Pratinjau halaman 1 dashboard, dirender dari kit Power BI proyek ini.</a:t>
+            </a:r>
+          </a:p>
+        </p:txBody>
+      </p:sp>
+      <p:sp>
+        <p:nvSpPr>
+          <p:cNvPr id="8" name="TextBox 7"/>
+          <p:cNvSpPr txBox="1"/>
+          <p:nvPr/>
+        </p:nvSpPr>
+        <p:spPr>
+          <a:xfrm>
+            <a:off x="7726679" y="1417320"/>
+            <a:ext cx="3959352" cy="365760"/>
+          </a:xfrm>
+          <a:prstGeom prst="rect">
+            <a:avLst/>
+          </a:prstGeom>
+          <a:noFill/>
+        </p:spPr>
+        <p:txBody>
+          <a:bodyPr wrap="square" anchor="t" lIns="0" rIns="0" tIns="0" bIns="0">
+            <a:spAutoFit/>
+          </a:bodyPr>
+          <a:lstStyle/>
+          <a:p>
+            <a:pPr>
+              <a:lnSpc>
+                <a:spcPct val="113000"/>
+              </a:lnSpc>
+              <a:spcBef>
+                <a:spcPts val="0"/>
+              </a:spcBef>
+              <a:spcAft>
+                <a:spcPts val="0"/>
+              </a:spcAft>
+            </a:pPr>
+            <a:r>
+              <a:rPr sz="1300" b="1">
+                <a:solidFill>
+                  <a:srgbClr val="0E4D7A"/>
+                </a:solidFill>
+                <a:latin typeface="Noto Sans"/>
+              </a:rPr>
+              <a:t>ISI DASHBOARD</a:t>
+            </a:r>
+          </a:p>
+        </p:txBody>
+      </p:sp>
+      <p:sp>
+        <p:nvSpPr>
+          <p:cNvPr id="9" name="Rounded Rectangle 8"/>
+          <p:cNvSpPr/>
+          <p:nvPr/>
+        </p:nvSpPr>
+        <p:spPr>
+          <a:xfrm>
+            <a:off x="7726679" y="1810512"/>
+            <a:ext cx="3959352" cy="731520"/>
+          </a:xfrm>
+          <a:prstGeom prst="roundRect">
+            <a:avLst>
+              <a:gd name="adj" fmla="val 5500"/>
+            </a:avLst>
+          </a:prstGeom>
+          <a:solidFill>
+            <a:srgbClr val="FDFBF6"/>
+          </a:solidFill>
+          <a:ln>
+            <a:noFill/>
+          </a:ln>
+          <a:effectLst/>
+        </p:spPr>
+        <p:style>
+          <a:lnRef idx="1">
+            <a:schemeClr val="accent1"/>
+          </a:lnRef>
+          <a:fillRef idx="3">
+            <a:schemeClr val="accent1"/>
+          </a:fillRef>
+          <a:effectRef idx="2">
+            <a:schemeClr val="accent1"/>
+          </a:effectRef>
+          <a:fontRef idx="minor">
+            <a:schemeClr val="lt1"/>
+          </a:fontRef>
+        </p:style>
+        <p:txBody>
+          <a:bodyPr rtlCol="0" anchor="ctr"/>
+          <a:lstStyle/>
+          <a:p>
+            <a:pPr algn="ctr"/>
+          </a:p>
+        </p:txBody>
+      </p:sp>
+      <p:sp>
+        <p:nvSpPr>
+          <p:cNvPr id="10" name="TextBox 9"/>
+          <p:cNvSpPr txBox="1"/>
+          <p:nvPr/>
+        </p:nvSpPr>
+        <p:spPr>
+          <a:xfrm>
+            <a:off x="7973568" y="1901952"/>
+            <a:ext cx="3520440" cy="566928"/>
+          </a:xfrm>
+          <a:prstGeom prst="rect">
+            <a:avLst/>
+          </a:prstGeom>
+          <a:noFill/>
+        </p:spPr>
+        <p:txBody>
+          <a:bodyPr wrap="square" anchor="t" lIns="0" rIns="0" tIns="0" bIns="0">
+            <a:spAutoFit/>
+          </a:bodyPr>
+          <a:lstStyle/>
+          <a:p>
+            <a:pPr>
+              <a:lnSpc>
+                <a:spcPct val="113000"/>
+              </a:lnSpc>
+              <a:spcBef>
+                <a:spcPts val="0"/>
+              </a:spcBef>
+              <a:spcAft>
+                <a:spcPts val="100"/>
+              </a:spcAft>
+            </a:pPr>
+            <a:r>
+              <a:rPr sz="1050" b="1">
+                <a:solidFill>
+                  <a:srgbClr val="E5322D"/>
+                </a:solidFill>
+                <a:latin typeface="Noto Sans"/>
+              </a:rPr>
+              <a:t>Halaman 1</a:t>
+            </a:r>
+          </a:p>
+          <a:p>
+            <a:pPr>
+              <a:lnSpc>
+                <a:spcPct val="113000"/>
+              </a:lnSpc>
+              <a:spcBef>
+                <a:spcPts val="0"/>
+              </a:spcBef>
+              <a:spcAft>
+                <a:spcPts val="0"/>
+              </a:spcAft>
+            </a:pPr>
+            <a:r>
+              <a:rPr sz="1300" b="1">
+                <a:solidFill>
+                  <a:srgbClr val="0B2A44"/>
+                </a:solidFill>
+                <a:latin typeface="Noto Sans"/>
+              </a:rPr>
+              <a:t>Ringkasan Eksekutif</a:t>
+            </a:r>
+          </a:p>
+        </p:txBody>
+      </p:sp>
+      <p:sp>
+        <p:nvSpPr>
+          <p:cNvPr id="11" name="Rounded Rectangle 10"/>
+          <p:cNvSpPr/>
+          <p:nvPr/>
+        </p:nvSpPr>
+        <p:spPr>
+          <a:xfrm>
+            <a:off x="7726679" y="2651760"/>
+            <a:ext cx="3959352" cy="731520"/>
+          </a:xfrm>
+          <a:prstGeom prst="roundRect">
+            <a:avLst>
+              <a:gd name="adj" fmla="val 5500"/>
+            </a:avLst>
+          </a:prstGeom>
+          <a:solidFill>
+            <a:srgbClr val="FDFBF6"/>
+          </a:solidFill>
+          <a:ln>
+            <a:noFill/>
+          </a:ln>
+          <a:effectLst/>
+        </p:spPr>
+        <p:style>
+          <a:lnRef idx="1">
+            <a:schemeClr val="accent1"/>
+          </a:lnRef>
+          <a:fillRef idx="3">
+            <a:schemeClr val="accent1"/>
+          </a:fillRef>
+          <a:effectRef idx="2">
+            <a:schemeClr val="accent1"/>
+          </a:effectRef>
+          <a:fontRef idx="minor">
+            <a:schemeClr val="lt1"/>
+          </a:fontRef>
+        </p:style>
+        <p:txBody>
+          <a:bodyPr rtlCol="0" anchor="ctr"/>
+          <a:lstStyle/>
+          <a:p>
+            <a:pPr algn="ctr"/>
+          </a:p>
+        </p:txBody>
+      </p:sp>
+      <p:sp>
+        <p:nvSpPr>
+          <p:cNvPr id="12" name="TextBox 11"/>
+          <p:cNvSpPr txBox="1"/>
+          <p:nvPr/>
+        </p:nvSpPr>
+        <p:spPr>
+          <a:xfrm>
+            <a:off x="7973568" y="2743200"/>
+            <a:ext cx="3520440" cy="566928"/>
+          </a:xfrm>
+          <a:prstGeom prst="rect">
+            <a:avLst/>
+          </a:prstGeom>
+          <a:noFill/>
+        </p:spPr>
+        <p:txBody>
+          <a:bodyPr wrap="square" anchor="t" lIns="0" rIns="0" tIns="0" bIns="0">
+            <a:spAutoFit/>
+          </a:bodyPr>
+          <a:lstStyle/>
+          <a:p>
+            <a:pPr>
+              <a:lnSpc>
+                <a:spcPct val="113000"/>
+              </a:lnSpc>
+              <a:spcBef>
+                <a:spcPts val="0"/>
+              </a:spcBef>
+              <a:spcAft>
+                <a:spcPts val="100"/>
+              </a:spcAft>
+            </a:pPr>
+            <a:r>
+              <a:rPr sz="1050" b="1">
+                <a:solidFill>
+                  <a:srgbClr val="E5322D"/>
+                </a:solidFill>
+                <a:latin typeface="Noto Sans"/>
+              </a:rPr>
+              <a:t>Halaman 2</a:t>
+            </a:r>
+          </a:p>
+          <a:p>
+            <a:pPr>
+              <a:lnSpc>
+                <a:spcPct val="113000"/>
+              </a:lnSpc>
+              <a:spcBef>
+                <a:spcPts val="0"/>
+              </a:spcBef>
+              <a:spcAft>
+                <a:spcPts val="0"/>
+              </a:spcAft>
+            </a:pPr>
+            <a:r>
+              <a:rPr sz="1300" b="1">
+                <a:solidFill>
+                  <a:srgbClr val="0B2A44"/>
+                </a:solidFill>
+                <a:latin typeface="Noto Sans"/>
+              </a:rPr>
+              <a:t>Segmen Risiko: Peran, Gaji, Usia, Masa Kerja</a:t>
+            </a:r>
+          </a:p>
+        </p:txBody>
+      </p:sp>
+      <p:sp>
+        <p:nvSpPr>
+          <p:cNvPr id="13" name="Rounded Rectangle 12"/>
+          <p:cNvSpPr/>
+          <p:nvPr/>
+        </p:nvSpPr>
+        <p:spPr>
+          <a:xfrm>
+            <a:off x="7726679" y="3493008"/>
+            <a:ext cx="3959352" cy="731520"/>
+          </a:xfrm>
+          <a:prstGeom prst="roundRect">
+            <a:avLst>
+              <a:gd name="adj" fmla="val 5500"/>
+            </a:avLst>
+          </a:prstGeom>
+          <a:solidFill>
+            <a:srgbClr val="FDFBF6"/>
+          </a:solidFill>
+          <a:ln>
+            <a:noFill/>
+          </a:ln>
+          <a:effectLst/>
+        </p:spPr>
+        <p:style>
+          <a:lnRef idx="1">
+            <a:schemeClr val="accent1"/>
+          </a:lnRef>
+          <a:fillRef idx="3">
+            <a:schemeClr val="accent1"/>
+          </a:fillRef>
+          <a:effectRef idx="2">
+            <a:schemeClr val="accent1"/>
+          </a:effectRef>
+          <a:fontRef idx="minor">
+            <a:schemeClr val="lt1"/>
+          </a:fontRef>
+        </p:style>
+        <p:txBody>
+          <a:bodyPr rtlCol="0" anchor="ctr"/>
+          <a:lstStyle/>
+          <a:p>
+            <a:pPr algn="ctr"/>
+          </a:p>
+        </p:txBody>
+      </p:sp>
+      <p:sp>
+        <p:nvSpPr>
+          <p:cNvPr id="14" name="TextBox 13"/>
+          <p:cNvSpPr txBox="1"/>
+          <p:nvPr/>
+        </p:nvSpPr>
+        <p:spPr>
+          <a:xfrm>
+            <a:off x="7973568" y="3584448"/>
+            <a:ext cx="3520440" cy="566928"/>
+          </a:xfrm>
+          <a:prstGeom prst="rect">
+            <a:avLst/>
+          </a:prstGeom>
+          <a:noFill/>
+        </p:spPr>
+        <p:txBody>
+          <a:bodyPr wrap="square" anchor="t" lIns="0" rIns="0" tIns="0" bIns="0">
+            <a:spAutoFit/>
+          </a:bodyPr>
+          <a:lstStyle/>
+          <a:p>
+            <a:pPr>
+              <a:lnSpc>
+                <a:spcPct val="113000"/>
+              </a:lnSpc>
+              <a:spcBef>
+                <a:spcPts val="0"/>
+              </a:spcBef>
+              <a:spcAft>
+                <a:spcPts val="100"/>
+              </a:spcAft>
+            </a:pPr>
+            <a:r>
+              <a:rPr sz="1050" b="1">
+                <a:solidFill>
+                  <a:srgbClr val="E5322D"/>
+                </a:solidFill>
+                <a:latin typeface="Noto Sans"/>
+              </a:rPr>
+              <a:t>Halaman 3</a:t>
+            </a:r>
+          </a:p>
+          <a:p>
+            <a:pPr>
+              <a:lnSpc>
+                <a:spcPct val="113000"/>
+              </a:lnSpc>
+              <a:spcBef>
+                <a:spcPts val="0"/>
+              </a:spcBef>
+              <a:spcAft>
+                <a:spcPts val="0"/>
+              </a:spcAft>
+            </a:pPr>
+            <a:r>
+              <a:rPr sz="1300" b="1">
+                <a:solidFill>
+                  <a:srgbClr val="0B2A44"/>
+                </a:solidFill>
+                <a:latin typeface="Noto Sans"/>
+              </a:rPr>
+              <a:t>Kepuasan dan Kondisi Kerja</a:t>
+            </a:r>
+          </a:p>
+        </p:txBody>
+      </p:sp>
+      <p:sp>
+        <p:nvSpPr>
+          <p:cNvPr id="15" name="Rounded Rectangle 14"/>
+          <p:cNvSpPr/>
+          <p:nvPr/>
+        </p:nvSpPr>
+        <p:spPr>
+          <a:xfrm>
+            <a:off x="7726679" y="4334256"/>
+            <a:ext cx="3959352" cy="731520"/>
+          </a:xfrm>
+          <a:prstGeom prst="roundRect">
+            <a:avLst>
+              <a:gd name="adj" fmla="val 5500"/>
+            </a:avLst>
+          </a:prstGeom>
+          <a:solidFill>
+            <a:srgbClr val="FDFBF6"/>
+          </a:solidFill>
+          <a:ln>
+            <a:noFill/>
+          </a:ln>
+          <a:effectLst/>
+        </p:spPr>
+        <p:style>
+          <a:lnRef idx="1">
+            <a:schemeClr val="accent1"/>
+          </a:lnRef>
+          <a:fillRef idx="3">
+            <a:schemeClr val="accent1"/>
+          </a:fillRef>
+          <a:effectRef idx="2">
+            <a:schemeClr val="accent1"/>
+          </a:effectRef>
+          <a:fontRef idx="minor">
+            <a:schemeClr val="lt1"/>
+          </a:fontRef>
+        </p:style>
+        <p:txBody>
+          <a:bodyPr rtlCol="0" anchor="ctr"/>
+          <a:lstStyle/>
+          <a:p>
+            <a:pPr algn="ctr"/>
+          </a:p>
+        </p:txBody>
+      </p:sp>
+      <p:sp>
+        <p:nvSpPr>
+          <p:cNvPr id="16" name="TextBox 15"/>
+          <p:cNvSpPr txBox="1"/>
+          <p:nvPr/>
+        </p:nvSpPr>
+        <p:spPr>
+          <a:xfrm>
+            <a:off x="7973568" y="4425696"/>
+            <a:ext cx="3520440" cy="566928"/>
+          </a:xfrm>
+          <a:prstGeom prst="rect">
+            <a:avLst/>
+          </a:prstGeom>
+          <a:noFill/>
+        </p:spPr>
+        <p:txBody>
+          <a:bodyPr wrap="square" anchor="t" lIns="0" rIns="0" tIns="0" bIns="0">
+            <a:spAutoFit/>
+          </a:bodyPr>
+          <a:lstStyle/>
+          <a:p>
+            <a:pPr>
+              <a:lnSpc>
+                <a:spcPct val="113000"/>
+              </a:lnSpc>
+              <a:spcBef>
+                <a:spcPts val="0"/>
+              </a:spcBef>
+              <a:spcAft>
+                <a:spcPts val="100"/>
+              </a:spcAft>
+            </a:pPr>
+            <a:r>
+              <a:rPr sz="1050" b="1">
+                <a:solidFill>
+                  <a:srgbClr val="E5322D"/>
+                </a:solidFill>
+                <a:latin typeface="Noto Sans"/>
+              </a:rPr>
+              <a:t>Halaman 4</a:t>
+            </a:r>
+          </a:p>
+          <a:p>
+            <a:pPr>
+              <a:lnSpc>
+                <a:spcPct val="113000"/>
+              </a:lnSpc>
+              <a:spcBef>
+                <a:spcPts val="0"/>
+              </a:spcBef>
+              <a:spcAft>
+                <a:spcPts val="0"/>
+              </a:spcAft>
+            </a:pPr>
+            <a:r>
+              <a:rPr sz="1300" b="1">
+                <a:solidFill>
+                  <a:srgbClr val="0B2A44"/>
+                </a:solidFill>
+                <a:latin typeface="Noto Sans"/>
+              </a:rPr>
+              <a:t>Profil, Perbandingan Gaji, dan Metodologi</a:t>
+            </a:r>
+          </a:p>
+        </p:txBody>
+      </p:sp>
+      <p:sp>
+        <p:nvSpPr>
+          <p:cNvPr id="17" name="TextBox 16"/>
+          <p:cNvSpPr txBox="1"/>
+          <p:nvPr/>
+        </p:nvSpPr>
+        <p:spPr>
+          <a:xfrm>
+            <a:off x="7726679" y="5212080"/>
+            <a:ext cx="3959352" cy="914400"/>
+          </a:xfrm>
+          <a:prstGeom prst="rect">
+            <a:avLst/>
+          </a:prstGeom>
+          <a:noFill/>
+        </p:spPr>
+        <p:txBody>
+          <a:bodyPr wrap="square" anchor="t" lIns="0" rIns="0" tIns="0" bIns="0">
+            <a:spAutoFit/>
+          </a:bodyPr>
+          <a:lstStyle/>
+          <a:p>
+            <a:pPr>
+              <a:lnSpc>
+                <a:spcPct val="113000"/>
+              </a:lnSpc>
+              <a:spcBef>
+                <a:spcPts val="0"/>
+              </a:spcBef>
+              <a:spcAft>
+                <a:spcPts val="0"/>
+              </a:spcAft>
+            </a:pPr>
+            <a:r>
+              <a:rPr sz="1200" b="0">
+                <a:solidFill>
+                  <a:srgbClr val="0B2A44"/>
+                </a:solidFill>
+                <a:latin typeface="Noto Sans"/>
+              </a:rPr>
+              <a:t>Satu tabel fakta berisi 1.470 karyawan dan tiga dimensi; angka KPI dashboard cocok dengan tabel verifikasi pada kit.</a:t>
+            </a:r>
+          </a:p>
+        </p:txBody>
+      </p:sp>
+      <p:sp>
+        <p:nvSpPr>
+          <p:cNvPr id="18" name="Rounded Rectangle 17"/>
+          <p:cNvSpPr/>
+          <p:nvPr/>
+        </p:nvSpPr>
+        <p:spPr>
+          <a:xfrm>
+            <a:off x="502920" y="5961888"/>
+            <a:ext cx="11183112" cy="603504"/>
+          </a:xfrm>
+          <a:prstGeom prst="roundRect">
+            <a:avLst>
+              <a:gd name="adj" fmla="val 5500"/>
+            </a:avLst>
           </a:prstGeom>
           <a:solidFill>
             <a:srgbClr val="0E4D7A"/>
@@ -5832,14 +8691,14 @@
       </p:sp>
       <p:sp>
         <p:nvSpPr>
-          <p:cNvPr id="4" name="TextBox 3"/>
+          <p:cNvPr id="19" name="TextBox 18"/>
           <p:cNvSpPr txBox="1"/>
           <p:nvPr/>
         </p:nvSpPr>
         <p:spPr>
           <a:xfrm>
-            <a:off x="1051560" y="1600200"/>
-            <a:ext cx="10424160" cy="777240"/>
+            <a:off x="777240" y="5961888"/>
+            <a:ext cx="10698480" cy="603504"/>
           </a:xfrm>
           <a:prstGeom prst="rect">
             <a:avLst/>
@@ -5847,12 +8706,15 @@
           <a:noFill/>
         </p:spPr>
         <p:txBody>
-          <a:bodyPr wrap="square">
+          <a:bodyPr wrap="square" anchor="ctr" lIns="0" rIns="0" tIns="0" bIns="0">
             <a:spAutoFit/>
           </a:bodyPr>
           <a:lstStyle/>
           <a:p>
             <a:pPr>
+              <a:lnSpc>
+                <a:spcPct val="110000"/>
+              </a:lnSpc>
               <a:spcBef>
                 <a:spcPts val="0"/>
               </a:spcBef>
@@ -5861,357 +8723,22 @@
               </a:spcAft>
             </a:pPr>
             <a:r>
-              <a:rPr sz="1700" b="0" i="0">
-                <a:solidFill>
-                  <a:srgbClr val="0B2A44"/>
+              <a:rPr sz="1250" b="1">
+                <a:solidFill>
+                  <a:srgbClr val="FFFFFF"/>
                 </a:solidFill>
                 <a:latin typeface="Noto Sans"/>
               </a:rPr>
-              <a:t>Bangun program onboarding 2 tahun pertama yang terstruktur: buddy, mentor, dan check in karier berkala</a:t>
-            </a:r>
-          </a:p>
-        </p:txBody>
-      </p:sp>
-      <p:sp>
-        <p:nvSpPr>
-          <p:cNvPr id="5" name="Rectangle 4"/>
-          <p:cNvSpPr/>
-          <p:nvPr/>
-        </p:nvSpPr>
-        <p:spPr>
-          <a:xfrm>
-            <a:off x="640080" y="2615184"/>
-            <a:ext cx="146304" cy="146304"/>
-          </a:xfrm>
-          <a:prstGeom prst="rect">
-            <a:avLst/>
-          </a:prstGeom>
-          <a:solidFill>
-            <a:srgbClr val="0E4D7A"/>
-          </a:solidFill>
-          <a:ln>
-            <a:noFill/>
-          </a:ln>
-          <a:effectLst/>
-        </p:spPr>
-        <p:style>
-          <a:lnRef idx="1">
-            <a:schemeClr val="accent1"/>
-          </a:lnRef>
-          <a:fillRef idx="3">
-            <a:schemeClr val="accent1"/>
-          </a:fillRef>
-          <a:effectRef idx="2">
-            <a:schemeClr val="accent1"/>
-          </a:effectRef>
-          <a:fontRef idx="minor">
-            <a:schemeClr val="lt1"/>
-          </a:fontRef>
-        </p:style>
-        <p:txBody>
-          <a:bodyPr rtlCol="0" anchor="ctr"/>
-          <a:lstStyle/>
-          <a:p>
-            <a:pPr algn="ctr"/>
-          </a:p>
-        </p:txBody>
-      </p:sp>
-      <p:sp>
-        <p:nvSpPr>
-          <p:cNvPr id="6" name="TextBox 5"/>
-          <p:cNvSpPr txBox="1"/>
-          <p:nvPr/>
-        </p:nvSpPr>
-        <p:spPr>
-          <a:xfrm>
-            <a:off x="1051560" y="2532888"/>
-            <a:ext cx="10424160" cy="777240"/>
-          </a:xfrm>
-          <a:prstGeom prst="rect">
-            <a:avLst/>
-          </a:prstGeom>
-          <a:noFill/>
-        </p:spPr>
-        <p:txBody>
-          <a:bodyPr wrap="square">
-            <a:spAutoFit/>
-          </a:bodyPr>
-          <a:lstStyle/>
-          <a:p>
-            <a:pPr>
-              <a:spcBef>
-                <a:spcPts val="0"/>
-              </a:spcBef>
-              <a:spcAft>
-                <a:spcPts val="0"/>
-              </a:spcAft>
-            </a:pPr>
-            <a:r>
-              <a:rPr sz="1700" b="0" i="0">
-                <a:solidFill>
-                  <a:srgbClr val="0B2A44"/>
+              <a:t>HR-Attrition-Analytics.pbix</a:t>
+            </a:r>
+            <a:r>
+              <a:rPr sz="1250" b="0">
+                <a:solidFill>
+                  <a:srgbClr val="DCE9F2"/>
                 </a:solidFill>
                 <a:latin typeface="Noto Sans"/>
               </a:rPr>
-              <a:t>Kelola lembur dengan ketat plus cuti pengganti, prioritaskan tim Sales dan laboratorium</a:t>
-            </a:r>
-          </a:p>
-        </p:txBody>
-      </p:sp>
-      <p:sp>
-        <p:nvSpPr>
-          <p:cNvPr id="7" name="Rectangle 6"/>
-          <p:cNvSpPr/>
-          <p:nvPr/>
-        </p:nvSpPr>
-        <p:spPr>
-          <a:xfrm>
-            <a:off x="640080" y="3547872"/>
-            <a:ext cx="146304" cy="146304"/>
-          </a:xfrm>
-          <a:prstGeom prst="rect">
-            <a:avLst/>
-          </a:prstGeom>
-          <a:solidFill>
-            <a:srgbClr val="0E4D7A"/>
-          </a:solidFill>
-          <a:ln>
-            <a:noFill/>
-          </a:ln>
-          <a:effectLst/>
-        </p:spPr>
-        <p:style>
-          <a:lnRef idx="1">
-            <a:schemeClr val="accent1"/>
-          </a:lnRef>
-          <a:fillRef idx="3">
-            <a:schemeClr val="accent1"/>
-          </a:fillRef>
-          <a:effectRef idx="2">
-            <a:schemeClr val="accent1"/>
-          </a:effectRef>
-          <a:fontRef idx="minor">
-            <a:schemeClr val="lt1"/>
-          </a:fontRef>
-        </p:style>
-        <p:txBody>
-          <a:bodyPr rtlCol="0" anchor="ctr"/>
-          <a:lstStyle/>
-          <a:p>
-            <a:pPr algn="ctr"/>
-          </a:p>
-        </p:txBody>
-      </p:sp>
-      <p:sp>
-        <p:nvSpPr>
-          <p:cNvPr id="8" name="TextBox 7"/>
-          <p:cNvSpPr txBox="1"/>
-          <p:nvPr/>
-        </p:nvSpPr>
-        <p:spPr>
-          <a:xfrm>
-            <a:off x="1051560" y="3465576"/>
-            <a:ext cx="10424160" cy="777240"/>
-          </a:xfrm>
-          <a:prstGeom prst="rect">
-            <a:avLst/>
-          </a:prstGeom>
-          <a:noFill/>
-        </p:spPr>
-        <p:txBody>
-          <a:bodyPr wrap="square">
-            <a:spAutoFit/>
-          </a:bodyPr>
-          <a:lstStyle/>
-          <a:p>
-            <a:pPr>
-              <a:spcBef>
-                <a:spcPts val="0"/>
-              </a:spcBef>
-              <a:spcAft>
-                <a:spcPts val="0"/>
-              </a:spcAft>
-            </a:pPr>
-            <a:r>
-              <a:rPr sz="1700" b="0" i="0">
-                <a:solidFill>
-                  <a:srgbClr val="0B2A44"/>
-                </a:solidFill>
-                <a:latin typeface="Noto Sans"/>
-              </a:rPr>
-              <a:t>Tinjau ulang gaji, bonus, dan jalur promosi untuk Sales Representative dan Laboratory Technician</a:t>
-            </a:r>
-          </a:p>
-        </p:txBody>
-      </p:sp>
-      <p:sp>
-        <p:nvSpPr>
-          <p:cNvPr id="9" name="Rectangle 8"/>
-          <p:cNvSpPr/>
-          <p:nvPr/>
-        </p:nvSpPr>
-        <p:spPr>
-          <a:xfrm>
-            <a:off x="640080" y="4480560"/>
-            <a:ext cx="146304" cy="146304"/>
-          </a:xfrm>
-          <a:prstGeom prst="rect">
-            <a:avLst/>
-          </a:prstGeom>
-          <a:solidFill>
-            <a:srgbClr val="0E4D7A"/>
-          </a:solidFill>
-          <a:ln>
-            <a:noFill/>
-          </a:ln>
-          <a:effectLst/>
-        </p:spPr>
-        <p:style>
-          <a:lnRef idx="1">
-            <a:schemeClr val="accent1"/>
-          </a:lnRef>
-          <a:fillRef idx="3">
-            <a:schemeClr val="accent1"/>
-          </a:fillRef>
-          <a:effectRef idx="2">
-            <a:schemeClr val="accent1"/>
-          </a:effectRef>
-          <a:fontRef idx="minor">
-            <a:schemeClr val="lt1"/>
-          </a:fontRef>
-        </p:style>
-        <p:txBody>
-          <a:bodyPr rtlCol="0" anchor="ctr"/>
-          <a:lstStyle/>
-          <a:p>
-            <a:pPr algn="ctr"/>
-          </a:p>
-        </p:txBody>
-      </p:sp>
-      <p:sp>
-        <p:nvSpPr>
-          <p:cNvPr id="10" name="TextBox 9"/>
-          <p:cNvSpPr txBox="1"/>
-          <p:nvPr/>
-        </p:nvSpPr>
-        <p:spPr>
-          <a:xfrm>
-            <a:off x="1051560" y="4398264"/>
-            <a:ext cx="10424160" cy="777240"/>
-          </a:xfrm>
-          <a:prstGeom prst="rect">
-            <a:avLst/>
-          </a:prstGeom>
-          <a:noFill/>
-        </p:spPr>
-        <p:txBody>
-          <a:bodyPr wrap="square">
-            <a:spAutoFit/>
-          </a:bodyPr>
-          <a:lstStyle/>
-          <a:p>
-            <a:pPr>
-              <a:spcBef>
-                <a:spcPts val="0"/>
-              </a:spcBef>
-              <a:spcAft>
-                <a:spcPts val="0"/>
-              </a:spcAft>
-            </a:pPr>
-            <a:r>
-              <a:rPr sz="1700" b="0" i="0">
-                <a:solidFill>
-                  <a:srgbClr val="0B2A44"/>
-                </a:solidFill>
-                <a:latin typeface="Noto Sans"/>
-              </a:rPr>
-              <a:t>Tawarkan fleksibilitas hybrid, tunjangan transportasi, dan rotasi jadwal dinas untuk yang jaraknya jauh</a:t>
-            </a:r>
-          </a:p>
-        </p:txBody>
-      </p:sp>
-      <p:sp>
-        <p:nvSpPr>
-          <p:cNvPr id="11" name="Rectangle 10"/>
-          <p:cNvSpPr/>
-          <p:nvPr/>
-        </p:nvSpPr>
-        <p:spPr>
-          <a:xfrm>
-            <a:off x="640080" y="5413248"/>
-            <a:ext cx="146304" cy="146304"/>
-          </a:xfrm>
-          <a:prstGeom prst="rect">
-            <a:avLst/>
-          </a:prstGeom>
-          <a:solidFill>
-            <a:srgbClr val="0E4D7A"/>
-          </a:solidFill>
-          <a:ln>
-            <a:noFill/>
-          </a:ln>
-          <a:effectLst/>
-        </p:spPr>
-        <p:style>
-          <a:lnRef idx="1">
-            <a:schemeClr val="accent1"/>
-          </a:lnRef>
-          <a:fillRef idx="3">
-            <a:schemeClr val="accent1"/>
-          </a:fillRef>
-          <a:effectRef idx="2">
-            <a:schemeClr val="accent1"/>
-          </a:effectRef>
-          <a:fontRef idx="minor">
-            <a:schemeClr val="lt1"/>
-          </a:fontRef>
-        </p:style>
-        <p:txBody>
-          <a:bodyPr rtlCol="0" anchor="ctr"/>
-          <a:lstStyle/>
-          <a:p>
-            <a:pPr algn="ctr"/>
-          </a:p>
-        </p:txBody>
-      </p:sp>
-      <p:sp>
-        <p:nvSpPr>
-          <p:cNvPr id="12" name="TextBox 11"/>
-          <p:cNvSpPr txBox="1"/>
-          <p:nvPr/>
-        </p:nvSpPr>
-        <p:spPr>
-          <a:xfrm>
-            <a:off x="1051560" y="5330952"/>
-            <a:ext cx="10424160" cy="777240"/>
-          </a:xfrm>
-          <a:prstGeom prst="rect">
-            <a:avLst/>
-          </a:prstGeom>
-          <a:noFill/>
-        </p:spPr>
-        <p:txBody>
-          <a:bodyPr wrap="square">
-            <a:spAutoFit/>
-          </a:bodyPr>
-          <a:lstStyle/>
-          <a:p>
-            <a:pPr>
-              <a:spcBef>
-                <a:spcPts val="0"/>
-              </a:spcBef>
-              <a:spcAft>
-                <a:spcPts val="0"/>
-              </a:spcAft>
-            </a:pPr>
-            <a:r>
-              <a:rPr sz="1700" b="0" i="0">
-                <a:solidFill>
-                  <a:srgbClr val="0B2A44"/>
-                </a:solidFill>
-                <a:latin typeface="Noto Sans"/>
-              </a:rPr>
-              <a:t>Jadikan survei kepuasan sebagai pemicu intervensi dini per tim sebelum terlambat</a:t>
+              <a:t>: star schema, measure DAX terverifikasi, layout 4 halaman, dan panduan rakit ada di folder powerbi pada repo ini.</a:t>
             </a:r>
           </a:p>
         </p:txBody>
